--- a/Presentacion_SUMO.pptx
+++ b/Presentacion_SUMO.pptx
@@ -5,25 +5,26 @@
     <p:sldMasterId id="2147483648" r:id="rId1"/>
   </p:sldMasterIdLst>
   <p:notesMasterIdLst>
-    <p:notesMasterId r:id="rId18"/>
+    <p:notesMasterId r:id="rId19"/>
   </p:notesMasterIdLst>
   <p:sldIdLst>
     <p:sldId id="256" r:id="rId2"/>
     <p:sldId id="273" r:id="rId3"/>
     <p:sldId id="257" r:id="rId4"/>
-    <p:sldId id="274" r:id="rId5"/>
-    <p:sldId id="258" r:id="rId6"/>
-    <p:sldId id="263" r:id="rId7"/>
-    <p:sldId id="259" r:id="rId8"/>
-    <p:sldId id="260" r:id="rId9"/>
+    <p:sldId id="258" r:id="rId5"/>
+    <p:sldId id="263" r:id="rId6"/>
+    <p:sldId id="259" r:id="rId7"/>
+    <p:sldId id="260" r:id="rId8"/>
+    <p:sldId id="276" r:id="rId9"/>
     <p:sldId id="264" r:id="rId10"/>
-    <p:sldId id="270" r:id="rId11"/>
-    <p:sldId id="265" r:id="rId12"/>
-    <p:sldId id="271" r:id="rId13"/>
-    <p:sldId id="261" r:id="rId14"/>
-    <p:sldId id="262" r:id="rId15"/>
-    <p:sldId id="275" r:id="rId16"/>
-    <p:sldId id="266" r:id="rId17"/>
+    <p:sldId id="274" r:id="rId11"/>
+    <p:sldId id="270" r:id="rId12"/>
+    <p:sldId id="265" r:id="rId13"/>
+    <p:sldId id="271" r:id="rId14"/>
+    <p:sldId id="261" r:id="rId15"/>
+    <p:sldId id="262" r:id="rId16"/>
+    <p:sldId id="275" r:id="rId17"/>
+    <p:sldId id="266" r:id="rId18"/>
   </p:sldIdLst>
   <p:sldSz cx="9144000" cy="5143500" type="screen16x9"/>
   <p:notesSz cx="5143500" cy="9144000"/>
@@ -410,7 +411,7 @@
     </p:spTree>
     <p:extLst>
       <p:ext uri="{BB962C8B-B14F-4D97-AF65-F5344CB8AC3E}">
-        <p14:creationId xmlns:p14="http://schemas.microsoft.com/office/powerpoint/2010/main" val="3699744964"/>
+        <p14:creationId xmlns:p14="http://schemas.microsoft.com/office/powerpoint/2010/main" val="2800280822"/>
       </p:ext>
     </p:extLst>
   </p:cSld>
@@ -494,7 +495,7 @@
     </p:spTree>
     <p:extLst>
       <p:ext uri="{BB962C8B-B14F-4D97-AF65-F5344CB8AC3E}">
-        <p14:creationId xmlns:p14="http://schemas.microsoft.com/office/powerpoint/2010/main" val="1024086991"/>
+        <p14:creationId xmlns:p14="http://schemas.microsoft.com/office/powerpoint/2010/main" val="3699744964"/>
       </p:ext>
     </p:extLst>
   </p:cSld>
@@ -578,7 +579,7 @@
     </p:spTree>
     <p:extLst>
       <p:ext uri="{BB962C8B-B14F-4D97-AF65-F5344CB8AC3E}">
-        <p14:creationId xmlns:p14="http://schemas.microsoft.com/office/powerpoint/2010/main" val="1841574871"/>
+        <p14:creationId xmlns:p14="http://schemas.microsoft.com/office/powerpoint/2010/main" val="1024086991"/>
       </p:ext>
     </p:extLst>
   </p:cSld>
@@ -662,7 +663,7 @@
     </p:spTree>
     <p:extLst>
       <p:ext uri="{BB962C8B-B14F-4D97-AF65-F5344CB8AC3E}">
-        <p14:creationId xmlns:p14="http://schemas.microsoft.com/office/powerpoint/2010/main" val="1024086991"/>
+        <p14:creationId xmlns:p14="http://schemas.microsoft.com/office/powerpoint/2010/main" val="1841574871"/>
       </p:ext>
     </p:extLst>
   </p:cSld>
@@ -830,7 +831,7 @@
     </p:spTree>
     <p:extLst>
       <p:ext uri="{BB962C8B-B14F-4D97-AF65-F5344CB8AC3E}">
-        <p14:creationId xmlns:p14="http://schemas.microsoft.com/office/powerpoint/2010/main" val="380121271"/>
+        <p14:creationId xmlns:p14="http://schemas.microsoft.com/office/powerpoint/2010/main" val="1024086991"/>
       </p:ext>
     </p:extLst>
   </p:cSld>
@@ -906,6 +907,90 @@
             <a:fld id="{F7021451-1387-4CA6-816F-3879F97B5CBC}" type="slidenum">
               <a:rPr lang="en-US"/>
               <a:t>16</a:t>
+            </a:fld>
+            <a:endParaRPr lang="en-US"/>
+          </a:p>
+        </p:txBody>
+      </p:sp>
+    </p:spTree>
+    <p:extLst>
+      <p:ext uri="{BB962C8B-B14F-4D97-AF65-F5344CB8AC3E}">
+        <p14:creationId xmlns:p14="http://schemas.microsoft.com/office/powerpoint/2010/main" val="380121271"/>
+      </p:ext>
+    </p:extLst>
+  </p:cSld>
+  <p:clrMapOvr>
+    <a:masterClrMapping/>
+  </p:clrMapOvr>
+</p:notes>
+</file>
+
+<file path=ppt/notesSlides/notesSlide17.xml><?xml version="1.0" encoding="utf-8"?>
+<p:notes xmlns:a="http://schemas.openxmlformats.org/drawingml/2006/main" xmlns:r="http://schemas.openxmlformats.org/officeDocument/2006/relationships" xmlns:p="http://schemas.openxmlformats.org/presentationml/2006/main">
+  <p:cSld>
+    <p:spTree>
+      <p:nvGrpSpPr>
+        <p:cNvPr id="1" name=""/>
+        <p:cNvGrpSpPr/>
+        <p:nvPr/>
+      </p:nvGrpSpPr>
+      <p:grpSpPr>
+        <a:xfrm>
+          <a:off x="0" y="0"/>
+          <a:ext cx="0" cy="0"/>
+          <a:chOff x="0" y="0"/>
+          <a:chExt cx="0" cy="0"/>
+        </a:xfrm>
+      </p:grpSpPr>
+      <p:sp>
+        <p:nvSpPr>
+          <p:cNvPr id="2" name="Slide Image Placeholder 1"/>
+          <p:cNvSpPr>
+            <a:spLocks noGrp="1" noRot="1" noChangeAspect="1"/>
+          </p:cNvSpPr>
+          <p:nvPr>
+            <p:ph type="sldImg"/>
+          </p:nvPr>
+        </p:nvSpPr>
+        <p:spPr/>
+      </p:sp>
+      <p:sp>
+        <p:nvSpPr>
+          <p:cNvPr id="3" name="Notes Placeholder 2"/>
+          <p:cNvSpPr>
+            <a:spLocks noGrp="1"/>
+          </p:cNvSpPr>
+          <p:nvPr>
+            <p:ph type="body" idx="1"/>
+          </p:nvPr>
+        </p:nvSpPr>
+        <p:spPr/>
+        <p:txBody>
+          <a:bodyPr/>
+          <a:lstStyle/>
+          <a:p>
+            <a:endParaRPr lang="en-US" dirty="0"/>
+          </a:p>
+        </p:txBody>
+      </p:sp>
+      <p:sp>
+        <p:nvSpPr>
+          <p:cNvPr id="4" name="Slide Number Placeholder 3"/>
+          <p:cNvSpPr>
+            <a:spLocks noGrp="1"/>
+          </p:cNvSpPr>
+          <p:nvPr>
+            <p:ph type="sldNum" sz="quarter" idx="10"/>
+          </p:nvPr>
+        </p:nvSpPr>
+        <p:spPr/>
+        <p:txBody>
+          <a:bodyPr/>
+          <a:lstStyle/>
+          <a:p>
+            <a:fld id="{F7021451-1387-4CA6-816F-3879F97B5CBC}" type="slidenum">
+              <a:rPr lang="en-US"/>
+              <a:t>17</a:t>
             </a:fld>
             <a:endParaRPr lang="en-US"/>
           </a:p>
@@ -1166,7 +1251,7 @@
     </p:spTree>
     <p:extLst>
       <p:ext uri="{BB962C8B-B14F-4D97-AF65-F5344CB8AC3E}">
-        <p14:creationId xmlns:p14="http://schemas.microsoft.com/office/powerpoint/2010/main" val="2800280822"/>
+        <p14:creationId xmlns:p14="http://schemas.microsoft.com/office/powerpoint/2010/main" val="1024086991"/>
       </p:ext>
     </p:extLst>
   </p:cSld>
@@ -1502,7 +1587,7 @@
     </p:spTree>
     <p:extLst>
       <p:ext uri="{BB962C8B-B14F-4D97-AF65-F5344CB8AC3E}">
-        <p14:creationId xmlns:p14="http://schemas.microsoft.com/office/powerpoint/2010/main" val="1024086991"/>
+        <p14:creationId xmlns:p14="http://schemas.microsoft.com/office/powerpoint/2010/main" val="3639081257"/>
       </p:ext>
     </p:extLst>
   </p:cSld>
@@ -2063,12 +2148,381 @@
           <a:chExt cx="0" cy="0"/>
         </a:xfrm>
       </p:grpSpPr>
+      <p:sp>
+        <p:nvSpPr>
+          <p:cNvPr id="2" name="Shape 0"/>
+          <p:cNvSpPr/>
+          <p:nvPr/>
+        </p:nvSpPr>
+        <p:spPr>
+          <a:xfrm>
+            <a:off x="0" y="0"/>
+            <a:ext cx="9144000" cy="822960"/>
+          </a:xfrm>
+          <a:prstGeom prst="rect">
+            <a:avLst/>
+          </a:prstGeom>
+          <a:solidFill>
+            <a:srgbClr val="1F3A5F"/>
+          </a:solidFill>
+          <a:ln/>
+        </p:spPr>
+      </p:sp>
+      <p:sp>
+        <p:nvSpPr>
+          <p:cNvPr id="3" name="Text 1"/>
+          <p:cNvSpPr txBox="1"/>
+          <p:nvPr/>
+        </p:nvSpPr>
+        <p:spPr>
+          <a:xfrm>
+            <a:off x="457200" y="91440"/>
+            <a:ext cx="8229600" cy="640080"/>
+          </a:xfrm>
+          <a:prstGeom prst="rect">
+            <a:avLst/>
+          </a:prstGeom>
+          <a:noFill/>
+          <a:ln/>
+        </p:spPr>
+        <p:txBody>
+          <a:bodyPr wrap="square" lIns="0" tIns="0" rIns="0" bIns="0" rtlCol="0" anchor="ctr"/>
+          <a:lstStyle/>
+          <a:p>
+            <a:pPr marL="0" indent="0">
+              <a:buNone/>
+            </a:pPr>
+            <a:r>
+              <a:rPr lang="en-US" sz="2600" b="1" dirty="0" err="1">
+                <a:solidFill>
+                  <a:srgbClr val="FFFFFF"/>
+                </a:solidFill>
+              </a:rPr>
+              <a:t>Instalación</a:t>
+            </a:r>
+            <a:endParaRPr lang="en-US" sz="2600" dirty="0"/>
+          </a:p>
+        </p:txBody>
+      </p:sp>
+      <p:sp>
+        <p:nvSpPr>
+          <p:cNvPr id="4" name="Text 2"/>
+          <p:cNvSpPr txBox="1"/>
+          <p:nvPr/>
+        </p:nvSpPr>
+        <p:spPr>
+          <a:xfrm>
+            <a:off x="502919" y="914400"/>
+            <a:ext cx="8288383" cy="3905794"/>
+          </a:xfrm>
+          <a:prstGeom prst="rect">
+            <a:avLst/>
+          </a:prstGeom>
+          <a:noFill/>
+          <a:ln w="12700">
+            <a:solidFill>
+              <a:srgbClr val="D5DDE6"/>
+            </a:solidFill>
+          </a:ln>
+        </p:spPr>
+        <p:txBody>
+          <a:bodyPr wrap="square" rtlCol="0" anchor="t"/>
+          <a:lstStyle/>
+          <a:p>
+            <a:pPr marL="342900" indent="-342900">
+              <a:buSzPct val="100000"/>
+              <a:buFontTx/>
+              <a:buChar char="•"/>
+            </a:pPr>
+            <a:r>
+              <a:rPr lang="es-ES" sz="2000" dirty="0">
+                <a:solidFill>
+                  <a:srgbClr val="4A5568"/>
+                </a:solidFill>
+              </a:rPr>
+              <a:t>Ruta de instalación</a:t>
+            </a:r>
+          </a:p>
+          <a:p>
+            <a:pPr marL="800100" lvl="1" indent="-342900">
+              <a:buSzPct val="100000"/>
+              <a:buFontTx/>
+              <a:buChar char="•"/>
+            </a:pPr>
+            <a:r>
+              <a:rPr lang="en-US" sz="2000" dirty="0">
+                <a:hlinkClick r:id="rId3"/>
+              </a:rPr>
+              <a:t>https://sumo.dlr.de/docs/Downloads.php</a:t>
+            </a:r>
+            <a:endParaRPr lang="en-US" sz="2000" dirty="0"/>
+          </a:p>
+          <a:p>
+            <a:pPr marL="342900" indent="-342900">
+              <a:buSzPct val="100000"/>
+              <a:buFontTx/>
+              <a:buChar char="•"/>
+            </a:pPr>
+            <a:endParaRPr lang="en-US" sz="2000" dirty="0"/>
+          </a:p>
+          <a:p>
+            <a:pPr marL="342900" indent="-342900">
+              <a:buSzPct val="100000"/>
+              <a:buFontTx/>
+              <a:buChar char="•"/>
+            </a:pPr>
+            <a:r>
+              <a:rPr lang="en-US" sz="2000" dirty="0"/>
+              <a:t>Windows</a:t>
+            </a:r>
+          </a:p>
+          <a:p>
+            <a:pPr marL="800100" lvl="1" indent="-342900">
+              <a:buSzPct val="100000"/>
+              <a:buFontTx/>
+              <a:buChar char="•"/>
+            </a:pPr>
+            <a:r>
+              <a:rPr lang="en-US" sz="2000" dirty="0" err="1"/>
+              <a:t>Instalador</a:t>
+            </a:r>
+            <a:r>
+              <a:rPr lang="en-US" sz="2000" dirty="0"/>
+              <a:t> </a:t>
+            </a:r>
+            <a:r>
+              <a:rPr lang="en-US" sz="2000" dirty="0" err="1"/>
+              <a:t>msi</a:t>
+            </a:r>
+            <a:endParaRPr lang="en-US" sz="2000" dirty="0"/>
+          </a:p>
+          <a:p>
+            <a:pPr marL="800100" lvl="1" indent="-342900">
+              <a:buSzPct val="100000"/>
+              <a:buFontTx/>
+              <a:buChar char="•"/>
+            </a:pPr>
+            <a:r>
+              <a:rPr lang="en-US" sz="2000" dirty="0"/>
+              <a:t>Zip:</a:t>
+            </a:r>
+          </a:p>
+          <a:p>
+            <a:pPr marL="1257300" lvl="2" indent="-342900">
+              <a:buSzPct val="100000"/>
+              <a:buFontTx/>
+              <a:buChar char="•"/>
+            </a:pPr>
+            <a:r>
+              <a:rPr lang="en-US" sz="2000" dirty="0" err="1"/>
+              <a:t>Descomprimir</a:t>
+            </a:r>
+            <a:r>
+              <a:rPr lang="en-US" sz="2000" dirty="0"/>
+              <a:t> </a:t>
+            </a:r>
+            <a:r>
+              <a:rPr lang="en-US" sz="2000" dirty="0" err="1"/>
+              <a:t>en</a:t>
+            </a:r>
+            <a:r>
+              <a:rPr lang="en-US" sz="2000" dirty="0"/>
+              <a:t> un </a:t>
+            </a:r>
+            <a:r>
+              <a:rPr lang="en-US" sz="2000" dirty="0" err="1"/>
+              <a:t>ruta</a:t>
+            </a:r>
+            <a:r>
+              <a:rPr lang="en-US" sz="2000" dirty="0"/>
+              <a:t> </a:t>
+            </a:r>
+          </a:p>
+          <a:p>
+            <a:pPr marL="1257300" lvl="2" indent="-342900">
+              <a:buSzPct val="100000"/>
+              <a:buFontTx/>
+              <a:buChar char="•"/>
+            </a:pPr>
+            <a:r>
+              <a:rPr lang="es-ES" sz="2000" dirty="0"/>
+              <a:t>SUMO_HOME=C:\Proyectos\01_SUMO\sumo-1.28.0</a:t>
+            </a:r>
+          </a:p>
+          <a:p>
+            <a:pPr marL="342900" indent="-342900">
+              <a:buSzPct val="100000"/>
+              <a:buFontTx/>
+              <a:buChar char="•"/>
+            </a:pPr>
+            <a:r>
+              <a:rPr lang="es-ES" sz="2000" dirty="0"/>
+              <a:t>Linux</a:t>
+            </a:r>
+          </a:p>
+          <a:p>
+            <a:pPr marL="800100" lvl="1" indent="-342900">
+              <a:buSzPct val="100000"/>
+              <a:buFontTx/>
+              <a:buChar char="•"/>
+            </a:pPr>
+            <a:r>
+              <a:rPr lang="es-ES" sz="2000" b="0" i="0" dirty="0">
+                <a:effectLst/>
+                <a:latin typeface="SFMono-Regular"/>
+              </a:rPr>
+              <a:t>sudo </a:t>
+            </a:r>
+            <a:r>
+              <a:rPr lang="es-ES" sz="2000" b="0" i="0" dirty="0" err="1">
+                <a:effectLst/>
+                <a:latin typeface="SFMono-Regular"/>
+              </a:rPr>
+              <a:t>add-apt-repository</a:t>
+            </a:r>
+            <a:r>
+              <a:rPr lang="es-ES" sz="2000" b="0" i="0" dirty="0">
+                <a:effectLst/>
+                <a:latin typeface="SFMono-Regular"/>
+              </a:rPr>
+              <a:t> </a:t>
+            </a:r>
+            <a:r>
+              <a:rPr lang="es-ES" sz="2000" b="0" i="0" dirty="0" err="1">
+                <a:effectLst/>
+                <a:latin typeface="SFMono-Regular"/>
+              </a:rPr>
+              <a:t>ppa:sumo</a:t>
+            </a:r>
+            <a:r>
+              <a:rPr lang="es-ES" sz="2000" b="0" i="0" dirty="0">
+                <a:effectLst/>
+                <a:latin typeface="SFMono-Regular"/>
+              </a:rPr>
+              <a:t>/</a:t>
+            </a:r>
+            <a:r>
+              <a:rPr lang="es-ES" sz="2000" b="0" i="0" dirty="0" err="1">
+                <a:effectLst/>
+                <a:latin typeface="SFMono-Regular"/>
+              </a:rPr>
+              <a:t>stable</a:t>
+            </a:r>
+            <a:r>
+              <a:rPr lang="es-ES" sz="2000" b="0" i="0" dirty="0">
+                <a:effectLst/>
+                <a:latin typeface="SFMono-Regular"/>
+              </a:rPr>
+              <a:t> </a:t>
+            </a:r>
+          </a:p>
+          <a:p>
+            <a:pPr marL="800100" lvl="1" indent="-342900">
+              <a:buSzPct val="100000"/>
+              <a:buFontTx/>
+              <a:buChar char="•"/>
+            </a:pPr>
+            <a:r>
+              <a:rPr lang="es-ES" sz="2000" b="0" i="0" dirty="0">
+                <a:effectLst/>
+                <a:latin typeface="SFMono-Regular"/>
+              </a:rPr>
+              <a:t>sudo </a:t>
+            </a:r>
+            <a:r>
+              <a:rPr lang="es-ES" sz="2000" b="0" i="0" dirty="0" err="1">
+                <a:effectLst/>
+                <a:latin typeface="SFMono-Regular"/>
+              </a:rPr>
+              <a:t>apt-get</a:t>
+            </a:r>
+            <a:r>
+              <a:rPr lang="es-ES" sz="2000" b="0" i="0" dirty="0">
+                <a:effectLst/>
+                <a:latin typeface="SFMono-Regular"/>
+              </a:rPr>
+              <a:t> </a:t>
+            </a:r>
+            <a:r>
+              <a:rPr lang="es-ES" sz="2000" b="0" i="0" dirty="0" err="1">
+                <a:effectLst/>
+                <a:latin typeface="SFMono-Regular"/>
+              </a:rPr>
+              <a:t>update</a:t>
+            </a:r>
+            <a:r>
+              <a:rPr lang="es-ES" sz="2000" b="0" i="0" dirty="0">
+                <a:effectLst/>
+                <a:latin typeface="SFMono-Regular"/>
+              </a:rPr>
+              <a:t> sudo </a:t>
+            </a:r>
+          </a:p>
+          <a:p>
+            <a:pPr marL="800100" lvl="1" indent="-342900">
+              <a:buSzPct val="100000"/>
+              <a:buFontTx/>
+              <a:buChar char="•"/>
+            </a:pPr>
+            <a:r>
+              <a:rPr lang="es-ES" sz="2000" b="0" i="0" dirty="0" err="1">
+                <a:effectLst/>
+                <a:latin typeface="SFMono-Regular"/>
+              </a:rPr>
+              <a:t>apt-get</a:t>
+            </a:r>
+            <a:r>
+              <a:rPr lang="es-ES" sz="2000" b="0" i="0" dirty="0">
+                <a:effectLst/>
+                <a:latin typeface="SFMono-Regular"/>
+              </a:rPr>
+              <a:t> </a:t>
+            </a:r>
+            <a:r>
+              <a:rPr lang="es-ES" sz="2000" b="0" i="0" dirty="0" err="1">
+                <a:effectLst/>
+                <a:latin typeface="SFMono-Regular"/>
+              </a:rPr>
+              <a:t>install</a:t>
+            </a:r>
+            <a:r>
+              <a:rPr lang="es-ES" sz="2000" b="0" i="0" dirty="0">
+                <a:effectLst/>
+                <a:latin typeface="SFMono-Regular"/>
+              </a:rPr>
+              <a:t> sumo sumo-</a:t>
+            </a:r>
+            <a:r>
+              <a:rPr lang="es-ES" sz="2000" b="0" i="0" dirty="0" err="1">
+                <a:effectLst/>
+                <a:latin typeface="SFMono-Regular"/>
+              </a:rPr>
+              <a:t>tools</a:t>
+            </a:r>
+            <a:r>
+              <a:rPr lang="es-ES" sz="2000" b="0" i="0" dirty="0">
+                <a:effectLst/>
+                <a:latin typeface="SFMono-Regular"/>
+              </a:rPr>
+              <a:t> sumo-</a:t>
+            </a:r>
+            <a:r>
+              <a:rPr lang="es-ES" sz="2000" b="0" i="0" dirty="0" err="1">
+                <a:effectLst/>
+                <a:latin typeface="SFMono-Regular"/>
+              </a:rPr>
+              <a:t>doc</a:t>
+            </a:r>
+            <a:endParaRPr lang="en-US" sz="2000" dirty="0"/>
+          </a:p>
+        </p:txBody>
+      </p:sp>
       <p:pic>
         <p:nvPicPr>
           <p:cNvPr id="6" name="Imagen 5">
             <a:extLst>
               <a:ext uri="{FF2B5EF4-FFF2-40B4-BE49-F238E27FC236}">
-                <a16:creationId xmlns:a16="http://schemas.microsoft.com/office/drawing/2014/main" id="{416D6091-5BA4-C6CF-B043-57517D67299F}"/>
+                <a16:creationId xmlns:a16="http://schemas.microsoft.com/office/drawing/2014/main" id="{61F00D33-49E3-7C35-E60E-6467A4CABF50}"/>
               </a:ext>
             </a:extLst>
           </p:cNvPr>
@@ -2078,359 +2532,80 @@
           <p:nvPr/>
         </p:nvPicPr>
         <p:blipFill>
-          <a:blip r:embed="rId3"/>
+          <a:blip r:embed="rId4"/>
           <a:stretch>
             <a:fillRect/>
           </a:stretch>
         </p:blipFill>
         <p:spPr>
           <a:xfrm>
-            <a:off x="4695354" y="1038497"/>
-            <a:ext cx="4291891" cy="3069376"/>
-          </a:xfrm>
-          <a:prstGeom prst="rect">
-            <a:avLst/>
-          </a:prstGeom>
+            <a:off x="8233640" y="42972"/>
+            <a:ext cx="681760" cy="737015"/>
+          </a:xfrm>
+          <a:prstGeom prst="rect">
+            <a:avLst/>
+          </a:prstGeom>
+          <a:solidFill>
+            <a:srgbClr val="F4F7FA"/>
+          </a:solidFill>
         </p:spPr>
       </p:pic>
       <p:sp>
         <p:nvSpPr>
-          <p:cNvPr id="2" name="Shape 0"/>
-          <p:cNvSpPr/>
-          <p:nvPr/>
-        </p:nvSpPr>
-        <p:spPr>
-          <a:xfrm>
-            <a:off x="0" y="0"/>
-            <a:ext cx="9144000" cy="822960"/>
-          </a:xfrm>
-          <a:prstGeom prst="rect">
-            <a:avLst/>
-          </a:prstGeom>
-          <a:solidFill>
-            <a:srgbClr val="1F3A5F"/>
-          </a:solidFill>
-          <a:ln/>
-        </p:spPr>
-      </p:sp>
-      <p:sp>
-        <p:nvSpPr>
-          <p:cNvPr id="3" name="Text 1"/>
-          <p:cNvSpPr txBox="1"/>
-          <p:nvPr/>
-        </p:nvSpPr>
-        <p:spPr>
-          <a:xfrm>
-            <a:off x="457200" y="91440"/>
-            <a:ext cx="8229600" cy="640080"/>
-          </a:xfrm>
-          <a:prstGeom prst="rect">
-            <a:avLst/>
-          </a:prstGeom>
-          <a:noFill/>
-          <a:ln/>
-        </p:spPr>
-        <p:txBody>
-          <a:bodyPr wrap="square" lIns="0" tIns="0" rIns="0" bIns="0" rtlCol="0" anchor="ctr"/>
-          <a:lstStyle/>
-          <a:p>
-            <a:pPr marL="0" indent="0">
-              <a:buNone/>
-            </a:pPr>
-            <a:r>
-              <a:rPr lang="en-US" sz="2600" b="1" dirty="0" err="1">
-                <a:solidFill>
-                  <a:srgbClr val="FFFFFF"/>
-                </a:solidFill>
-              </a:rPr>
-              <a:t>Creación</a:t>
-            </a:r>
-            <a:r>
-              <a:rPr lang="en-US" sz="2600" b="1" dirty="0">
-                <a:solidFill>
-                  <a:srgbClr val="FFFFFF"/>
-                </a:solidFill>
-              </a:rPr>
-              <a:t> de </a:t>
-            </a:r>
-            <a:r>
-              <a:rPr lang="en-US" sz="2600" b="1" dirty="0" err="1">
-                <a:solidFill>
-                  <a:srgbClr val="FFFFFF"/>
-                </a:solidFill>
-              </a:rPr>
-              <a:t>una</a:t>
-            </a:r>
-            <a:r>
-              <a:rPr lang="en-US" sz="2600" b="1" dirty="0">
-                <a:solidFill>
-                  <a:srgbClr val="FFFFFF"/>
-                </a:solidFill>
-              </a:rPr>
-              <a:t> red vial</a:t>
-            </a:r>
-            <a:endParaRPr lang="en-US" sz="2600" dirty="0"/>
-          </a:p>
-        </p:txBody>
-      </p:sp>
-      <p:sp>
-        <p:nvSpPr>
-          <p:cNvPr id="4" name="CuadroTexto 3">
+          <p:cNvPr id="5" name="Rectángulo 4">
             <a:extLst>
               <a:ext uri="{FF2B5EF4-FFF2-40B4-BE49-F238E27FC236}">
-                <a16:creationId xmlns:a16="http://schemas.microsoft.com/office/drawing/2014/main" id="{69CB68D4-E6E3-E651-DCF0-9251A8D9F9F4}"/>
+                <a16:creationId xmlns:a16="http://schemas.microsoft.com/office/drawing/2014/main" id="{7B2A0E82-D2A8-4670-C307-8504373B3F12}"/>
               </a:ext>
             </a:extLst>
           </p:cNvPr>
-          <p:cNvSpPr txBox="1"/>
-          <p:nvPr/>
-        </p:nvSpPr>
-        <p:spPr>
-          <a:xfrm>
-            <a:off x="248195" y="927463"/>
-            <a:ext cx="4621678" cy="2831544"/>
-          </a:xfrm>
-          <a:prstGeom prst="rect">
-            <a:avLst/>
-          </a:prstGeom>
-          <a:noFill/>
-        </p:spPr>
+          <p:cNvSpPr/>
+          <p:nvPr/>
+        </p:nvSpPr>
+        <p:spPr>
+          <a:xfrm>
+            <a:off x="502919" y="914401"/>
+            <a:ext cx="8288383" cy="71846"/>
+          </a:xfrm>
+          <a:prstGeom prst="rect">
+            <a:avLst/>
+          </a:prstGeom>
+          <a:solidFill>
+            <a:srgbClr val="2A9D8F"/>
+          </a:solidFill>
+          <a:ln>
+            <a:solidFill>
+              <a:srgbClr val="2A9D8F"/>
+            </a:solidFill>
+          </a:ln>
+        </p:spPr>
+        <p:style>
+          <a:lnRef idx="1">
+            <a:schemeClr val="accent6"/>
+          </a:lnRef>
+          <a:fillRef idx="3">
+            <a:schemeClr val="accent6"/>
+          </a:fillRef>
+          <a:effectRef idx="2">
+            <a:schemeClr val="accent6"/>
+          </a:effectRef>
+          <a:fontRef idx="minor">
+            <a:schemeClr val="lt1"/>
+          </a:fontRef>
+        </p:style>
         <p:txBody>
-          <a:bodyPr wrap="square" rtlCol="0">
-            <a:spAutoFit/>
-          </a:bodyPr>
+          <a:bodyPr rtlCol="0" anchor="ctr"/>
           <a:lstStyle/>
           <a:p>
-            <a:pPr marL="285750" indent="-285750">
-              <a:buFont typeface="Arial" panose="020B0604020202020204" pitchFamily="34" charset="0"/>
-              <a:buChar char="•"/>
-            </a:pPr>
-            <a:r>
-              <a:rPr lang="es-ES_tradnl" sz="2000" dirty="0">
-                <a:solidFill>
-                  <a:srgbClr val="4A5568"/>
-                </a:solidFill>
-              </a:rPr>
-              <a:t>Una red vial </a:t>
-            </a:r>
-          </a:p>
-          <a:p>
-            <a:pPr marL="742950" lvl="1" indent="-285750">
-              <a:buFont typeface="Arial" panose="020B0604020202020204" pitchFamily="34" charset="0"/>
-              <a:buChar char="•"/>
-            </a:pPr>
-            <a:r>
-              <a:rPr lang="es-ES_tradnl" sz="2000" dirty="0">
-                <a:solidFill>
-                  <a:srgbClr val="4A5568"/>
-                </a:solidFill>
-              </a:rPr>
-              <a:t>Creada a mano con </a:t>
-            </a:r>
-            <a:r>
-              <a:rPr lang="es-ES_tradnl" sz="2000" dirty="0" err="1">
-                <a:solidFill>
-                  <a:srgbClr val="4A5568"/>
-                </a:solidFill>
-              </a:rPr>
-              <a:t>netedit</a:t>
-            </a:r>
-            <a:endParaRPr lang="es-ES_tradnl" sz="2000" dirty="0">
-              <a:solidFill>
-                <a:srgbClr val="4A5568"/>
-              </a:solidFill>
-            </a:endParaRPr>
-          </a:p>
-          <a:p>
-            <a:pPr marL="742950" lvl="1" indent="-285750">
-              <a:buFont typeface="Arial" panose="020B0604020202020204" pitchFamily="34" charset="0"/>
-              <a:buChar char="•"/>
-            </a:pPr>
-            <a:r>
-              <a:rPr lang="es-ES_tradnl" sz="2000" dirty="0">
-                <a:solidFill>
-                  <a:srgbClr val="4A5568"/>
-                </a:solidFill>
-              </a:rPr>
-              <a:t>Obtenida de Open Street </a:t>
-            </a:r>
-            <a:r>
-              <a:rPr lang="es-ES_tradnl" sz="2000" dirty="0" err="1">
-                <a:solidFill>
-                  <a:srgbClr val="4A5568"/>
-                </a:solidFill>
-              </a:rPr>
-              <a:t>Map</a:t>
-            </a:r>
-            <a:r>
-              <a:rPr lang="es-ES_tradnl" sz="2000" dirty="0">
-                <a:solidFill>
-                  <a:srgbClr val="4A5568"/>
-                </a:solidFill>
-              </a:rPr>
-              <a:t>(OMS) u otras fuentes</a:t>
-            </a:r>
-          </a:p>
-          <a:p>
-            <a:endParaRPr lang="es-ES_tradnl" sz="1200" dirty="0">
-              <a:solidFill>
-                <a:srgbClr val="4A5568"/>
-              </a:solidFill>
-            </a:endParaRPr>
-          </a:p>
-          <a:p>
-            <a:pPr marL="285750" indent="-285750">
-              <a:buFont typeface="Arial" panose="020B0604020202020204" pitchFamily="34" charset="0"/>
-              <a:buChar char="•"/>
-            </a:pPr>
-            <a:r>
-              <a:rPr lang="es-ES_tradnl" sz="1400" dirty="0">
-                <a:solidFill>
-                  <a:srgbClr val="4A5568"/>
-                </a:solidFill>
-              </a:rPr>
-              <a:t>osmWebWizard.py, osmGet.py y </a:t>
-            </a:r>
-            <a:r>
-              <a:rPr lang="es-ES_tradnl" sz="1400" dirty="0" err="1">
-                <a:solidFill>
-                  <a:srgbClr val="4A5568"/>
-                </a:solidFill>
-              </a:rPr>
-              <a:t>osmBuild</a:t>
-            </a:r>
-            <a:r>
-              <a:rPr lang="es-ES_tradnl" sz="1400" dirty="0">
-                <a:solidFill>
-                  <a:srgbClr val="4A5568"/>
-                </a:solidFill>
-              </a:rPr>
-              <a:t> </a:t>
-            </a:r>
-            <a:r>
-              <a:rPr lang="es-ES_tradnl" sz="1400" dirty="0">
-                <a:solidFill>
-                  <a:srgbClr val="4A5568"/>
-                </a:solidFill>
-                <a:hlinkClick r:id="rId4"/>
-              </a:rPr>
-              <a:t>https://sumo.dlr.de/docs/Tutorials/OSMWebWizard.html</a:t>
-            </a:r>
-            <a:br>
-              <a:rPr lang="es-ES_tradnl" sz="1400" dirty="0">
-                <a:solidFill>
-                  <a:srgbClr val="4A5568"/>
-                </a:solidFill>
-              </a:rPr>
-            </a:br>
-            <a:endParaRPr lang="es-ES_tradnl" sz="1400" dirty="0">
-              <a:solidFill>
-                <a:srgbClr val="4A5568"/>
-              </a:solidFill>
-            </a:endParaRPr>
-          </a:p>
-          <a:p>
-            <a:pPr marL="285750" indent="-285750">
-              <a:buFont typeface="Arial" panose="020B0604020202020204" pitchFamily="34" charset="0"/>
-              <a:buChar char="•"/>
-            </a:pPr>
-            <a:r>
-              <a:rPr lang="pt-BR" sz="1400" dirty="0" err="1">
-                <a:solidFill>
-                  <a:srgbClr val="4A5568"/>
-                </a:solidFill>
-              </a:rPr>
-              <a:t>wget</a:t>
-            </a:r>
-            <a:r>
-              <a:rPr lang="pt-BR" sz="1400" dirty="0">
-                <a:solidFill>
-                  <a:srgbClr val="4A5568"/>
-                </a:solidFill>
-              </a:rPr>
-              <a:t> -O </a:t>
-            </a:r>
-            <a:r>
-              <a:rPr lang="pt-BR" sz="1400" dirty="0" err="1">
-                <a:solidFill>
-                  <a:srgbClr val="4A5568"/>
-                </a:solidFill>
-              </a:rPr>
-              <a:t>pamplona.osm</a:t>
-            </a:r>
-            <a:r>
-              <a:rPr lang="pt-BR" sz="1400" dirty="0">
-                <a:solidFill>
-                  <a:srgbClr val="4A5568"/>
-                </a:solidFill>
-              </a:rPr>
-              <a:t> </a:t>
-            </a:r>
-            <a:r>
-              <a:rPr lang="pt-BR" sz="1400" dirty="0">
-                <a:solidFill>
-                  <a:srgbClr val="4A5568"/>
-                </a:solidFill>
-                <a:hlinkClick r:id="rId5"/>
-              </a:rPr>
-              <a:t>https://overpass-api.de/api/map?bbox=-1.70,42.77,-1.59,42.85</a:t>
-            </a:r>
-            <a:endParaRPr lang="pt-BR" sz="1400" dirty="0">
-              <a:solidFill>
-                <a:srgbClr val="4A5568"/>
-              </a:solidFill>
-            </a:endParaRPr>
-          </a:p>
-          <a:p>
-            <a:pPr marL="285750" indent="-285750">
-              <a:buFont typeface="Arial" panose="020B0604020202020204" pitchFamily="34" charset="0"/>
-              <a:buChar char="•"/>
-            </a:pPr>
-            <a:endParaRPr lang="es-ES" sz="1600" u="sng" dirty="0">
-              <a:solidFill>
-                <a:srgbClr val="4A5568"/>
-              </a:solidFill>
-            </a:endParaRPr>
+            <a:pPr algn="ctr"/>
+            <a:endParaRPr lang="es-ES"/>
           </a:p>
         </p:txBody>
       </p:sp>
-      <p:pic>
-        <p:nvPicPr>
-          <p:cNvPr id="5" name="Imagen 4">
-            <a:extLst>
-              <a:ext uri="{FF2B5EF4-FFF2-40B4-BE49-F238E27FC236}">
-                <a16:creationId xmlns:a16="http://schemas.microsoft.com/office/drawing/2014/main" id="{3576B787-9DC5-CBFE-C082-43E7B13F134E}"/>
-              </a:ext>
-            </a:extLst>
-          </p:cNvPr>
-          <p:cNvPicPr>
-            <a:picLocks noChangeAspect="1"/>
-          </p:cNvPicPr>
-          <p:nvPr/>
-        </p:nvPicPr>
-        <p:blipFill>
-          <a:blip r:embed="rId6"/>
-          <a:stretch>
-            <a:fillRect/>
-          </a:stretch>
-        </p:blipFill>
-        <p:spPr>
-          <a:xfrm>
-            <a:off x="8233640" y="42972"/>
-            <a:ext cx="681760" cy="737015"/>
-          </a:xfrm>
-          <a:prstGeom prst="rect">
-            <a:avLst/>
-          </a:prstGeom>
-          <a:solidFill>
-            <a:srgbClr val="F4F7FA"/>
-          </a:solidFill>
-        </p:spPr>
-      </p:pic>
     </p:spTree>
     <p:extLst>
       <p:ext uri="{BB962C8B-B14F-4D97-AF65-F5344CB8AC3E}">
-        <p14:creationId xmlns:p14="http://schemas.microsoft.com/office/powerpoint/2010/main" val="2554421174"/>
+        <p14:creationId xmlns:p14="http://schemas.microsoft.com/office/powerpoint/2010/main" val="912194059"/>
       </p:ext>
     </p:extLst>
   </p:cSld>
@@ -2441,879 +2616,6 @@
 </file>
 
 <file path=ppt/slides/slide11.xml><?xml version="1.0" encoding="utf-8"?>
-<p:sld xmlns:a="http://schemas.openxmlformats.org/drawingml/2006/main" xmlns:r="http://schemas.openxmlformats.org/officeDocument/2006/relationships" xmlns:p="http://schemas.openxmlformats.org/presentationml/2006/main">
-  <p:cSld name="Slide 10">
-    <p:bg>
-      <p:bgPr>
-        <a:solidFill>
-          <a:srgbClr val="F4F7FA"/>
-        </a:solidFill>
-        <a:effectLst/>
-      </p:bgPr>
-    </p:bg>
-    <p:spTree>
-      <p:nvGrpSpPr>
-        <p:cNvPr id="1" name=""/>
-        <p:cNvGrpSpPr/>
-        <p:nvPr/>
-      </p:nvGrpSpPr>
-      <p:grpSpPr>
-        <a:xfrm>
-          <a:off x="0" y="0"/>
-          <a:ext cx="0" cy="0"/>
-          <a:chOff x="0" y="0"/>
-          <a:chExt cx="0" cy="0"/>
-        </a:xfrm>
-      </p:grpSpPr>
-      <p:sp>
-        <p:nvSpPr>
-          <p:cNvPr id="2" name="Shape 0"/>
-          <p:cNvSpPr/>
-          <p:nvPr/>
-        </p:nvSpPr>
-        <p:spPr>
-          <a:xfrm>
-            <a:off x="0" y="0"/>
-            <a:ext cx="9144000" cy="822960"/>
-          </a:xfrm>
-          <a:prstGeom prst="rect">
-            <a:avLst/>
-          </a:prstGeom>
-          <a:solidFill>
-            <a:srgbClr val="1F3A5F"/>
-          </a:solidFill>
-          <a:ln/>
-        </p:spPr>
-      </p:sp>
-      <p:sp>
-        <p:nvSpPr>
-          <p:cNvPr id="3" name="Text 1"/>
-          <p:cNvSpPr txBox="1"/>
-          <p:nvPr/>
-        </p:nvSpPr>
-        <p:spPr>
-          <a:xfrm>
-            <a:off x="457200" y="91440"/>
-            <a:ext cx="8229600" cy="640080"/>
-          </a:xfrm>
-          <a:prstGeom prst="rect">
-            <a:avLst/>
-          </a:prstGeom>
-          <a:noFill/>
-          <a:ln/>
-        </p:spPr>
-        <p:txBody>
-          <a:bodyPr wrap="square" lIns="0" tIns="0" rIns="0" bIns="0" rtlCol="0" anchor="ctr"/>
-          <a:lstStyle/>
-          <a:p>
-            <a:pPr marL="0" indent="0">
-              <a:buNone/>
-            </a:pPr>
-            <a:r>
-              <a:rPr lang="en-US" sz="2600" b="1" dirty="0" err="1">
-                <a:solidFill>
-                  <a:srgbClr val="FFFFFF"/>
-                </a:solidFill>
-              </a:rPr>
-              <a:t>Crear</a:t>
-            </a:r>
-            <a:r>
-              <a:rPr lang="en-US" sz="2600" b="1" dirty="0">
-                <a:solidFill>
-                  <a:srgbClr val="FFFFFF"/>
-                </a:solidFill>
-              </a:rPr>
-              <a:t> </a:t>
-            </a:r>
-            <a:r>
-              <a:rPr lang="en-US" sz="2600" b="1" dirty="0" err="1">
-                <a:solidFill>
-                  <a:srgbClr val="FFFFFF"/>
-                </a:solidFill>
-              </a:rPr>
-              <a:t>mapa</a:t>
-            </a:r>
-            <a:r>
-              <a:rPr lang="en-US" sz="2600" b="1" dirty="0">
-                <a:solidFill>
-                  <a:srgbClr val="FFFFFF"/>
-                </a:solidFill>
-              </a:rPr>
-              <a:t> de Pamplona</a:t>
-            </a:r>
-            <a:endParaRPr lang="en-US" sz="2600" dirty="0"/>
-          </a:p>
-        </p:txBody>
-      </p:sp>
-      <p:sp>
-        <p:nvSpPr>
-          <p:cNvPr id="4" name="Shape 2"/>
-          <p:cNvSpPr/>
-          <p:nvPr/>
-        </p:nvSpPr>
-        <p:spPr>
-          <a:xfrm>
-            <a:off x="365760" y="1005840"/>
-            <a:ext cx="8412480" cy="3638006"/>
-          </a:xfrm>
-          <a:prstGeom prst="rect">
-            <a:avLst/>
-          </a:prstGeom>
-          <a:solidFill>
-            <a:srgbClr val="1E1E2E"/>
-          </a:solidFill>
-          <a:ln w="12700">
-            <a:solidFill>
-              <a:srgbClr val="1E1E2E"/>
-            </a:solidFill>
-            <a:prstDash val="solid"/>
-          </a:ln>
-        </p:spPr>
-      </p:sp>
-      <p:sp>
-        <p:nvSpPr>
-          <p:cNvPr id="5" name="Text 3"/>
-          <p:cNvSpPr txBox="1"/>
-          <p:nvPr/>
-        </p:nvSpPr>
-        <p:spPr>
-          <a:xfrm>
-            <a:off x="457200" y="1097280"/>
-            <a:ext cx="8229600" cy="3200400"/>
-          </a:xfrm>
-          <a:prstGeom prst="rect">
-            <a:avLst/>
-          </a:prstGeom>
-          <a:noFill/>
-          <a:ln/>
-        </p:spPr>
-        <p:txBody>
-          <a:bodyPr wrap="square" rtlCol="0" anchor="t"/>
-          <a:lstStyle/>
-          <a:p>
-            <a:pPr marL="0" indent="0">
-              <a:buNone/>
-            </a:pPr>
-            <a:r>
-              <a:rPr lang="en-US" sz="1200" dirty="0">
-                <a:solidFill>
-                  <a:srgbClr val="7F849C"/>
-                </a:solidFill>
-                <a:latin typeface="Consolas" pitchFamily="34" charset="0"/>
-                <a:ea typeface="Consolas" pitchFamily="34" charset="-122"/>
-                <a:cs typeface="Consolas" pitchFamily="34" charset="-120"/>
-              </a:rPr>
-              <a:t># 1. Descargar el mapa de Pamplona (bbox: oeste, sur, este, norte)</a:t>
-            </a:r>
-            <a:endParaRPr lang="en-US" sz="1200" dirty="0"/>
-          </a:p>
-          <a:p>
-            <a:pPr marL="0" indent="0">
-              <a:buNone/>
-            </a:pPr>
-            <a:r>
-              <a:rPr lang="pt-BR" sz="1200" dirty="0" err="1">
-                <a:solidFill>
-                  <a:srgbClr val="A6E3A1"/>
-                </a:solidFill>
-                <a:latin typeface="Consolas" pitchFamily="34" charset="0"/>
-                <a:ea typeface="Consolas" pitchFamily="34" charset="-122"/>
-                <a:cs typeface="Consolas" pitchFamily="34" charset="-120"/>
-              </a:rPr>
-              <a:t>wget</a:t>
-            </a:r>
-            <a:r>
-              <a:rPr lang="pt-BR" sz="1200" dirty="0">
-                <a:solidFill>
-                  <a:srgbClr val="A6E3A1"/>
-                </a:solidFill>
-                <a:latin typeface="Consolas" pitchFamily="34" charset="0"/>
-                <a:ea typeface="Consolas" pitchFamily="34" charset="-122"/>
-                <a:cs typeface="Consolas" pitchFamily="34" charset="-120"/>
-              </a:rPr>
-              <a:t> -O </a:t>
-            </a:r>
-            <a:r>
-              <a:rPr lang="pt-BR" sz="1200" dirty="0" err="1">
-                <a:solidFill>
-                  <a:srgbClr val="A6E3A1"/>
-                </a:solidFill>
-                <a:latin typeface="Consolas" pitchFamily="34" charset="0"/>
-                <a:ea typeface="Consolas" pitchFamily="34" charset="-122"/>
-                <a:cs typeface="Consolas" pitchFamily="34" charset="-120"/>
-              </a:rPr>
-              <a:t>pamplona.osm</a:t>
-            </a:r>
-            <a:r>
-              <a:rPr lang="pt-BR" sz="1200" dirty="0">
-                <a:solidFill>
-                  <a:srgbClr val="A6E3A1"/>
-                </a:solidFill>
-                <a:latin typeface="Consolas" pitchFamily="34" charset="0"/>
-                <a:ea typeface="Consolas" pitchFamily="34" charset="-122"/>
-                <a:cs typeface="Consolas" pitchFamily="34" charset="-120"/>
-              </a:rPr>
-              <a:t> "https://overpass-api.de/api/</a:t>
-            </a:r>
-            <a:r>
-              <a:rPr lang="pt-BR" sz="1200" dirty="0" err="1">
-                <a:solidFill>
-                  <a:srgbClr val="A6E3A1"/>
-                </a:solidFill>
-                <a:latin typeface="Consolas" pitchFamily="34" charset="0"/>
-                <a:ea typeface="Consolas" pitchFamily="34" charset="-122"/>
-                <a:cs typeface="Consolas" pitchFamily="34" charset="-120"/>
-              </a:rPr>
-              <a:t>map?bbox</a:t>
-            </a:r>
-            <a:r>
-              <a:rPr lang="pt-BR" sz="1200" dirty="0">
-                <a:solidFill>
-                  <a:srgbClr val="A6E3A1"/>
-                </a:solidFill>
-                <a:latin typeface="Consolas" pitchFamily="34" charset="0"/>
-                <a:ea typeface="Consolas" pitchFamily="34" charset="-122"/>
-                <a:cs typeface="Consolas" pitchFamily="34" charset="-120"/>
-              </a:rPr>
-              <a:t>=-1.72361,42.76307,-1.54817,42.84873"</a:t>
-            </a:r>
-            <a:endParaRPr lang="en-US" sz="1200" dirty="0">
-              <a:solidFill>
-                <a:srgbClr val="7F849C"/>
-              </a:solidFill>
-              <a:latin typeface="Consolas" pitchFamily="34" charset="0"/>
-              <a:ea typeface="Consolas" pitchFamily="34" charset="-122"/>
-              <a:cs typeface="Consolas" pitchFamily="34" charset="-120"/>
-            </a:endParaRPr>
-          </a:p>
-          <a:p>
-            <a:pPr marL="0" indent="0">
-              <a:buNone/>
-            </a:pPr>
-            <a:endParaRPr lang="en-US" sz="1200" dirty="0">
-              <a:solidFill>
-                <a:srgbClr val="7F849C"/>
-              </a:solidFill>
-              <a:latin typeface="Consolas" pitchFamily="34" charset="0"/>
-              <a:ea typeface="Consolas" pitchFamily="34" charset="-122"/>
-              <a:cs typeface="Consolas" pitchFamily="34" charset="-120"/>
-            </a:endParaRPr>
-          </a:p>
-          <a:p>
-            <a:pPr marL="0" indent="0">
-              <a:buNone/>
-            </a:pPr>
-            <a:r>
-              <a:rPr lang="en-US" sz="1200" dirty="0">
-                <a:solidFill>
-                  <a:srgbClr val="7F849C"/>
-                </a:solidFill>
-                <a:latin typeface="Consolas" pitchFamily="34" charset="0"/>
-                <a:ea typeface="Consolas" pitchFamily="34" charset="-122"/>
-                <a:cs typeface="Consolas" pitchFamily="34" charset="-120"/>
-              </a:rPr>
-              <a:t># 2. Convertir a red de SUMO </a:t>
-            </a:r>
-          </a:p>
-          <a:p>
-            <a:pPr marL="0" indent="0">
-              <a:buNone/>
-            </a:pPr>
-            <a:r>
-              <a:rPr lang="en-US" sz="1200" dirty="0">
-                <a:solidFill>
-                  <a:srgbClr val="7F849C"/>
-                </a:solidFill>
-                <a:latin typeface="Consolas" pitchFamily="34" charset="0"/>
-              </a:rPr>
-              <a:t>#Borrado de vias </a:t>
-            </a:r>
-            <a:r>
-              <a:rPr lang="en-US" sz="1200" dirty="0" err="1">
-                <a:solidFill>
-                  <a:srgbClr val="7F849C"/>
-                </a:solidFill>
-                <a:latin typeface="Consolas" pitchFamily="34" charset="0"/>
-              </a:rPr>
-              <a:t>por</a:t>
-            </a:r>
-            <a:r>
-              <a:rPr lang="en-US" sz="1200" dirty="0">
-                <a:solidFill>
-                  <a:srgbClr val="7F849C"/>
-                </a:solidFill>
-                <a:latin typeface="Consolas" pitchFamily="34" charset="0"/>
-              </a:rPr>
-              <a:t> </a:t>
-            </a:r>
-            <a:r>
-              <a:rPr lang="en-US" sz="1200" dirty="0" err="1">
-                <a:solidFill>
-                  <a:srgbClr val="7F849C"/>
-                </a:solidFill>
-                <a:latin typeface="Consolas" pitchFamily="34" charset="0"/>
-              </a:rPr>
-              <a:t>tipo</a:t>
-            </a:r>
-            <a:r>
-              <a:rPr lang="en-US" sz="1200" dirty="0">
-                <a:solidFill>
-                  <a:srgbClr val="7F849C"/>
-                </a:solidFill>
-                <a:latin typeface="Consolas" pitchFamily="34" charset="0"/>
-              </a:rPr>
-              <a:t> de </a:t>
-            </a:r>
-            <a:r>
-              <a:rPr lang="en-US" sz="1200" dirty="0" err="1">
-                <a:solidFill>
-                  <a:srgbClr val="7F849C"/>
-                </a:solidFill>
-                <a:latin typeface="Consolas" pitchFamily="34" charset="0"/>
-              </a:rPr>
-              <a:t>vehiculo</a:t>
-            </a:r>
-            <a:r>
-              <a:rPr lang="en-US" sz="1200" dirty="0">
-                <a:solidFill>
-                  <a:srgbClr val="7F849C"/>
-                </a:solidFill>
-                <a:latin typeface="Consolas" pitchFamily="34" charset="0"/>
-              </a:rPr>
-              <a:t> que </a:t>
-            </a:r>
-            <a:r>
-              <a:rPr lang="en-US" sz="1200" dirty="0" err="1">
-                <a:solidFill>
-                  <a:srgbClr val="7F849C"/>
-                </a:solidFill>
-                <a:latin typeface="Consolas" pitchFamily="34" charset="0"/>
-              </a:rPr>
-              <a:t>circula</a:t>
-            </a:r>
-            <a:r>
-              <a:rPr lang="en-US" sz="1200" dirty="0">
-                <a:solidFill>
-                  <a:srgbClr val="7F849C"/>
-                </a:solidFill>
-                <a:latin typeface="Consolas" pitchFamily="34" charset="0"/>
-              </a:rPr>
-              <a:t> </a:t>
-            </a:r>
-            <a:r>
-              <a:rPr lang="en-US" sz="1200" dirty="0" err="1">
-                <a:solidFill>
-                  <a:srgbClr val="7F849C"/>
-                </a:solidFill>
-                <a:latin typeface="Consolas" pitchFamily="34" charset="0"/>
-              </a:rPr>
-              <a:t>por</a:t>
-            </a:r>
-            <a:r>
-              <a:rPr lang="en-US" sz="1200" dirty="0">
-                <a:solidFill>
-                  <a:srgbClr val="7F849C"/>
-                </a:solidFill>
-                <a:latin typeface="Consolas" pitchFamily="34" charset="0"/>
-              </a:rPr>
-              <a:t> </a:t>
-            </a:r>
-            <a:r>
-              <a:rPr lang="en-US" sz="1200" dirty="0" err="1">
-                <a:solidFill>
-                  <a:srgbClr val="7F849C"/>
-                </a:solidFill>
-                <a:latin typeface="Consolas" pitchFamily="34" charset="0"/>
-              </a:rPr>
-              <a:t>ella</a:t>
-            </a:r>
-            <a:endParaRPr lang="en-US" sz="1200" dirty="0"/>
-          </a:p>
-          <a:p>
-            <a:pPr marL="0" indent="0">
-              <a:buNone/>
-            </a:pPr>
-            <a:r>
-              <a:rPr lang="en-US" sz="1100" dirty="0">
-                <a:solidFill>
-                  <a:srgbClr val="A6E3A1"/>
-                </a:solidFill>
-                <a:latin typeface="Consolas" pitchFamily="34" charset="0"/>
-                <a:ea typeface="Consolas" pitchFamily="34" charset="-122"/>
-                <a:cs typeface="Consolas" pitchFamily="34" charset="-120"/>
-              </a:rPr>
-              <a:t>netconvert --osm-files pamplona.osm -o pamplona.net.xml --geometry.remove --ramps.guess --junctions.join --</a:t>
-            </a:r>
-            <a:r>
-              <a:rPr lang="en-US" sz="1100" dirty="0" err="1">
-                <a:solidFill>
-                  <a:srgbClr val="A6E3A1"/>
-                </a:solidFill>
-                <a:latin typeface="Consolas" pitchFamily="34" charset="0"/>
-                <a:ea typeface="Consolas" pitchFamily="34" charset="-122"/>
-                <a:cs typeface="Consolas" pitchFamily="34" charset="-120"/>
-              </a:rPr>
-              <a:t>tls.guess</a:t>
-            </a:r>
-            <a:r>
-              <a:rPr lang="en-US" sz="1100" dirty="0">
-                <a:solidFill>
-                  <a:srgbClr val="A6E3A1"/>
-                </a:solidFill>
-                <a:latin typeface="Consolas" pitchFamily="34" charset="0"/>
-                <a:ea typeface="Consolas" pitchFamily="34" charset="-122"/>
-                <a:cs typeface="Consolas" pitchFamily="34" charset="-120"/>
-              </a:rPr>
-              <a:t>-signals --remove-edges.by-</a:t>
-            </a:r>
-            <a:r>
-              <a:rPr lang="en-US" sz="1100" dirty="0" err="1">
-                <a:solidFill>
-                  <a:srgbClr val="A6E3A1"/>
-                </a:solidFill>
-                <a:latin typeface="Consolas" pitchFamily="34" charset="0"/>
-                <a:ea typeface="Consolas" pitchFamily="34" charset="-122"/>
-                <a:cs typeface="Consolas" pitchFamily="34" charset="-120"/>
-              </a:rPr>
-              <a:t>vclass</a:t>
-            </a:r>
-            <a:r>
-              <a:rPr lang="en-US" sz="1100" dirty="0">
-                <a:solidFill>
-                  <a:srgbClr val="A6E3A1"/>
-                </a:solidFill>
-                <a:latin typeface="Consolas" pitchFamily="34" charset="0"/>
-                <a:ea typeface="Consolas" pitchFamily="34" charset="-122"/>
-                <a:cs typeface="Consolas" pitchFamily="34" charset="-120"/>
-              </a:rPr>
-              <a:t> hov,taxi,bus,delivery,transport,lightrail,rail,cityrail,rail_slow,rail_fast</a:t>
-            </a:r>
-          </a:p>
-          <a:p>
-            <a:endParaRPr lang="en-US" sz="1100" dirty="0">
-              <a:solidFill>
-                <a:srgbClr val="7F849C"/>
-              </a:solidFill>
-              <a:latin typeface="Consolas" pitchFamily="34" charset="0"/>
-            </a:endParaRPr>
-          </a:p>
-          <a:p>
-            <a:endParaRPr lang="en-US" sz="1100" dirty="0">
-              <a:solidFill>
-                <a:srgbClr val="7F849C"/>
-              </a:solidFill>
-              <a:latin typeface="Consolas" pitchFamily="34" charset="0"/>
-            </a:endParaRPr>
-          </a:p>
-          <a:p>
-            <a:r>
-              <a:rPr lang="en-US" sz="1100" dirty="0">
-                <a:solidFill>
-                  <a:srgbClr val="7F849C"/>
-                </a:solidFill>
-                <a:latin typeface="Consolas" pitchFamily="34" charset="0"/>
-              </a:rPr>
-              <a:t>#Conservar vias </a:t>
-            </a:r>
-            <a:r>
-              <a:rPr lang="en-US" sz="1100" dirty="0" err="1">
-                <a:solidFill>
-                  <a:srgbClr val="7F849C"/>
-                </a:solidFill>
-                <a:latin typeface="Consolas" pitchFamily="34" charset="0"/>
-              </a:rPr>
-              <a:t>por</a:t>
-            </a:r>
-            <a:r>
-              <a:rPr lang="en-US" sz="1100" dirty="0">
-                <a:solidFill>
-                  <a:srgbClr val="7F849C"/>
-                </a:solidFill>
-                <a:latin typeface="Consolas" pitchFamily="34" charset="0"/>
-              </a:rPr>
-              <a:t> </a:t>
-            </a:r>
-            <a:r>
-              <a:rPr lang="en-US" sz="1100" dirty="0" err="1">
-                <a:solidFill>
-                  <a:srgbClr val="7F849C"/>
-                </a:solidFill>
-                <a:latin typeface="Consolas" pitchFamily="34" charset="0"/>
-              </a:rPr>
-              <a:t>tipo</a:t>
-            </a:r>
-            <a:r>
-              <a:rPr lang="en-US" sz="1100" dirty="0">
-                <a:solidFill>
-                  <a:srgbClr val="7F849C"/>
-                </a:solidFill>
-                <a:latin typeface="Consolas" pitchFamily="34" charset="0"/>
-              </a:rPr>
-              <a:t> de </a:t>
-            </a:r>
-            <a:r>
-              <a:rPr lang="en-US" sz="1100" dirty="0" err="1">
-                <a:solidFill>
-                  <a:srgbClr val="7F849C"/>
-                </a:solidFill>
-                <a:latin typeface="Consolas" pitchFamily="34" charset="0"/>
-              </a:rPr>
-              <a:t>vehiculo</a:t>
-            </a:r>
-            <a:r>
-              <a:rPr lang="en-US" sz="1100" dirty="0">
-                <a:solidFill>
-                  <a:srgbClr val="7F849C"/>
-                </a:solidFill>
-                <a:latin typeface="Consolas" pitchFamily="34" charset="0"/>
-              </a:rPr>
-              <a:t> que </a:t>
-            </a:r>
-            <a:r>
-              <a:rPr lang="en-US" sz="1100" dirty="0" err="1">
-                <a:solidFill>
-                  <a:srgbClr val="7F849C"/>
-                </a:solidFill>
-                <a:latin typeface="Consolas" pitchFamily="34" charset="0"/>
-              </a:rPr>
-              <a:t>circula</a:t>
-            </a:r>
-            <a:r>
-              <a:rPr lang="en-US" sz="1100" dirty="0">
-                <a:solidFill>
-                  <a:srgbClr val="7F849C"/>
-                </a:solidFill>
-                <a:latin typeface="Consolas" pitchFamily="34" charset="0"/>
-              </a:rPr>
-              <a:t> </a:t>
-            </a:r>
-            <a:r>
-              <a:rPr lang="en-US" sz="1100" dirty="0" err="1">
-                <a:solidFill>
-                  <a:srgbClr val="7F849C"/>
-                </a:solidFill>
-                <a:latin typeface="Consolas" pitchFamily="34" charset="0"/>
-              </a:rPr>
-              <a:t>por</a:t>
-            </a:r>
-            <a:r>
-              <a:rPr lang="en-US" sz="1100" dirty="0">
-                <a:solidFill>
-                  <a:srgbClr val="7F849C"/>
-                </a:solidFill>
-                <a:latin typeface="Consolas" pitchFamily="34" charset="0"/>
-              </a:rPr>
-              <a:t> </a:t>
-            </a:r>
-            <a:r>
-              <a:rPr lang="en-US" sz="1100" dirty="0" err="1">
-                <a:solidFill>
-                  <a:srgbClr val="7F849C"/>
-                </a:solidFill>
-                <a:latin typeface="Consolas" pitchFamily="34" charset="0"/>
-              </a:rPr>
-              <a:t>ella</a:t>
-            </a:r>
-            <a:endParaRPr lang="en-US" sz="1100" dirty="0"/>
-          </a:p>
-          <a:p>
-            <a:pPr marL="0" indent="0">
-              <a:buNone/>
-            </a:pPr>
-            <a:r>
-              <a:rPr lang="en-US" sz="1100" dirty="0" err="1">
-                <a:solidFill>
-                  <a:srgbClr val="A6E3A1"/>
-                </a:solidFill>
-                <a:latin typeface="Consolas" pitchFamily="34" charset="0"/>
-                <a:ea typeface="Consolas" pitchFamily="34" charset="-122"/>
-                <a:cs typeface="Consolas" pitchFamily="34" charset="-120"/>
-              </a:rPr>
-              <a:t>netconvert</a:t>
-            </a:r>
-            <a:r>
-              <a:rPr lang="en-US" sz="1100" dirty="0">
-                <a:solidFill>
-                  <a:srgbClr val="A6E3A1"/>
-                </a:solidFill>
-                <a:latin typeface="Consolas" pitchFamily="34" charset="0"/>
-                <a:ea typeface="Consolas" pitchFamily="34" charset="-122"/>
-                <a:cs typeface="Consolas" pitchFamily="34" charset="-120"/>
-              </a:rPr>
-              <a:t> --</a:t>
-            </a:r>
-            <a:r>
-              <a:rPr lang="en-US" sz="1100" dirty="0" err="1">
-                <a:solidFill>
-                  <a:srgbClr val="A6E3A1"/>
-                </a:solidFill>
-                <a:latin typeface="Consolas" pitchFamily="34" charset="0"/>
-                <a:ea typeface="Consolas" pitchFamily="34" charset="-122"/>
-                <a:cs typeface="Consolas" pitchFamily="34" charset="-120"/>
-              </a:rPr>
-              <a:t>osm</a:t>
-            </a:r>
-            <a:r>
-              <a:rPr lang="en-US" sz="1100" dirty="0">
-                <a:solidFill>
-                  <a:srgbClr val="A6E3A1"/>
-                </a:solidFill>
-                <a:latin typeface="Consolas" pitchFamily="34" charset="0"/>
-                <a:ea typeface="Consolas" pitchFamily="34" charset="-122"/>
-                <a:cs typeface="Consolas" pitchFamily="34" charset="-120"/>
-              </a:rPr>
-              <a:t>-files </a:t>
-            </a:r>
-            <a:r>
-              <a:rPr lang="en-US" sz="1100" dirty="0" err="1">
-                <a:solidFill>
-                  <a:srgbClr val="A6E3A1"/>
-                </a:solidFill>
-                <a:latin typeface="Consolas" pitchFamily="34" charset="0"/>
-                <a:ea typeface="Consolas" pitchFamily="34" charset="-122"/>
-                <a:cs typeface="Consolas" pitchFamily="34" charset="-120"/>
-              </a:rPr>
-              <a:t>pamplona.osm</a:t>
-            </a:r>
-            <a:r>
-              <a:rPr lang="en-US" sz="1100" dirty="0">
-                <a:solidFill>
-                  <a:srgbClr val="A6E3A1"/>
-                </a:solidFill>
-                <a:latin typeface="Consolas" pitchFamily="34" charset="0"/>
-                <a:ea typeface="Consolas" pitchFamily="34" charset="-122"/>
-                <a:cs typeface="Consolas" pitchFamily="34" charset="-120"/>
-              </a:rPr>
-              <a:t> --output-file pamplona.net.xml  --remove-</a:t>
-            </a:r>
-            <a:r>
-              <a:rPr lang="en-US" sz="1100" dirty="0" err="1">
-                <a:solidFill>
-                  <a:srgbClr val="A6E3A1"/>
-                </a:solidFill>
-                <a:latin typeface="Consolas" pitchFamily="34" charset="0"/>
-                <a:ea typeface="Consolas" pitchFamily="34" charset="-122"/>
-                <a:cs typeface="Consolas" pitchFamily="34" charset="-120"/>
-              </a:rPr>
-              <a:t>edges.isolated</a:t>
-            </a:r>
-            <a:r>
-              <a:rPr lang="en-US" sz="1100" dirty="0">
-                <a:solidFill>
-                  <a:srgbClr val="A6E3A1"/>
-                </a:solidFill>
-                <a:latin typeface="Consolas" pitchFamily="34" charset="0"/>
-                <a:ea typeface="Consolas" pitchFamily="34" charset="-122"/>
-                <a:cs typeface="Consolas" pitchFamily="34" charset="-120"/>
-              </a:rPr>
-              <a:t>  --keep-edges.by-</a:t>
-            </a:r>
-            <a:r>
-              <a:rPr lang="en-US" sz="1100" dirty="0" err="1">
-                <a:solidFill>
-                  <a:srgbClr val="A6E3A1"/>
-                </a:solidFill>
-                <a:latin typeface="Consolas" pitchFamily="34" charset="0"/>
-                <a:ea typeface="Consolas" pitchFamily="34" charset="-122"/>
-                <a:cs typeface="Consolas" pitchFamily="34" charset="-120"/>
-              </a:rPr>
-              <a:t>vclass</a:t>
-            </a:r>
-            <a:r>
-              <a:rPr lang="en-US" sz="1100" dirty="0">
-                <a:solidFill>
-                  <a:srgbClr val="A6E3A1"/>
-                </a:solidFill>
-                <a:latin typeface="Consolas" pitchFamily="34" charset="0"/>
-                <a:ea typeface="Consolas" pitchFamily="34" charset="-122"/>
-                <a:cs typeface="Consolas" pitchFamily="34" charset="-120"/>
-              </a:rPr>
-              <a:t> passenger</a:t>
-            </a:r>
-          </a:p>
-          <a:p>
-            <a:pPr marL="0" indent="0">
-              <a:buNone/>
-            </a:pPr>
-            <a:endParaRPr lang="en-US" sz="1200" dirty="0">
-              <a:solidFill>
-                <a:srgbClr val="7F849C"/>
-              </a:solidFill>
-              <a:latin typeface="Consolas" pitchFamily="34" charset="0"/>
-              <a:ea typeface="Consolas" pitchFamily="34" charset="-122"/>
-              <a:cs typeface="Consolas" pitchFamily="34" charset="-120"/>
-            </a:endParaRPr>
-          </a:p>
-          <a:p>
-            <a:pPr marL="0" indent="0">
-              <a:buNone/>
-            </a:pPr>
-            <a:endParaRPr lang="en-US" sz="1200" dirty="0"/>
-          </a:p>
-        </p:txBody>
-      </p:sp>
-      <p:sp>
-        <p:nvSpPr>
-          <p:cNvPr id="6" name="CuadroTexto 5">
-            <a:extLst>
-              <a:ext uri="{FF2B5EF4-FFF2-40B4-BE49-F238E27FC236}">
-                <a16:creationId xmlns:a16="http://schemas.microsoft.com/office/drawing/2014/main" id="{69795DF5-CB45-01CC-992C-BF241DC8F537}"/>
-              </a:ext>
-            </a:extLst>
-          </p:cNvPr>
-          <p:cNvSpPr txBox="1"/>
-          <p:nvPr/>
-        </p:nvSpPr>
-        <p:spPr>
-          <a:xfrm>
-            <a:off x="457200" y="4728753"/>
-            <a:ext cx="6874382" cy="369332"/>
-          </a:xfrm>
-          <a:prstGeom prst="rect">
-            <a:avLst/>
-          </a:prstGeom>
-          <a:noFill/>
-        </p:spPr>
-        <p:txBody>
-          <a:bodyPr wrap="none" rtlCol="0">
-            <a:spAutoFit/>
-          </a:bodyPr>
-          <a:lstStyle/>
-          <a:p>
-            <a:r>
-              <a:rPr lang="en-US" sz="1800" dirty="0">
-                <a:solidFill>
-                  <a:srgbClr val="4A5568"/>
-                </a:solidFill>
-              </a:rPr>
-              <a:t>Los </a:t>
-            </a:r>
-            <a:r>
-              <a:rPr lang="en-US" sz="1800" dirty="0" err="1">
-                <a:solidFill>
-                  <a:srgbClr val="4A5568"/>
-                </a:solidFill>
-              </a:rPr>
-              <a:t>archivos</a:t>
-            </a:r>
-            <a:r>
-              <a:rPr lang="en-US" sz="1800" dirty="0">
-                <a:solidFill>
-                  <a:srgbClr val="4A5568"/>
-                </a:solidFill>
-              </a:rPr>
-              <a:t> .net.xml (red) y .rou.xml (</a:t>
-            </a:r>
-            <a:r>
-              <a:rPr lang="en-US" sz="1800" dirty="0" err="1">
-                <a:solidFill>
-                  <a:srgbClr val="4A5568"/>
-                </a:solidFill>
-              </a:rPr>
-              <a:t>rutas</a:t>
-            </a:r>
-            <a:r>
-              <a:rPr lang="en-US" sz="1800" dirty="0">
-                <a:solidFill>
-                  <a:srgbClr val="4A5568"/>
-                </a:solidFill>
-              </a:rPr>
-              <a:t>) se </a:t>
-            </a:r>
-            <a:r>
-              <a:rPr lang="en-US" sz="1800" dirty="0" err="1">
-                <a:solidFill>
-                  <a:srgbClr val="4A5568"/>
-                </a:solidFill>
-              </a:rPr>
-              <a:t>enlazan</a:t>
-            </a:r>
-            <a:r>
-              <a:rPr lang="en-US" sz="1800" dirty="0">
-                <a:solidFill>
-                  <a:srgbClr val="4A5568"/>
-                </a:solidFill>
-              </a:rPr>
-              <a:t> </a:t>
-            </a:r>
-            <a:r>
-              <a:rPr lang="en-US" sz="1800" dirty="0" err="1">
-                <a:solidFill>
-                  <a:srgbClr val="4A5568"/>
-                </a:solidFill>
-              </a:rPr>
-              <a:t>en</a:t>
-            </a:r>
-            <a:r>
-              <a:rPr lang="en-US" sz="1800" dirty="0">
-                <a:solidFill>
-                  <a:srgbClr val="4A5568"/>
-                </a:solidFill>
-              </a:rPr>
-              <a:t> un .</a:t>
-            </a:r>
-            <a:r>
-              <a:rPr lang="en-US" sz="1800" dirty="0" err="1">
-                <a:solidFill>
-                  <a:srgbClr val="4A5568"/>
-                </a:solidFill>
-              </a:rPr>
-              <a:t>sumocfg</a:t>
-            </a:r>
-            <a:r>
-              <a:rPr lang="en-US" sz="1800" dirty="0">
-                <a:solidFill>
-                  <a:srgbClr val="4A5568"/>
-                </a:solidFill>
-              </a:rPr>
-              <a:t>.</a:t>
-            </a:r>
-            <a:endParaRPr lang="en-US" sz="1800" dirty="0"/>
-          </a:p>
-        </p:txBody>
-      </p:sp>
-      <p:pic>
-        <p:nvPicPr>
-          <p:cNvPr id="7" name="Imagen 6">
-            <a:extLst>
-              <a:ext uri="{FF2B5EF4-FFF2-40B4-BE49-F238E27FC236}">
-                <a16:creationId xmlns:a16="http://schemas.microsoft.com/office/drawing/2014/main" id="{7F6E210A-AC75-BBBD-05F9-575C0F8CB998}"/>
-              </a:ext>
-            </a:extLst>
-          </p:cNvPr>
-          <p:cNvPicPr>
-            <a:picLocks noChangeAspect="1"/>
-          </p:cNvPicPr>
-          <p:nvPr/>
-        </p:nvPicPr>
-        <p:blipFill>
-          <a:blip r:embed="rId3"/>
-          <a:stretch>
-            <a:fillRect/>
-          </a:stretch>
-        </p:blipFill>
-        <p:spPr>
-          <a:xfrm>
-            <a:off x="8233640" y="42972"/>
-            <a:ext cx="681760" cy="737015"/>
-          </a:xfrm>
-          <a:prstGeom prst="rect">
-            <a:avLst/>
-          </a:prstGeom>
-          <a:solidFill>
-            <a:srgbClr val="F4F7FA"/>
-          </a:solidFill>
-        </p:spPr>
-      </p:pic>
-    </p:spTree>
-  </p:cSld>
-  <p:clrMapOvr>
-    <a:masterClrMapping/>
-  </p:clrMapOvr>
-</p:sld>
-</file>
-
-<file path=ppt/slides/slide12.xml><?xml version="1.0" encoding="utf-8"?>
 <p:sld xmlns:a="http://schemas.openxmlformats.org/drawingml/2006/main" xmlns:r="http://schemas.openxmlformats.org/officeDocument/2006/relationships" xmlns:p="http://schemas.openxmlformats.org/presentationml/2006/main">
   <p:cSld>
     <p:spTree>
@@ -3352,8 +2654,8 @@
         </p:blipFill>
         <p:spPr>
           <a:xfrm>
-            <a:off x="4186646" y="1038497"/>
-            <a:ext cx="4800599" cy="3433182"/>
+            <a:off x="4695354" y="1038497"/>
+            <a:ext cx="4291891" cy="3069376"/>
           </a:xfrm>
           <a:prstGeom prst="rect">
             <a:avLst/>
@@ -3434,31 +2736,7 @@
                   <a:srgbClr val="FFFFFF"/>
                 </a:solidFill>
               </a:rPr>
-              <a:t> </a:t>
-            </a:r>
-            <a:r>
-              <a:rPr lang="en-US" sz="2600" b="1" dirty="0" err="1">
-                <a:solidFill>
-                  <a:srgbClr val="FFFFFF"/>
-                </a:solidFill>
-              </a:rPr>
-              <a:t>demanda</a:t>
-            </a:r>
-            <a:r>
-              <a:rPr lang="en-US" sz="2600" b="1" dirty="0">
-                <a:solidFill>
-                  <a:srgbClr val="FFFFFF"/>
-                </a:solidFill>
-              </a:rPr>
-              <a:t> de </a:t>
-            </a:r>
-            <a:r>
-              <a:rPr lang="en-US" sz="2600" b="1" dirty="0" err="1">
-                <a:solidFill>
-                  <a:srgbClr val="FFFFFF"/>
-                </a:solidFill>
-              </a:rPr>
-              <a:t>vehículos</a:t>
+              <a:t> red vial</a:t>
             </a:r>
             <a:endParaRPr lang="en-US" sz="2600" dirty="0"/>
           </a:p>
@@ -3479,7 +2757,7 @@
         <p:spPr>
           <a:xfrm>
             <a:off x="248195" y="927463"/>
-            <a:ext cx="4082142" cy="3170099"/>
+            <a:ext cx="4621678" cy="2831544"/>
           </a:xfrm>
           <a:prstGeom prst="rect">
             <a:avLst/>
@@ -3502,14 +2780,30 @@
                   <a:srgbClr val="4A5568"/>
                 </a:solidFill>
               </a:rPr>
-              <a:t>Demanda de vehículos sobre las red que vayamos a usar</a:t>
-            </a:r>
-          </a:p>
-          <a:p>
-            <a:pPr marL="285750" indent="-285750">
+              <a:t>Una red vial </a:t>
+            </a:r>
+          </a:p>
+          <a:p>
+            <a:pPr marL="742950" lvl="1" indent="-285750">
               <a:buFont typeface="Arial" panose="020B0604020202020204" pitchFamily="34" charset="0"/>
               <a:buChar char="•"/>
             </a:pPr>
+            <a:r>
+              <a:rPr lang="es-ES_tradnl" sz="2000" dirty="0">
+                <a:solidFill>
+                  <a:srgbClr val="4A5568"/>
+                </a:solidFill>
+              </a:rPr>
+              <a:t>Creada a mano con </a:t>
+            </a:r>
+            <a:r>
+              <a:rPr lang="es-ES_tradnl" sz="2000" dirty="0" err="1">
+                <a:solidFill>
+                  <a:srgbClr val="4A5568"/>
+                </a:solidFill>
+              </a:rPr>
+              <a:t>netedit</a:t>
+            </a:r>
             <a:endParaRPr lang="es-ES_tradnl" sz="2000" dirty="0">
               <a:solidFill>
                 <a:srgbClr val="4A5568"/>
@@ -3517,18 +2811,76 @@
             </a:endParaRPr>
           </a:p>
           <a:p>
+            <a:pPr marL="742950" lvl="1" indent="-285750">
+              <a:buFont typeface="Arial" panose="020B0604020202020204" pitchFamily="34" charset="0"/>
+              <a:buChar char="•"/>
+            </a:pPr>
+            <a:r>
+              <a:rPr lang="es-ES_tradnl" sz="2000" dirty="0">
+                <a:solidFill>
+                  <a:srgbClr val="4A5568"/>
+                </a:solidFill>
+              </a:rPr>
+              <a:t>Obtenida de Open Street </a:t>
+            </a:r>
+            <a:r>
+              <a:rPr lang="es-ES_tradnl" sz="2000" dirty="0" err="1">
+                <a:solidFill>
+                  <a:srgbClr val="4A5568"/>
+                </a:solidFill>
+              </a:rPr>
+              <a:t>Map</a:t>
+            </a:r>
+            <a:r>
+              <a:rPr lang="es-ES_tradnl" sz="2000" dirty="0">
+                <a:solidFill>
+                  <a:srgbClr val="4A5568"/>
+                </a:solidFill>
+              </a:rPr>
+              <a:t>(OMS) u otras fuentes</a:t>
+            </a:r>
+          </a:p>
+          <a:p>
+            <a:endParaRPr lang="es-ES_tradnl" sz="1200" dirty="0">
+              <a:solidFill>
+                <a:srgbClr val="4A5568"/>
+              </a:solidFill>
+            </a:endParaRPr>
+          </a:p>
+          <a:p>
             <a:pPr marL="285750" indent="-285750">
               <a:buFont typeface="Arial" panose="020B0604020202020204" pitchFamily="34" charset="0"/>
               <a:buChar char="•"/>
             </a:pPr>
             <a:r>
-              <a:rPr lang="es-ES_tradnl" sz="2000" dirty="0">
-                <a:solidFill>
-                  <a:srgbClr val="4A5568"/>
-                </a:solidFill>
-              </a:rPr>
-              <a:t>randomTrips.py</a:t>
-            </a:r>
+              <a:rPr lang="es-ES_tradnl" sz="1400" dirty="0">
+                <a:solidFill>
+                  <a:srgbClr val="4A5568"/>
+                </a:solidFill>
+              </a:rPr>
+              <a:t>osmWebWizard.py, osmGet.py </a:t>
+            </a:r>
+            <a:r>
+              <a:rPr lang="es-ES_tradnl" sz="1400" dirty="0">
+                <a:solidFill>
+                  <a:srgbClr val="4A5568"/>
+                </a:solidFill>
+                <a:hlinkClick r:id="rId4"/>
+              </a:rPr>
+              <a:t>https://sumo.dlr.de/docs/Tutorials/OSMWebWizard.html</a:t>
+            </a:r>
+            <a:br>
+              <a:rPr lang="es-ES_tradnl" sz="1400" dirty="0">
+                <a:solidFill>
+                  <a:srgbClr val="4A5568"/>
+                </a:solidFill>
+              </a:rPr>
+            </a:br>
+            <a:endParaRPr lang="es-ES_tradnl" sz="1400" dirty="0">
+              <a:solidFill>
+                <a:srgbClr val="4A5568"/>
+              </a:solidFill>
+            </a:endParaRPr>
           </a:p>
           <a:p>
             <a:pPr marL="285750" indent="-285750">
@@ -3536,13 +2888,991 @@
               <a:buChar char="•"/>
             </a:pPr>
             <a:r>
-              <a:rPr lang="es-ES_tradnl" sz="2000" dirty="0" err="1">
-                <a:solidFill>
-                  <a:srgbClr val="4A5568"/>
-                </a:solidFill>
-              </a:rPr>
-              <a:t>duarouter</a:t>
-            </a:r>
+              <a:rPr lang="pt-BR" sz="1400" dirty="0" err="1">
+                <a:solidFill>
+                  <a:srgbClr val="4A5568"/>
+                </a:solidFill>
+              </a:rPr>
+              <a:t>wget</a:t>
+            </a:r>
+            <a:r>
+              <a:rPr lang="pt-BR" sz="1400" dirty="0">
+                <a:solidFill>
+                  <a:srgbClr val="4A5568"/>
+                </a:solidFill>
+              </a:rPr>
+              <a:t> -O </a:t>
+            </a:r>
+            <a:r>
+              <a:rPr lang="pt-BR" sz="1400" dirty="0" err="1">
+                <a:solidFill>
+                  <a:srgbClr val="4A5568"/>
+                </a:solidFill>
+              </a:rPr>
+              <a:t>pamplona.osm</a:t>
+            </a:r>
+            <a:r>
+              <a:rPr lang="pt-BR" sz="1400" dirty="0">
+                <a:solidFill>
+                  <a:srgbClr val="4A5568"/>
+                </a:solidFill>
+              </a:rPr>
+              <a:t> </a:t>
+            </a:r>
+            <a:r>
+              <a:rPr lang="pt-BR" sz="1400" dirty="0">
+                <a:solidFill>
+                  <a:srgbClr val="4A5568"/>
+                </a:solidFill>
+                <a:hlinkClick r:id="rId5"/>
+              </a:rPr>
+              <a:t>https://overpass-api.de/api/map?bbox=-1.70,42.77,-1.59,42.85</a:t>
+            </a:r>
+            <a:endParaRPr lang="pt-BR" sz="1400" dirty="0">
+              <a:solidFill>
+                <a:srgbClr val="4A5568"/>
+              </a:solidFill>
+            </a:endParaRPr>
+          </a:p>
+          <a:p>
+            <a:pPr marL="285750" indent="-285750">
+              <a:buFont typeface="Arial" panose="020B0604020202020204" pitchFamily="34" charset="0"/>
+              <a:buChar char="•"/>
+            </a:pPr>
+            <a:endParaRPr lang="es-ES" sz="1600" u="sng" dirty="0">
+              <a:solidFill>
+                <a:srgbClr val="4A5568"/>
+              </a:solidFill>
+            </a:endParaRPr>
+          </a:p>
+        </p:txBody>
+      </p:sp>
+      <p:pic>
+        <p:nvPicPr>
+          <p:cNvPr id="5" name="Imagen 4">
+            <a:extLst>
+              <a:ext uri="{FF2B5EF4-FFF2-40B4-BE49-F238E27FC236}">
+                <a16:creationId xmlns:a16="http://schemas.microsoft.com/office/drawing/2014/main" id="{3576B787-9DC5-CBFE-C082-43E7B13F134E}"/>
+              </a:ext>
+            </a:extLst>
+          </p:cNvPr>
+          <p:cNvPicPr>
+            <a:picLocks noChangeAspect="1"/>
+          </p:cNvPicPr>
+          <p:nvPr/>
+        </p:nvPicPr>
+        <p:blipFill>
+          <a:blip r:embed="rId6"/>
+          <a:stretch>
+            <a:fillRect/>
+          </a:stretch>
+        </p:blipFill>
+        <p:spPr>
+          <a:xfrm>
+            <a:off x="8233640" y="42972"/>
+            <a:ext cx="681760" cy="737015"/>
+          </a:xfrm>
+          <a:prstGeom prst="rect">
+            <a:avLst/>
+          </a:prstGeom>
+          <a:solidFill>
+            <a:srgbClr val="F4F7FA"/>
+          </a:solidFill>
+        </p:spPr>
+      </p:pic>
+    </p:spTree>
+    <p:extLst>
+      <p:ext uri="{BB962C8B-B14F-4D97-AF65-F5344CB8AC3E}">
+        <p14:creationId xmlns:p14="http://schemas.microsoft.com/office/powerpoint/2010/main" val="2554421174"/>
+      </p:ext>
+    </p:extLst>
+  </p:cSld>
+  <p:clrMapOvr>
+    <a:masterClrMapping/>
+  </p:clrMapOvr>
+</p:sld>
+</file>
+
+<file path=ppt/slides/slide12.xml><?xml version="1.0" encoding="utf-8"?>
+<p:sld xmlns:a="http://schemas.openxmlformats.org/drawingml/2006/main" xmlns:r="http://schemas.openxmlformats.org/officeDocument/2006/relationships" xmlns:p="http://schemas.openxmlformats.org/presentationml/2006/main">
+  <p:cSld name="Slide 10">
+    <p:bg>
+      <p:bgPr>
+        <a:solidFill>
+          <a:srgbClr val="F4F7FA"/>
+        </a:solidFill>
+        <a:effectLst/>
+      </p:bgPr>
+    </p:bg>
+    <p:spTree>
+      <p:nvGrpSpPr>
+        <p:cNvPr id="1" name=""/>
+        <p:cNvGrpSpPr/>
+        <p:nvPr/>
+      </p:nvGrpSpPr>
+      <p:grpSpPr>
+        <a:xfrm>
+          <a:off x="0" y="0"/>
+          <a:ext cx="0" cy="0"/>
+          <a:chOff x="0" y="0"/>
+          <a:chExt cx="0" cy="0"/>
+        </a:xfrm>
+      </p:grpSpPr>
+      <p:sp>
+        <p:nvSpPr>
+          <p:cNvPr id="2" name="Shape 0"/>
+          <p:cNvSpPr/>
+          <p:nvPr/>
+        </p:nvSpPr>
+        <p:spPr>
+          <a:xfrm>
+            <a:off x="0" y="0"/>
+            <a:ext cx="9144000" cy="822960"/>
+          </a:xfrm>
+          <a:prstGeom prst="rect">
+            <a:avLst/>
+          </a:prstGeom>
+          <a:solidFill>
+            <a:srgbClr val="1F3A5F"/>
+          </a:solidFill>
+          <a:ln/>
+        </p:spPr>
+      </p:sp>
+      <p:sp>
+        <p:nvSpPr>
+          <p:cNvPr id="3" name="Text 1"/>
+          <p:cNvSpPr txBox="1"/>
+          <p:nvPr/>
+        </p:nvSpPr>
+        <p:spPr>
+          <a:xfrm>
+            <a:off x="457200" y="91440"/>
+            <a:ext cx="8229600" cy="640080"/>
+          </a:xfrm>
+          <a:prstGeom prst="rect">
+            <a:avLst/>
+          </a:prstGeom>
+          <a:noFill/>
+          <a:ln/>
+        </p:spPr>
+        <p:txBody>
+          <a:bodyPr wrap="square" lIns="0" tIns="0" rIns="0" bIns="0" rtlCol="0" anchor="ctr"/>
+          <a:lstStyle/>
+          <a:p>
+            <a:pPr marL="0" indent="0">
+              <a:buNone/>
+            </a:pPr>
+            <a:r>
+              <a:rPr lang="en-US" sz="2600" b="1" dirty="0" err="1">
+                <a:solidFill>
+                  <a:srgbClr val="FFFFFF"/>
+                </a:solidFill>
+              </a:rPr>
+              <a:t>Crear</a:t>
+            </a:r>
+            <a:r>
+              <a:rPr lang="en-US" sz="2600" b="1" dirty="0">
+                <a:solidFill>
+                  <a:srgbClr val="FFFFFF"/>
+                </a:solidFill>
+              </a:rPr>
+              <a:t> </a:t>
+            </a:r>
+            <a:r>
+              <a:rPr lang="en-US" sz="2600" b="1" dirty="0" err="1">
+                <a:solidFill>
+                  <a:srgbClr val="FFFFFF"/>
+                </a:solidFill>
+              </a:rPr>
+              <a:t>mapa</a:t>
+            </a:r>
+            <a:r>
+              <a:rPr lang="en-US" sz="2600" b="1" dirty="0">
+                <a:solidFill>
+                  <a:srgbClr val="FFFFFF"/>
+                </a:solidFill>
+              </a:rPr>
+              <a:t> de Pamplona</a:t>
+            </a:r>
+            <a:endParaRPr lang="en-US" sz="2600" dirty="0"/>
+          </a:p>
+        </p:txBody>
+      </p:sp>
+      <p:sp>
+        <p:nvSpPr>
+          <p:cNvPr id="4" name="Shape 2"/>
+          <p:cNvSpPr/>
+          <p:nvPr/>
+        </p:nvSpPr>
+        <p:spPr>
+          <a:xfrm>
+            <a:off x="365760" y="1005840"/>
+            <a:ext cx="8412480" cy="3638006"/>
+          </a:xfrm>
+          <a:prstGeom prst="rect">
+            <a:avLst/>
+          </a:prstGeom>
+          <a:solidFill>
+            <a:srgbClr val="1E1E2E"/>
+          </a:solidFill>
+          <a:ln w="12700">
+            <a:solidFill>
+              <a:srgbClr val="1E1E2E"/>
+            </a:solidFill>
+            <a:prstDash val="solid"/>
+          </a:ln>
+        </p:spPr>
+      </p:sp>
+      <p:sp>
+        <p:nvSpPr>
+          <p:cNvPr id="5" name="Text 3"/>
+          <p:cNvSpPr txBox="1"/>
+          <p:nvPr/>
+        </p:nvSpPr>
+        <p:spPr>
+          <a:xfrm>
+            <a:off x="457200" y="1097280"/>
+            <a:ext cx="8229600" cy="3200400"/>
+          </a:xfrm>
+          <a:prstGeom prst="rect">
+            <a:avLst/>
+          </a:prstGeom>
+          <a:noFill/>
+          <a:ln/>
+        </p:spPr>
+        <p:txBody>
+          <a:bodyPr wrap="square" rtlCol="0" anchor="t"/>
+          <a:lstStyle/>
+          <a:p>
+            <a:pPr marL="0" indent="0">
+              <a:buNone/>
+            </a:pPr>
+            <a:r>
+              <a:rPr lang="en-US" sz="1200" dirty="0">
+                <a:solidFill>
+                  <a:srgbClr val="7F849C"/>
+                </a:solidFill>
+                <a:latin typeface="Consolas" pitchFamily="34" charset="0"/>
+                <a:ea typeface="Consolas" pitchFamily="34" charset="-122"/>
+                <a:cs typeface="Consolas" pitchFamily="34" charset="-120"/>
+              </a:rPr>
+              <a:t># 1. Descargar el mapa de Pamplona (bbox: oeste, sur, este, norte)</a:t>
+            </a:r>
+            <a:endParaRPr lang="en-US" sz="1200" dirty="0"/>
+          </a:p>
+          <a:p>
+            <a:pPr marL="0" indent="0">
+              <a:buNone/>
+            </a:pPr>
+            <a:r>
+              <a:rPr lang="pt-BR" sz="1200" dirty="0" err="1">
+                <a:solidFill>
+                  <a:srgbClr val="A6E3A1"/>
+                </a:solidFill>
+                <a:latin typeface="Consolas" pitchFamily="34" charset="0"/>
+                <a:ea typeface="Consolas" pitchFamily="34" charset="-122"/>
+                <a:cs typeface="Consolas" pitchFamily="34" charset="-120"/>
+              </a:rPr>
+              <a:t>wget</a:t>
+            </a:r>
+            <a:r>
+              <a:rPr lang="pt-BR" sz="1200" dirty="0">
+                <a:solidFill>
+                  <a:srgbClr val="A6E3A1"/>
+                </a:solidFill>
+                <a:latin typeface="Consolas" pitchFamily="34" charset="0"/>
+                <a:ea typeface="Consolas" pitchFamily="34" charset="-122"/>
+                <a:cs typeface="Consolas" pitchFamily="34" charset="-120"/>
+              </a:rPr>
+              <a:t> -O </a:t>
+            </a:r>
+            <a:r>
+              <a:rPr lang="pt-BR" sz="1200" dirty="0" err="1">
+                <a:solidFill>
+                  <a:srgbClr val="A6E3A1"/>
+                </a:solidFill>
+                <a:latin typeface="Consolas" pitchFamily="34" charset="0"/>
+                <a:ea typeface="Consolas" pitchFamily="34" charset="-122"/>
+                <a:cs typeface="Consolas" pitchFamily="34" charset="-120"/>
+              </a:rPr>
+              <a:t>pamplona.osm</a:t>
+            </a:r>
+            <a:r>
+              <a:rPr lang="pt-BR" sz="1200" dirty="0">
+                <a:solidFill>
+                  <a:srgbClr val="A6E3A1"/>
+                </a:solidFill>
+                <a:latin typeface="Consolas" pitchFamily="34" charset="0"/>
+                <a:ea typeface="Consolas" pitchFamily="34" charset="-122"/>
+                <a:cs typeface="Consolas" pitchFamily="34" charset="-120"/>
+              </a:rPr>
+              <a:t> "https://overpass-api.de/api/</a:t>
+            </a:r>
+            <a:r>
+              <a:rPr lang="pt-BR" sz="1200" dirty="0" err="1">
+                <a:solidFill>
+                  <a:srgbClr val="A6E3A1"/>
+                </a:solidFill>
+                <a:latin typeface="Consolas" pitchFamily="34" charset="0"/>
+                <a:ea typeface="Consolas" pitchFamily="34" charset="-122"/>
+                <a:cs typeface="Consolas" pitchFamily="34" charset="-120"/>
+              </a:rPr>
+              <a:t>map?bbox</a:t>
+            </a:r>
+            <a:r>
+              <a:rPr lang="pt-BR" sz="1200" dirty="0">
+                <a:solidFill>
+                  <a:srgbClr val="A6E3A1"/>
+                </a:solidFill>
+                <a:latin typeface="Consolas" pitchFamily="34" charset="0"/>
+                <a:ea typeface="Consolas" pitchFamily="34" charset="-122"/>
+                <a:cs typeface="Consolas" pitchFamily="34" charset="-120"/>
+              </a:rPr>
+              <a:t>=-1.72361,42.76307,-1.54817,42.84873"</a:t>
+            </a:r>
+            <a:endParaRPr lang="en-US" sz="1200" dirty="0">
+              <a:solidFill>
+                <a:srgbClr val="7F849C"/>
+              </a:solidFill>
+              <a:latin typeface="Consolas" pitchFamily="34" charset="0"/>
+              <a:ea typeface="Consolas" pitchFamily="34" charset="-122"/>
+              <a:cs typeface="Consolas" pitchFamily="34" charset="-120"/>
+            </a:endParaRPr>
+          </a:p>
+          <a:p>
+            <a:pPr marL="0" indent="0">
+              <a:buNone/>
+            </a:pPr>
+            <a:endParaRPr lang="en-US" sz="1200" dirty="0">
+              <a:solidFill>
+                <a:srgbClr val="7F849C"/>
+              </a:solidFill>
+              <a:latin typeface="Consolas" pitchFamily="34" charset="0"/>
+              <a:ea typeface="Consolas" pitchFamily="34" charset="-122"/>
+              <a:cs typeface="Consolas" pitchFamily="34" charset="-120"/>
+            </a:endParaRPr>
+          </a:p>
+          <a:p>
+            <a:pPr marL="0" indent="0">
+              <a:buNone/>
+            </a:pPr>
+            <a:r>
+              <a:rPr lang="en-US" sz="1200" dirty="0">
+                <a:solidFill>
+                  <a:srgbClr val="7F849C"/>
+                </a:solidFill>
+                <a:latin typeface="Consolas" pitchFamily="34" charset="0"/>
+                <a:ea typeface="Consolas" pitchFamily="34" charset="-122"/>
+                <a:cs typeface="Consolas" pitchFamily="34" charset="-120"/>
+              </a:rPr>
+              <a:t># 2. Convertir a red de SUMO </a:t>
+            </a:r>
+          </a:p>
+          <a:p>
+            <a:r>
+              <a:rPr lang="en-US" sz="1100" dirty="0">
+                <a:solidFill>
+                  <a:srgbClr val="7F849C"/>
+                </a:solidFill>
+                <a:latin typeface="Consolas" pitchFamily="34" charset="0"/>
+              </a:rPr>
+              <a:t>#Conservar vias </a:t>
+            </a:r>
+            <a:r>
+              <a:rPr lang="en-US" sz="1100" dirty="0" err="1">
+                <a:solidFill>
+                  <a:srgbClr val="7F849C"/>
+                </a:solidFill>
+                <a:latin typeface="Consolas" pitchFamily="34" charset="0"/>
+              </a:rPr>
+              <a:t>por</a:t>
+            </a:r>
+            <a:r>
+              <a:rPr lang="en-US" sz="1100" dirty="0">
+                <a:solidFill>
+                  <a:srgbClr val="7F849C"/>
+                </a:solidFill>
+                <a:latin typeface="Consolas" pitchFamily="34" charset="0"/>
+              </a:rPr>
+              <a:t> </a:t>
+            </a:r>
+            <a:r>
+              <a:rPr lang="en-US" sz="1100" dirty="0" err="1">
+                <a:solidFill>
+                  <a:srgbClr val="7F849C"/>
+                </a:solidFill>
+                <a:latin typeface="Consolas" pitchFamily="34" charset="0"/>
+              </a:rPr>
+              <a:t>tipo</a:t>
+            </a:r>
+            <a:r>
+              <a:rPr lang="en-US" sz="1100" dirty="0">
+                <a:solidFill>
+                  <a:srgbClr val="7F849C"/>
+                </a:solidFill>
+                <a:latin typeface="Consolas" pitchFamily="34" charset="0"/>
+              </a:rPr>
+              <a:t> de </a:t>
+            </a:r>
+            <a:r>
+              <a:rPr lang="en-US" sz="1100" dirty="0" err="1">
+                <a:solidFill>
+                  <a:srgbClr val="7F849C"/>
+                </a:solidFill>
+                <a:latin typeface="Consolas" pitchFamily="34" charset="0"/>
+              </a:rPr>
+              <a:t>vehiculo</a:t>
+            </a:r>
+            <a:r>
+              <a:rPr lang="en-US" sz="1100" dirty="0">
+                <a:solidFill>
+                  <a:srgbClr val="7F849C"/>
+                </a:solidFill>
+                <a:latin typeface="Consolas" pitchFamily="34" charset="0"/>
+              </a:rPr>
+              <a:t> que </a:t>
+            </a:r>
+            <a:r>
+              <a:rPr lang="en-US" sz="1100" dirty="0" err="1">
+                <a:solidFill>
+                  <a:srgbClr val="7F849C"/>
+                </a:solidFill>
+                <a:latin typeface="Consolas" pitchFamily="34" charset="0"/>
+              </a:rPr>
+              <a:t>circula</a:t>
+            </a:r>
+            <a:r>
+              <a:rPr lang="en-US" sz="1100" dirty="0">
+                <a:solidFill>
+                  <a:srgbClr val="7F849C"/>
+                </a:solidFill>
+                <a:latin typeface="Consolas" pitchFamily="34" charset="0"/>
+              </a:rPr>
+              <a:t> </a:t>
+            </a:r>
+            <a:r>
+              <a:rPr lang="en-US" sz="1100" dirty="0" err="1">
+                <a:solidFill>
+                  <a:srgbClr val="7F849C"/>
+                </a:solidFill>
+                <a:latin typeface="Consolas" pitchFamily="34" charset="0"/>
+              </a:rPr>
+              <a:t>por</a:t>
+            </a:r>
+            <a:r>
+              <a:rPr lang="en-US" sz="1100" dirty="0">
+                <a:solidFill>
+                  <a:srgbClr val="7F849C"/>
+                </a:solidFill>
+                <a:latin typeface="Consolas" pitchFamily="34" charset="0"/>
+              </a:rPr>
+              <a:t> </a:t>
+            </a:r>
+            <a:r>
+              <a:rPr lang="en-US" sz="1100" dirty="0" err="1">
+                <a:solidFill>
+                  <a:srgbClr val="7F849C"/>
+                </a:solidFill>
+                <a:latin typeface="Consolas" pitchFamily="34" charset="0"/>
+              </a:rPr>
+              <a:t>ella</a:t>
+            </a:r>
+            <a:endParaRPr lang="en-US" sz="1100" dirty="0"/>
+          </a:p>
+          <a:p>
+            <a:pPr marL="0" indent="0">
+              <a:buNone/>
+            </a:pPr>
+            <a:r>
+              <a:rPr lang="en-US" sz="1100" dirty="0" err="1">
+                <a:solidFill>
+                  <a:srgbClr val="A6E3A1"/>
+                </a:solidFill>
+                <a:latin typeface="Consolas" pitchFamily="34" charset="0"/>
+                <a:ea typeface="Consolas" pitchFamily="34" charset="-122"/>
+                <a:cs typeface="Consolas" pitchFamily="34" charset="-120"/>
+              </a:rPr>
+              <a:t>netconvert</a:t>
+            </a:r>
+            <a:r>
+              <a:rPr lang="en-US" sz="1100" dirty="0">
+                <a:solidFill>
+                  <a:srgbClr val="A6E3A1"/>
+                </a:solidFill>
+                <a:latin typeface="Consolas" pitchFamily="34" charset="0"/>
+                <a:ea typeface="Consolas" pitchFamily="34" charset="-122"/>
+                <a:cs typeface="Consolas" pitchFamily="34" charset="-120"/>
+              </a:rPr>
+              <a:t> --</a:t>
+            </a:r>
+            <a:r>
+              <a:rPr lang="en-US" sz="1100" dirty="0" err="1">
+                <a:solidFill>
+                  <a:srgbClr val="A6E3A1"/>
+                </a:solidFill>
+                <a:latin typeface="Consolas" pitchFamily="34" charset="0"/>
+                <a:ea typeface="Consolas" pitchFamily="34" charset="-122"/>
+                <a:cs typeface="Consolas" pitchFamily="34" charset="-120"/>
+              </a:rPr>
+              <a:t>osm</a:t>
+            </a:r>
+            <a:r>
+              <a:rPr lang="en-US" sz="1100" dirty="0">
+                <a:solidFill>
+                  <a:srgbClr val="A6E3A1"/>
+                </a:solidFill>
+                <a:latin typeface="Consolas" pitchFamily="34" charset="0"/>
+                <a:ea typeface="Consolas" pitchFamily="34" charset="-122"/>
+                <a:cs typeface="Consolas" pitchFamily="34" charset="-120"/>
+              </a:rPr>
+              <a:t>-files </a:t>
+            </a:r>
+            <a:r>
+              <a:rPr lang="en-US" sz="1100" dirty="0" err="1">
+                <a:solidFill>
+                  <a:srgbClr val="A6E3A1"/>
+                </a:solidFill>
+                <a:latin typeface="Consolas" pitchFamily="34" charset="0"/>
+                <a:ea typeface="Consolas" pitchFamily="34" charset="-122"/>
+                <a:cs typeface="Consolas" pitchFamily="34" charset="-120"/>
+              </a:rPr>
+              <a:t>pamplona.osm</a:t>
+            </a:r>
+            <a:r>
+              <a:rPr lang="en-US" sz="1100" dirty="0">
+                <a:solidFill>
+                  <a:srgbClr val="A6E3A1"/>
+                </a:solidFill>
+                <a:latin typeface="Consolas" pitchFamily="34" charset="0"/>
+                <a:ea typeface="Consolas" pitchFamily="34" charset="-122"/>
+                <a:cs typeface="Consolas" pitchFamily="34" charset="-120"/>
+              </a:rPr>
+              <a:t> --output-file pamplona.net.xml  --remove-</a:t>
+            </a:r>
+            <a:r>
+              <a:rPr lang="en-US" sz="1100" dirty="0" err="1">
+                <a:solidFill>
+                  <a:srgbClr val="A6E3A1"/>
+                </a:solidFill>
+                <a:latin typeface="Consolas" pitchFamily="34" charset="0"/>
+                <a:ea typeface="Consolas" pitchFamily="34" charset="-122"/>
+                <a:cs typeface="Consolas" pitchFamily="34" charset="-120"/>
+              </a:rPr>
+              <a:t>edges.isolated</a:t>
+            </a:r>
+            <a:r>
+              <a:rPr lang="en-US" sz="1100" dirty="0">
+                <a:solidFill>
+                  <a:srgbClr val="A6E3A1"/>
+                </a:solidFill>
+                <a:latin typeface="Consolas" pitchFamily="34" charset="0"/>
+                <a:ea typeface="Consolas" pitchFamily="34" charset="-122"/>
+                <a:cs typeface="Consolas" pitchFamily="34" charset="-120"/>
+              </a:rPr>
+              <a:t>  --keep-edges.by-</a:t>
+            </a:r>
+            <a:r>
+              <a:rPr lang="en-US" sz="1100" dirty="0" err="1">
+                <a:solidFill>
+                  <a:srgbClr val="A6E3A1"/>
+                </a:solidFill>
+                <a:latin typeface="Consolas" pitchFamily="34" charset="0"/>
+                <a:ea typeface="Consolas" pitchFamily="34" charset="-122"/>
+                <a:cs typeface="Consolas" pitchFamily="34" charset="-120"/>
+              </a:rPr>
+              <a:t>vclass</a:t>
+            </a:r>
+            <a:r>
+              <a:rPr lang="en-US" sz="1100" dirty="0">
+                <a:solidFill>
+                  <a:srgbClr val="A6E3A1"/>
+                </a:solidFill>
+                <a:latin typeface="Consolas" pitchFamily="34" charset="0"/>
+                <a:ea typeface="Consolas" pitchFamily="34" charset="-122"/>
+                <a:cs typeface="Consolas" pitchFamily="34" charset="-120"/>
+              </a:rPr>
+              <a:t> passenger</a:t>
+            </a:r>
+          </a:p>
+          <a:p>
+            <a:pPr marL="0" indent="0">
+              <a:buNone/>
+            </a:pPr>
+            <a:endParaRPr lang="en-US" sz="1200" dirty="0">
+              <a:solidFill>
+                <a:srgbClr val="7F849C"/>
+              </a:solidFill>
+              <a:latin typeface="Consolas" pitchFamily="34" charset="0"/>
+              <a:ea typeface="Consolas" pitchFamily="34" charset="-122"/>
+              <a:cs typeface="Consolas" pitchFamily="34" charset="-120"/>
+            </a:endParaRPr>
+          </a:p>
+          <a:p>
+            <a:pPr marL="0" indent="0">
+              <a:buNone/>
+            </a:pPr>
+            <a:endParaRPr lang="en-US" sz="1200" dirty="0"/>
+          </a:p>
+        </p:txBody>
+      </p:sp>
+      <p:sp>
+        <p:nvSpPr>
+          <p:cNvPr id="6" name="CuadroTexto 5">
+            <a:extLst>
+              <a:ext uri="{FF2B5EF4-FFF2-40B4-BE49-F238E27FC236}">
+                <a16:creationId xmlns:a16="http://schemas.microsoft.com/office/drawing/2014/main" id="{69795DF5-CB45-01CC-992C-BF241DC8F537}"/>
+              </a:ext>
+            </a:extLst>
+          </p:cNvPr>
+          <p:cNvSpPr txBox="1"/>
+          <p:nvPr/>
+        </p:nvSpPr>
+        <p:spPr>
+          <a:xfrm>
+            <a:off x="457200" y="4728753"/>
+            <a:ext cx="6874382" cy="369332"/>
+          </a:xfrm>
+          <a:prstGeom prst="rect">
+            <a:avLst/>
+          </a:prstGeom>
+          <a:noFill/>
+        </p:spPr>
+        <p:txBody>
+          <a:bodyPr wrap="none" rtlCol="0">
+            <a:spAutoFit/>
+          </a:bodyPr>
+          <a:lstStyle/>
+          <a:p>
+            <a:r>
+              <a:rPr lang="en-US" sz="1800" dirty="0">
+                <a:solidFill>
+                  <a:srgbClr val="4A5568"/>
+                </a:solidFill>
+              </a:rPr>
+              <a:t>Los </a:t>
+            </a:r>
+            <a:r>
+              <a:rPr lang="en-US" sz="1800" dirty="0" err="1">
+                <a:solidFill>
+                  <a:srgbClr val="4A5568"/>
+                </a:solidFill>
+              </a:rPr>
+              <a:t>archivos</a:t>
+            </a:r>
+            <a:r>
+              <a:rPr lang="en-US" sz="1800" dirty="0">
+                <a:solidFill>
+                  <a:srgbClr val="4A5568"/>
+                </a:solidFill>
+              </a:rPr>
+              <a:t> .net.xml (red) y .rou.xml (</a:t>
+            </a:r>
+            <a:r>
+              <a:rPr lang="en-US" sz="1800" dirty="0" err="1">
+                <a:solidFill>
+                  <a:srgbClr val="4A5568"/>
+                </a:solidFill>
+              </a:rPr>
+              <a:t>rutas</a:t>
+            </a:r>
+            <a:r>
+              <a:rPr lang="en-US" sz="1800" dirty="0">
+                <a:solidFill>
+                  <a:srgbClr val="4A5568"/>
+                </a:solidFill>
+              </a:rPr>
+              <a:t>) se </a:t>
+            </a:r>
+            <a:r>
+              <a:rPr lang="en-US" sz="1800" dirty="0" err="1">
+                <a:solidFill>
+                  <a:srgbClr val="4A5568"/>
+                </a:solidFill>
+              </a:rPr>
+              <a:t>enlazan</a:t>
+            </a:r>
+            <a:r>
+              <a:rPr lang="en-US" sz="1800" dirty="0">
+                <a:solidFill>
+                  <a:srgbClr val="4A5568"/>
+                </a:solidFill>
+              </a:rPr>
+              <a:t> </a:t>
+            </a:r>
+            <a:r>
+              <a:rPr lang="en-US" sz="1800" dirty="0" err="1">
+                <a:solidFill>
+                  <a:srgbClr val="4A5568"/>
+                </a:solidFill>
+              </a:rPr>
+              <a:t>en</a:t>
+            </a:r>
+            <a:r>
+              <a:rPr lang="en-US" sz="1800" dirty="0">
+                <a:solidFill>
+                  <a:srgbClr val="4A5568"/>
+                </a:solidFill>
+              </a:rPr>
+              <a:t> un .</a:t>
+            </a:r>
+            <a:r>
+              <a:rPr lang="en-US" sz="1800" dirty="0" err="1">
+                <a:solidFill>
+                  <a:srgbClr val="4A5568"/>
+                </a:solidFill>
+              </a:rPr>
+              <a:t>sumocfg</a:t>
+            </a:r>
+            <a:r>
+              <a:rPr lang="en-US" sz="1800" dirty="0">
+                <a:solidFill>
+                  <a:srgbClr val="4A5568"/>
+                </a:solidFill>
+              </a:rPr>
+              <a:t>.</a:t>
+            </a:r>
+            <a:endParaRPr lang="en-US" sz="1800" dirty="0"/>
+          </a:p>
+        </p:txBody>
+      </p:sp>
+      <p:pic>
+        <p:nvPicPr>
+          <p:cNvPr id="7" name="Imagen 6">
+            <a:extLst>
+              <a:ext uri="{FF2B5EF4-FFF2-40B4-BE49-F238E27FC236}">
+                <a16:creationId xmlns:a16="http://schemas.microsoft.com/office/drawing/2014/main" id="{7F6E210A-AC75-BBBD-05F9-575C0F8CB998}"/>
+              </a:ext>
+            </a:extLst>
+          </p:cNvPr>
+          <p:cNvPicPr>
+            <a:picLocks noChangeAspect="1"/>
+          </p:cNvPicPr>
+          <p:nvPr/>
+        </p:nvPicPr>
+        <p:blipFill>
+          <a:blip r:embed="rId3"/>
+          <a:stretch>
+            <a:fillRect/>
+          </a:stretch>
+        </p:blipFill>
+        <p:spPr>
+          <a:xfrm>
+            <a:off x="8233640" y="42972"/>
+            <a:ext cx="681760" cy="737015"/>
+          </a:xfrm>
+          <a:prstGeom prst="rect">
+            <a:avLst/>
+          </a:prstGeom>
+          <a:solidFill>
+            <a:srgbClr val="F4F7FA"/>
+          </a:solidFill>
+        </p:spPr>
+      </p:pic>
+    </p:spTree>
+  </p:cSld>
+  <p:clrMapOvr>
+    <a:masterClrMapping/>
+  </p:clrMapOvr>
+</p:sld>
+</file>
+
+<file path=ppt/slides/slide13.xml><?xml version="1.0" encoding="utf-8"?>
+<p:sld xmlns:a="http://schemas.openxmlformats.org/drawingml/2006/main" xmlns:r="http://schemas.openxmlformats.org/officeDocument/2006/relationships" xmlns:p="http://schemas.openxmlformats.org/presentationml/2006/main">
+  <p:cSld>
+    <p:spTree>
+      <p:nvGrpSpPr>
+        <p:cNvPr id="1" name=""/>
+        <p:cNvGrpSpPr/>
+        <p:nvPr/>
+      </p:nvGrpSpPr>
+      <p:grpSpPr>
+        <a:xfrm>
+          <a:off x="0" y="0"/>
+          <a:ext cx="0" cy="0"/>
+          <a:chOff x="0" y="0"/>
+          <a:chExt cx="0" cy="0"/>
+        </a:xfrm>
+      </p:grpSpPr>
+      <p:pic>
+        <p:nvPicPr>
+          <p:cNvPr id="6" name="Imagen 5">
+            <a:extLst>
+              <a:ext uri="{FF2B5EF4-FFF2-40B4-BE49-F238E27FC236}">
+                <a16:creationId xmlns:a16="http://schemas.microsoft.com/office/drawing/2014/main" id="{416D6091-5BA4-C6CF-B043-57517D67299F}"/>
+              </a:ext>
+            </a:extLst>
+          </p:cNvPr>
+          <p:cNvPicPr>
+            <a:picLocks noChangeAspect="1"/>
+          </p:cNvPicPr>
+          <p:nvPr/>
+        </p:nvPicPr>
+        <p:blipFill>
+          <a:blip r:embed="rId3"/>
+          <a:stretch>
+            <a:fillRect/>
+          </a:stretch>
+        </p:blipFill>
+        <p:spPr>
+          <a:xfrm>
+            <a:off x="4186646" y="1038497"/>
+            <a:ext cx="4800599" cy="3433182"/>
+          </a:xfrm>
+          <a:prstGeom prst="rect">
+            <a:avLst/>
+          </a:prstGeom>
+        </p:spPr>
+      </p:pic>
+      <p:sp>
+        <p:nvSpPr>
+          <p:cNvPr id="2" name="Shape 0"/>
+          <p:cNvSpPr/>
+          <p:nvPr/>
+        </p:nvSpPr>
+        <p:spPr>
+          <a:xfrm>
+            <a:off x="0" y="0"/>
+            <a:ext cx="9144000" cy="822960"/>
+          </a:xfrm>
+          <a:prstGeom prst="rect">
+            <a:avLst/>
+          </a:prstGeom>
+          <a:solidFill>
+            <a:srgbClr val="1F3A5F"/>
+          </a:solidFill>
+          <a:ln/>
+        </p:spPr>
+      </p:sp>
+      <p:sp>
+        <p:nvSpPr>
+          <p:cNvPr id="3" name="Text 1"/>
+          <p:cNvSpPr txBox="1"/>
+          <p:nvPr/>
+        </p:nvSpPr>
+        <p:spPr>
+          <a:xfrm>
+            <a:off x="457200" y="91440"/>
+            <a:ext cx="8229600" cy="640080"/>
+          </a:xfrm>
+          <a:prstGeom prst="rect">
+            <a:avLst/>
+          </a:prstGeom>
+          <a:noFill/>
+          <a:ln/>
+        </p:spPr>
+        <p:txBody>
+          <a:bodyPr wrap="square" lIns="0" tIns="0" rIns="0" bIns="0" rtlCol="0" anchor="ctr"/>
+          <a:lstStyle/>
+          <a:p>
+            <a:pPr marL="0" indent="0">
+              <a:buNone/>
+            </a:pPr>
+            <a:r>
+              <a:rPr lang="en-US" sz="2600" b="1" dirty="0" err="1">
+                <a:solidFill>
+                  <a:srgbClr val="FFFFFF"/>
+                </a:solidFill>
+              </a:rPr>
+              <a:t>Creación</a:t>
+            </a:r>
+            <a:r>
+              <a:rPr lang="en-US" sz="2600" b="1" dirty="0">
+                <a:solidFill>
+                  <a:srgbClr val="FFFFFF"/>
+                </a:solidFill>
+              </a:rPr>
+              <a:t> de </a:t>
+            </a:r>
+            <a:r>
+              <a:rPr lang="en-US" sz="2600" b="1" dirty="0" err="1">
+                <a:solidFill>
+                  <a:srgbClr val="FFFFFF"/>
+                </a:solidFill>
+              </a:rPr>
+              <a:t>una</a:t>
+            </a:r>
+            <a:r>
+              <a:rPr lang="en-US" sz="2600" b="1" dirty="0">
+                <a:solidFill>
+                  <a:srgbClr val="FFFFFF"/>
+                </a:solidFill>
+              </a:rPr>
+              <a:t> </a:t>
+            </a:r>
+            <a:r>
+              <a:rPr lang="en-US" sz="2600" b="1" dirty="0" err="1">
+                <a:solidFill>
+                  <a:srgbClr val="FFFFFF"/>
+                </a:solidFill>
+              </a:rPr>
+              <a:t>demanda</a:t>
+            </a:r>
+            <a:r>
+              <a:rPr lang="en-US" sz="2600" b="1" dirty="0">
+                <a:solidFill>
+                  <a:srgbClr val="FFFFFF"/>
+                </a:solidFill>
+              </a:rPr>
+              <a:t> de </a:t>
+            </a:r>
+            <a:r>
+              <a:rPr lang="en-US" sz="2600" b="1" dirty="0" err="1">
+                <a:solidFill>
+                  <a:srgbClr val="FFFFFF"/>
+                </a:solidFill>
+              </a:rPr>
+              <a:t>vehículos</a:t>
+            </a:r>
+            <a:endParaRPr lang="en-US" sz="2600" dirty="0"/>
+          </a:p>
+        </p:txBody>
+      </p:sp>
+      <p:sp>
+        <p:nvSpPr>
+          <p:cNvPr id="4" name="CuadroTexto 3">
+            <a:extLst>
+              <a:ext uri="{FF2B5EF4-FFF2-40B4-BE49-F238E27FC236}">
+                <a16:creationId xmlns:a16="http://schemas.microsoft.com/office/drawing/2014/main" id="{69CB68D4-E6E3-E651-DCF0-9251A8D9F9F4}"/>
+              </a:ext>
+            </a:extLst>
+          </p:cNvPr>
+          <p:cNvSpPr txBox="1"/>
+          <p:nvPr/>
+        </p:nvSpPr>
+        <p:spPr>
+          <a:xfrm>
+            <a:off x="248195" y="927463"/>
+            <a:ext cx="4082142" cy="3170099"/>
+          </a:xfrm>
+          <a:prstGeom prst="rect">
+            <a:avLst/>
+          </a:prstGeom>
+          <a:noFill/>
+        </p:spPr>
+        <p:txBody>
+          <a:bodyPr wrap="square" rtlCol="0">
+            <a:spAutoFit/>
+          </a:bodyPr>
+          <a:lstStyle/>
+          <a:p>
+            <a:pPr marL="285750" indent="-285750">
+              <a:buFont typeface="Arial" panose="020B0604020202020204" pitchFamily="34" charset="0"/>
+              <a:buChar char="•"/>
+            </a:pPr>
+            <a:r>
+              <a:rPr lang="es-ES_tradnl" sz="2000" dirty="0">
+                <a:solidFill>
+                  <a:srgbClr val="4A5568"/>
+                </a:solidFill>
+              </a:rPr>
+              <a:t>Añadir tráfico de vehículos sobre las red que vayamos a usar</a:t>
+            </a:r>
+          </a:p>
+          <a:p>
+            <a:pPr marL="285750" indent="-285750">
+              <a:buFont typeface="Arial" panose="020B0604020202020204" pitchFamily="34" charset="0"/>
+              <a:buChar char="•"/>
+            </a:pPr>
             <a:endParaRPr lang="es-ES_tradnl" sz="2000" dirty="0">
               <a:solidFill>
                 <a:srgbClr val="4A5568"/>
@@ -3560,6 +3890,20 @@
                   <a:srgbClr val="4A5568"/>
                 </a:solidFill>
               </a:rPr>
+              <a:t>randomTrips.py</a:t>
+            </a:r>
+          </a:p>
+          <a:p>
+            <a:pPr marL="285750" indent="-285750">
+              <a:buFont typeface="Arial" panose="020B0604020202020204" pitchFamily="34" charset="0"/>
+              <a:buChar char="•"/>
+            </a:pPr>
+            <a:r>
+              <a:rPr lang="es-ES_tradnl" sz="2000" dirty="0">
+                <a:solidFill>
+                  <a:srgbClr val="4A5568"/>
+                </a:solidFill>
+              </a:rPr>
               <a:t>Tipos de “viajes”</a:t>
             </a:r>
           </a:p>
@@ -3603,6 +3947,20 @@
                 </a:solidFill>
               </a:rPr>
               <a:t>Flujos</a:t>
+            </a:r>
+          </a:p>
+          <a:p>
+            <a:pPr marL="285750" indent="-285750">
+              <a:buFont typeface="Arial" panose="020B0604020202020204" pitchFamily="34" charset="0"/>
+              <a:buChar char="•"/>
+            </a:pPr>
+            <a:r>
+              <a:rPr lang="es-ES_tradnl" sz="2000" dirty="0">
+                <a:solidFill>
+                  <a:srgbClr val="4A5568"/>
+                </a:solidFill>
+              </a:rPr>
+              <a:t>Dijkstra</a:t>
             </a:r>
           </a:p>
           <a:p>
@@ -3688,7 +4046,7 @@
 </p:sld>
 </file>
 
-<file path=ppt/slides/slide13.xml><?xml version="1.0" encoding="utf-8"?>
+<file path=ppt/slides/slide14.xml><?xml version="1.0" encoding="utf-8"?>
 <p:sld xmlns:a="http://schemas.openxmlformats.org/drawingml/2006/main" xmlns:r="http://schemas.openxmlformats.org/officeDocument/2006/relationships" xmlns:p="http://schemas.openxmlformats.org/presentationml/2006/main">
   <p:cSld name="Slide 6">
     <p:bg>
@@ -3834,8 +4192,8 @@
         </p:nvSpPr>
         <p:spPr>
           <a:xfrm>
-            <a:off x="640080" y="1188720"/>
-            <a:ext cx="7863840" cy="2468880"/>
+            <a:off x="640080" y="1188719"/>
+            <a:ext cx="7863840" cy="3095897"/>
           </a:xfrm>
           <a:prstGeom prst="rect">
             <a:avLst/>
@@ -3996,19 +4354,6 @@
             <a:pPr marL="0" indent="0">
               <a:buNone/>
             </a:pPr>
-            <a:endParaRPr lang="en-US" sz="1600" dirty="0">
-              <a:solidFill>
-                <a:srgbClr val="7F849C"/>
-              </a:solidFill>
-              <a:latin typeface="Consolas" pitchFamily="34" charset="0"/>
-              <a:ea typeface="Consolas" pitchFamily="34" charset="-122"/>
-              <a:cs typeface="Consolas" pitchFamily="34" charset="-120"/>
-            </a:endParaRPr>
-          </a:p>
-          <a:p>
-            <a:pPr marL="0" indent="0">
-              <a:buNone/>
-            </a:pPr>
             <a:r>
               <a:rPr lang="en-US" sz="1600" dirty="0">
                 <a:solidFill>
@@ -4092,8 +4437,21 @@
               </a:rPr>
               <a:t>-output fcd.xml </a:t>
             </a:r>
-            <a:br>
-              <a:rPr lang="en-US" sz="1600" dirty="0">
+          </a:p>
+          <a:p>
+            <a:pPr marL="0" indent="0">
+              <a:buNone/>
+            </a:pPr>
+            <a:endParaRPr lang="en-US" sz="1600" dirty="0">
+              <a:solidFill>
+                <a:srgbClr val="A6E3A1"/>
+              </a:solidFill>
+              <a:latin typeface="Consolas" pitchFamily="34" charset="0"/>
+            </a:endParaRPr>
+          </a:p>
+          <a:p>
+            <a:r>
+              <a:rPr lang="en-US" sz="1400" dirty="0">
                 <a:solidFill>
                   <a:srgbClr val="A6E3A1"/>
                 </a:solidFill>
@@ -4101,9 +4459,10 @@
                 <a:ea typeface="Consolas" pitchFamily="34" charset="-122"/>
                 <a:cs typeface="Consolas" pitchFamily="34" charset="-120"/>
               </a:rPr>
-            </a:br>
-            <a:r>
-              <a:rPr lang="en-US" sz="1600" dirty="0">
+              <a:t>sumo-</a:t>
+            </a:r>
+            <a:r>
+              <a:rPr lang="en-US" sz="1400" dirty="0" err="1">
                 <a:solidFill>
                   <a:srgbClr val="A6E3A1"/>
                 </a:solidFill>
@@ -4111,8 +4470,69 @@
                 <a:ea typeface="Consolas" pitchFamily="34" charset="-122"/>
                 <a:cs typeface="Consolas" pitchFamily="34" charset="-120"/>
               </a:rPr>
-              <a:t>--step-length 0,01 </a:t>
-            </a:r>
+              <a:t>gui</a:t>
+            </a:r>
+            <a:r>
+              <a:rPr lang="en-US" sz="1400" dirty="0">
+                <a:solidFill>
+                  <a:srgbClr val="A6E3A1"/>
+                </a:solidFill>
+                <a:latin typeface="Consolas" pitchFamily="34" charset="0"/>
+                <a:ea typeface="Consolas" pitchFamily="34" charset="-122"/>
+                <a:cs typeface="Consolas" pitchFamily="34" charset="-120"/>
+              </a:rPr>
+              <a:t> -n pamplona.net.xml -r pamplona.rou.xml --emission-output emissions.xml --</a:t>
+            </a:r>
+            <a:r>
+              <a:rPr lang="en-US" sz="1400" dirty="0" err="1">
+                <a:solidFill>
+                  <a:srgbClr val="A6E3A1"/>
+                </a:solidFill>
+                <a:latin typeface="Consolas" pitchFamily="34" charset="0"/>
+                <a:ea typeface="Consolas" pitchFamily="34" charset="-122"/>
+                <a:cs typeface="Consolas" pitchFamily="34" charset="-120"/>
+              </a:rPr>
+              <a:t>edgedata</a:t>
+            </a:r>
+            <a:r>
+              <a:rPr lang="en-US" sz="1400" dirty="0">
+                <a:solidFill>
+                  <a:srgbClr val="A6E3A1"/>
+                </a:solidFill>
+                <a:latin typeface="Consolas" pitchFamily="34" charset="0"/>
+                <a:ea typeface="Consolas" pitchFamily="34" charset="-122"/>
+                <a:cs typeface="Consolas" pitchFamily="34" charset="-120"/>
+              </a:rPr>
+              <a:t>-output traffic.xml --</a:t>
+            </a:r>
+            <a:r>
+              <a:rPr lang="en-US" sz="1400" dirty="0" err="1">
+                <a:solidFill>
+                  <a:srgbClr val="A6E3A1"/>
+                </a:solidFill>
+                <a:latin typeface="Consolas" pitchFamily="34" charset="0"/>
+                <a:ea typeface="Consolas" pitchFamily="34" charset="-122"/>
+                <a:cs typeface="Consolas" pitchFamily="34" charset="-120"/>
+              </a:rPr>
+              <a:t>fcd</a:t>
+            </a:r>
+            <a:r>
+              <a:rPr lang="en-US" sz="1400" dirty="0">
+                <a:solidFill>
+                  <a:srgbClr val="A6E3A1"/>
+                </a:solidFill>
+                <a:latin typeface="Consolas" pitchFamily="34" charset="0"/>
+                <a:ea typeface="Consolas" pitchFamily="34" charset="-122"/>
+                <a:cs typeface="Consolas" pitchFamily="34" charset="-120"/>
+              </a:rPr>
+              <a:t>-output fcd.xml </a:t>
+            </a:r>
+            <a:endParaRPr lang="en-US" sz="1400" dirty="0"/>
+          </a:p>
+          <a:p>
+            <a:pPr marL="0" indent="0">
+              <a:buNone/>
+            </a:pPr>
             <a:endParaRPr lang="en-US" sz="1500" dirty="0"/>
           </a:p>
         </p:txBody>
@@ -4194,7 +4614,7 @@
 </p:sld>
 </file>
 
-<file path=ppt/slides/slide14.xml><?xml version="1.0" encoding="utf-8"?>
+<file path=ppt/slides/slide15.xml><?xml version="1.0" encoding="utf-8"?>
 <p:sld xmlns:a="http://schemas.openxmlformats.org/drawingml/2006/main" xmlns:r="http://schemas.openxmlformats.org/officeDocument/2006/relationships" xmlns:p="http://schemas.openxmlformats.org/presentationml/2006/main">
   <p:cSld name="Slide 7">
     <p:bg>
@@ -4453,6 +4873,44 @@
               <a:buChar char="•"/>
             </a:pPr>
             <a:r>
+              <a:rPr lang="en-US" sz="1700" dirty="0" err="1">
+                <a:solidFill>
+                  <a:srgbClr val="4A5568"/>
+                </a:solidFill>
+              </a:rPr>
+              <a:t>Interfaz</a:t>
+            </a:r>
+            <a:r>
+              <a:rPr lang="en-US" sz="1700" dirty="0">
+                <a:solidFill>
+                  <a:srgbClr val="4A5568"/>
+                </a:solidFill>
+              </a:rPr>
+              <a:t> de control de </a:t>
+            </a:r>
+            <a:r>
+              <a:rPr lang="en-US" sz="1700" dirty="0" err="1">
+                <a:solidFill>
+                  <a:srgbClr val="4A5568"/>
+                </a:solidFill>
+              </a:rPr>
+              <a:t>tráfico</a:t>
+            </a:r>
+            <a:endParaRPr lang="en-US" sz="1700" dirty="0">
+              <a:solidFill>
+                <a:srgbClr val="4A5568"/>
+              </a:solidFill>
+            </a:endParaRPr>
+          </a:p>
+          <a:p>
+            <a:pPr marL="342900" indent="-342900">
+              <a:spcAft>
+                <a:spcPts val="1000"/>
+              </a:spcAft>
+              <a:buSzPct val="100000"/>
+              <a:buChar char="•"/>
+            </a:pPr>
+            <a:r>
               <a:rPr lang="en-US" sz="1700" dirty="0">
                 <a:solidFill>
                   <a:srgbClr val="4A5568"/>
@@ -4541,7 +4999,7 @@
 </p:sld>
 </file>
 
-<file path=ppt/slides/slide15.xml><?xml version="1.0" encoding="utf-8"?>
+<file path=ppt/slides/slide16.xml><?xml version="1.0" encoding="utf-8"?>
 <p:sld xmlns:a="http://schemas.openxmlformats.org/drawingml/2006/main" xmlns:r="http://schemas.openxmlformats.org/officeDocument/2006/relationships" xmlns:p="http://schemas.openxmlformats.org/presentationml/2006/main">
   <p:cSld>
     <p:spTree>
@@ -4638,8 +5096,8 @@
         </p:nvSpPr>
         <p:spPr>
           <a:xfrm>
-            <a:off x="457199" y="1280160"/>
-            <a:ext cx="7347857" cy="3703320"/>
+            <a:off x="179617" y="1750423"/>
+            <a:ext cx="3409407" cy="2899954"/>
           </a:xfrm>
           <a:prstGeom prst="rect">
             <a:avLst/>
@@ -4663,8 +5121,8 @@
         </p:nvSpPr>
         <p:spPr>
           <a:xfrm>
-            <a:off x="457200" y="1280160"/>
-            <a:ext cx="7347856" cy="84908"/>
+            <a:off x="189411" y="1750423"/>
+            <a:ext cx="3399612" cy="84908"/>
           </a:xfrm>
           <a:prstGeom prst="rect">
             <a:avLst/>
@@ -4688,7 +5146,7 @@
         </p:nvSpPr>
         <p:spPr>
           <a:xfrm>
-            <a:off x="594360" y="1463040"/>
+            <a:off x="257994" y="1835331"/>
             <a:ext cx="2286000" cy="548640"/>
           </a:xfrm>
           <a:prstGeom prst="rect">
@@ -4710,7 +5168,7 @@
                   <a:srgbClr val="1F3A5F"/>
                 </a:solidFill>
               </a:rPr>
-              <a:t>Emissiones</a:t>
+              <a:t>Emisiones</a:t>
             </a:r>
             <a:endParaRPr lang="en-US" sz="1800" dirty="0"/>
           </a:p>
@@ -4724,8 +5182,8 @@
         </p:nvSpPr>
         <p:spPr>
           <a:xfrm>
-            <a:off x="594359" y="2057400"/>
-            <a:ext cx="6936377" cy="2828108"/>
+            <a:off x="189412" y="2566851"/>
+            <a:ext cx="3399612" cy="2246811"/>
           </a:xfrm>
           <a:prstGeom prst="rect">
             <a:avLst/>
@@ -4737,105 +5195,396 @@
           <a:bodyPr wrap="square" lIns="0" tIns="0" rIns="0" bIns="0" rtlCol="0" anchor="t"/>
           <a:lstStyle/>
           <a:p>
+            <a:pPr algn="just"/>
+            <a:r>
+              <a:rPr lang="en-US" sz="1400" dirty="0">
+                <a:solidFill>
+                  <a:srgbClr val="4A5568"/>
+                </a:solidFill>
+              </a:rPr>
+              <a:t>Se </a:t>
+            </a:r>
+            <a:r>
+              <a:rPr lang="en-US" sz="1400" dirty="0" err="1">
+                <a:solidFill>
+                  <a:srgbClr val="4A5568"/>
+                </a:solidFill>
+              </a:rPr>
+              <a:t>obtiene</a:t>
+            </a:r>
+            <a:r>
+              <a:rPr lang="en-US" sz="1400" dirty="0">
+                <a:solidFill>
+                  <a:srgbClr val="4A5568"/>
+                </a:solidFill>
+              </a:rPr>
+              <a:t> </a:t>
+            </a:r>
+            <a:r>
+              <a:rPr lang="en-US" sz="1400" dirty="0" err="1">
+                <a:solidFill>
+                  <a:srgbClr val="4A5568"/>
+                </a:solidFill>
+              </a:rPr>
+              <a:t>los</a:t>
+            </a:r>
+            <a:r>
+              <a:rPr lang="en-US" sz="1400" dirty="0">
+                <a:solidFill>
+                  <a:srgbClr val="4A5568"/>
+                </a:solidFill>
+              </a:rPr>
+              <a:t> </a:t>
+            </a:r>
+            <a:r>
+              <a:rPr lang="en-US" sz="1400" dirty="0" err="1">
+                <a:solidFill>
+                  <a:srgbClr val="4A5568"/>
+                </a:solidFill>
+              </a:rPr>
+              <a:t>datos</a:t>
+            </a:r>
+            <a:r>
+              <a:rPr lang="en-US" sz="1400" dirty="0">
+                <a:solidFill>
+                  <a:srgbClr val="4A5568"/>
+                </a:solidFill>
+              </a:rPr>
+              <a:t> de </a:t>
+            </a:r>
+            <a:r>
+              <a:rPr lang="en-US" sz="1400" dirty="0" err="1">
+                <a:solidFill>
+                  <a:srgbClr val="4A5568"/>
+                </a:solidFill>
+              </a:rPr>
+              <a:t>emisones</a:t>
+            </a:r>
+            <a:r>
+              <a:rPr lang="en-US" sz="1400" dirty="0">
+                <a:solidFill>
+                  <a:srgbClr val="4A5568"/>
+                </a:solidFill>
+              </a:rPr>
+              <a:t> de </a:t>
+            </a:r>
+            <a:r>
+              <a:rPr lang="en-US" sz="1400" dirty="0" err="1">
+                <a:solidFill>
+                  <a:srgbClr val="4A5568"/>
+                </a:solidFill>
+              </a:rPr>
+              <a:t>vehiculos</a:t>
+            </a:r>
+            <a:r>
+              <a:rPr lang="en-US" sz="1400" dirty="0">
+                <a:solidFill>
+                  <a:srgbClr val="4A5568"/>
+                </a:solidFill>
+              </a:rPr>
+              <a:t>:</a:t>
+            </a:r>
+          </a:p>
+          <a:p>
+            <a:pPr marL="742950" lvl="1" indent="-285750" algn="just">
+              <a:buFont typeface="Arial" panose="020B0604020202020204" pitchFamily="34" charset="0"/>
+              <a:buChar char="•"/>
+            </a:pPr>
+            <a:r>
+              <a:rPr lang="en-US" sz="1400" dirty="0">
+                <a:solidFill>
+                  <a:srgbClr val="4A5568"/>
+                </a:solidFill>
+              </a:rPr>
+              <a:t>CO2 - </a:t>
+            </a:r>
+            <a:r>
+              <a:rPr lang="en-US" sz="1400" dirty="0" err="1">
+                <a:solidFill>
+                  <a:srgbClr val="4A5568"/>
+                </a:solidFill>
+              </a:rPr>
+              <a:t>dióxido</a:t>
+            </a:r>
+            <a:r>
+              <a:rPr lang="en-US" sz="1400" dirty="0">
+                <a:solidFill>
+                  <a:srgbClr val="4A5568"/>
+                </a:solidFill>
+              </a:rPr>
+              <a:t> de </a:t>
+            </a:r>
+            <a:r>
+              <a:rPr lang="en-US" sz="1400" dirty="0" err="1">
+                <a:solidFill>
+                  <a:srgbClr val="4A5568"/>
+                </a:solidFill>
+              </a:rPr>
+              <a:t>carbono</a:t>
+            </a:r>
+            <a:endParaRPr lang="en-US" sz="1400" dirty="0">
+              <a:solidFill>
+                <a:srgbClr val="4A5568"/>
+              </a:solidFill>
+            </a:endParaRPr>
+          </a:p>
+          <a:p>
+            <a:pPr marL="742950" lvl="1" indent="-285750" algn="just">
+              <a:buFont typeface="Arial" panose="020B0604020202020204" pitchFamily="34" charset="0"/>
+              <a:buChar char="•"/>
+            </a:pPr>
+            <a:r>
+              <a:rPr lang="en-US" sz="1400" dirty="0">
+                <a:solidFill>
+                  <a:srgbClr val="4A5568"/>
+                </a:solidFill>
+              </a:rPr>
+              <a:t>CO - </a:t>
+            </a:r>
+            <a:r>
+              <a:rPr lang="en-US" sz="1400" dirty="0" err="1">
+                <a:solidFill>
+                  <a:srgbClr val="4A5568"/>
+                </a:solidFill>
+              </a:rPr>
+              <a:t>Monóxido</a:t>
+            </a:r>
+            <a:r>
+              <a:rPr lang="en-US" sz="1400" dirty="0">
+                <a:solidFill>
+                  <a:srgbClr val="4A5568"/>
+                </a:solidFill>
+              </a:rPr>
+              <a:t> de </a:t>
+            </a:r>
+            <a:r>
+              <a:rPr lang="en-US" sz="1400" dirty="0" err="1">
+                <a:solidFill>
+                  <a:srgbClr val="4A5568"/>
+                </a:solidFill>
+              </a:rPr>
+              <a:t>carbono</a:t>
+            </a:r>
+            <a:endParaRPr lang="en-US" sz="1400" dirty="0">
+              <a:solidFill>
+                <a:srgbClr val="4A5568"/>
+              </a:solidFill>
+            </a:endParaRPr>
+          </a:p>
+          <a:p>
+            <a:pPr marL="742950" lvl="1" indent="-285750" algn="just">
+              <a:buFont typeface="Arial" panose="020B0604020202020204" pitchFamily="34" charset="0"/>
+              <a:buChar char="•"/>
+            </a:pPr>
+            <a:r>
+              <a:rPr lang="en-US" sz="1400" dirty="0">
+                <a:solidFill>
+                  <a:srgbClr val="4A5568"/>
+                </a:solidFill>
+              </a:rPr>
+              <a:t>HC - </a:t>
+            </a:r>
+            <a:r>
+              <a:rPr lang="en-US" sz="1400" dirty="0" err="1">
+                <a:solidFill>
+                  <a:srgbClr val="4A5568"/>
+                </a:solidFill>
+              </a:rPr>
+              <a:t>hidrocarburos</a:t>
+            </a:r>
+            <a:r>
+              <a:rPr lang="en-US" sz="1400" dirty="0">
+                <a:solidFill>
+                  <a:srgbClr val="4A5568"/>
+                </a:solidFill>
+              </a:rPr>
+              <a:t> no </a:t>
+            </a:r>
+            <a:r>
+              <a:rPr lang="en-US" sz="1400" dirty="0" err="1">
+                <a:solidFill>
+                  <a:srgbClr val="4A5568"/>
+                </a:solidFill>
+              </a:rPr>
+              <a:t>quemados</a:t>
+            </a:r>
+            <a:endParaRPr lang="en-US" sz="1400" dirty="0">
+              <a:solidFill>
+                <a:srgbClr val="4A5568"/>
+              </a:solidFill>
+            </a:endParaRPr>
+          </a:p>
+          <a:p>
+            <a:pPr marL="742950" lvl="1" indent="-285750" algn="just">
+              <a:buFont typeface="Arial" panose="020B0604020202020204" pitchFamily="34" charset="0"/>
+              <a:buChar char="•"/>
+            </a:pPr>
+            <a:r>
+              <a:rPr lang="en-US" sz="1400" dirty="0">
+                <a:solidFill>
+                  <a:srgbClr val="4A5568"/>
+                </a:solidFill>
+              </a:rPr>
+              <a:t>NOx – </a:t>
+            </a:r>
+            <a:r>
+              <a:rPr lang="en-US" sz="1400" dirty="0" err="1">
+                <a:solidFill>
+                  <a:srgbClr val="4A5568"/>
+                </a:solidFill>
+              </a:rPr>
+              <a:t>Oxido</a:t>
+            </a:r>
+            <a:r>
+              <a:rPr lang="en-US" sz="1400" dirty="0">
+                <a:solidFill>
+                  <a:srgbClr val="4A5568"/>
+                </a:solidFill>
+              </a:rPr>
+              <a:t> de </a:t>
+            </a:r>
+            <a:r>
+              <a:rPr lang="en-US" sz="1400" dirty="0" err="1">
+                <a:solidFill>
+                  <a:srgbClr val="4A5568"/>
+                </a:solidFill>
+              </a:rPr>
+              <a:t>nitrogeno</a:t>
+            </a:r>
+            <a:endParaRPr lang="en-US" sz="1400" dirty="0">
+              <a:solidFill>
+                <a:srgbClr val="4A5568"/>
+              </a:solidFill>
+            </a:endParaRPr>
+          </a:p>
+          <a:p>
+            <a:pPr marL="742950" lvl="1" indent="-285750" algn="just">
+              <a:buFont typeface="Arial" panose="020B0604020202020204" pitchFamily="34" charset="0"/>
+              <a:buChar char="•"/>
+            </a:pPr>
+            <a:r>
+              <a:rPr lang="en-US" sz="1400" dirty="0" err="1">
+                <a:solidFill>
+                  <a:srgbClr val="4A5568"/>
+                </a:solidFill>
+              </a:rPr>
+              <a:t>PMx</a:t>
+            </a:r>
+            <a:r>
+              <a:rPr lang="en-US" sz="1400" dirty="0">
+                <a:solidFill>
+                  <a:srgbClr val="4A5568"/>
+                </a:solidFill>
+              </a:rPr>
+              <a:t> – </a:t>
+            </a:r>
+            <a:r>
+              <a:rPr lang="en-US" sz="1400" dirty="0" err="1">
+                <a:solidFill>
+                  <a:srgbClr val="4A5568"/>
+                </a:solidFill>
+              </a:rPr>
+              <a:t>Particulas</a:t>
+            </a:r>
+            <a:r>
+              <a:rPr lang="en-US" sz="1400" dirty="0">
+                <a:solidFill>
+                  <a:srgbClr val="4A5568"/>
+                </a:solidFill>
+              </a:rPr>
+              <a:t> </a:t>
+            </a:r>
+            <a:r>
+              <a:rPr lang="en-US" sz="1400" dirty="0" err="1">
+                <a:solidFill>
+                  <a:srgbClr val="4A5568"/>
+                </a:solidFill>
+              </a:rPr>
+              <a:t>en</a:t>
+            </a:r>
+            <a:r>
+              <a:rPr lang="en-US" sz="1400" dirty="0">
+                <a:solidFill>
+                  <a:srgbClr val="4A5568"/>
+                </a:solidFill>
+              </a:rPr>
+              <a:t> </a:t>
+            </a:r>
+            <a:r>
+              <a:rPr lang="en-US" sz="1400" dirty="0" err="1">
+                <a:solidFill>
+                  <a:srgbClr val="4A5568"/>
+                </a:solidFill>
+              </a:rPr>
+              <a:t>suspensión</a:t>
+            </a:r>
+            <a:endParaRPr lang="en-US" sz="1400" dirty="0">
+              <a:solidFill>
+                <a:srgbClr val="4A5568"/>
+              </a:solidFill>
+            </a:endParaRPr>
+          </a:p>
+          <a:p>
+            <a:pPr marL="742950" lvl="1" indent="-285750" algn="just">
+              <a:buFont typeface="Arial" panose="020B0604020202020204" pitchFamily="34" charset="0"/>
+              <a:buChar char="•"/>
+            </a:pPr>
+            <a:r>
+              <a:rPr lang="en-US" sz="1400" dirty="0" err="1">
+                <a:solidFill>
+                  <a:srgbClr val="4A5568"/>
+                </a:solidFill>
+              </a:rPr>
+              <a:t>Consumo</a:t>
+            </a:r>
+            <a:r>
+              <a:rPr lang="en-US" sz="1400" dirty="0">
+                <a:solidFill>
+                  <a:srgbClr val="4A5568"/>
+                </a:solidFill>
+              </a:rPr>
+              <a:t> de combustible</a:t>
+            </a:r>
+          </a:p>
+          <a:p>
+            <a:pPr marL="742950" lvl="1" indent="-285750" algn="just">
+              <a:buFont typeface="Arial" panose="020B0604020202020204" pitchFamily="34" charset="0"/>
+              <a:buChar char="•"/>
+            </a:pPr>
+            <a:r>
+              <a:rPr lang="en-US" sz="1400" dirty="0" err="1">
+                <a:solidFill>
+                  <a:srgbClr val="4A5568"/>
+                </a:solidFill>
+              </a:rPr>
+              <a:t>Consumo</a:t>
+            </a:r>
+            <a:r>
+              <a:rPr lang="en-US" sz="1400" dirty="0">
+                <a:solidFill>
+                  <a:srgbClr val="4A5568"/>
+                </a:solidFill>
+              </a:rPr>
+              <a:t> de </a:t>
+            </a:r>
+            <a:r>
+              <a:rPr lang="en-US" sz="1400" dirty="0" err="1">
+                <a:solidFill>
+                  <a:srgbClr val="4A5568"/>
+                </a:solidFill>
+              </a:rPr>
+              <a:t>electricidad</a:t>
+            </a:r>
+            <a:endParaRPr lang="en-US" sz="1400" dirty="0">
+              <a:solidFill>
+                <a:srgbClr val="4A5568"/>
+              </a:solidFill>
+            </a:endParaRPr>
+          </a:p>
+          <a:p>
             <a:pPr marL="0" indent="0" algn="just">
               <a:buNone/>
             </a:pPr>
-            <a:r>
-              <a:rPr lang="en-US" sz="1400" dirty="0">
-                <a:solidFill>
-                  <a:srgbClr val="4A5568"/>
-                </a:solidFill>
-              </a:rPr>
-              <a:t>Trata el tráfico como un flujo continuo (densidad, caudal). Rápido, pero sin detalle por </a:t>
-            </a:r>
-            <a:r>
-              <a:rPr lang="en-US" sz="1400" dirty="0" err="1">
-                <a:solidFill>
-                  <a:srgbClr val="4A5568"/>
-                </a:solidFill>
-              </a:rPr>
-              <a:t>vehículo</a:t>
-            </a:r>
-            <a:r>
-              <a:rPr lang="en-US" sz="1400" dirty="0">
-                <a:solidFill>
-                  <a:srgbClr val="4A5568"/>
-                </a:solidFill>
-              </a:rPr>
-              <a:t>. E</a:t>
-            </a:r>
-            <a:r>
-              <a:rPr lang="es-ES" sz="1400" dirty="0">
-                <a:solidFill>
-                  <a:srgbClr val="4A5568"/>
-                </a:solidFill>
-              </a:rPr>
-              <a:t>l tráfico no se modela vehículo por vehículo, sino como un flujo continuo o entidad agregada donde las variables principales son el </a:t>
-            </a:r>
-            <a:r>
-              <a:rPr lang="es-ES" sz="1400" b="1" dirty="0">
-                <a:solidFill>
-                  <a:srgbClr val="4A5568"/>
-                </a:solidFill>
-              </a:rPr>
-              <a:t>volumen</a:t>
-            </a:r>
-            <a:r>
-              <a:rPr lang="es-ES" sz="1400" dirty="0">
-                <a:solidFill>
-                  <a:srgbClr val="4A5568"/>
-                </a:solidFill>
-              </a:rPr>
-              <a:t>, la </a:t>
-            </a:r>
-            <a:r>
-              <a:rPr lang="es-ES" sz="1400" b="1" dirty="0">
-                <a:solidFill>
-                  <a:srgbClr val="4A5568"/>
-                </a:solidFill>
-              </a:rPr>
-              <a:t>densidad </a:t>
-            </a:r>
-            <a:r>
-              <a:rPr lang="es-ES" sz="1400" dirty="0">
-                <a:solidFill>
-                  <a:srgbClr val="4A5568"/>
-                </a:solidFill>
-              </a:rPr>
-              <a:t>de la </a:t>
-            </a:r>
-            <a:r>
-              <a:rPr lang="es-ES" sz="1400" dirty="0" err="1">
-                <a:solidFill>
-                  <a:srgbClr val="4A5568"/>
-                </a:solidFill>
-              </a:rPr>
-              <a:t>via</a:t>
-            </a:r>
-            <a:r>
-              <a:rPr lang="es-ES" sz="1400" dirty="0">
-                <a:solidFill>
-                  <a:srgbClr val="4A5568"/>
-                </a:solidFill>
-              </a:rPr>
-              <a:t> y la </a:t>
-            </a:r>
-            <a:r>
-              <a:rPr lang="es-ES" sz="1400" b="1" dirty="0">
-                <a:solidFill>
-                  <a:srgbClr val="4A5568"/>
-                </a:solidFill>
-              </a:rPr>
-              <a:t>velocidad media</a:t>
-            </a:r>
-            <a:r>
-              <a:rPr lang="es-ES" sz="1400" dirty="0">
-                <a:solidFill>
-                  <a:srgbClr val="4A5568"/>
-                </a:solidFill>
-              </a:rPr>
-              <a:t>.</a:t>
-            </a:r>
             <a:endParaRPr lang="en-US" sz="1400" dirty="0">
               <a:solidFill>
                 <a:srgbClr val="4A5568"/>
@@ -4877,6 +5626,685 @@
           </a:solidFill>
         </p:spPr>
       </p:pic>
+      <p:sp>
+        <p:nvSpPr>
+          <p:cNvPr id="8" name="Shape 2">
+            <a:extLst>
+              <a:ext uri="{FF2B5EF4-FFF2-40B4-BE49-F238E27FC236}">
+                <a16:creationId xmlns:a16="http://schemas.microsoft.com/office/drawing/2014/main" id="{D0BBCDAB-8C48-C9CF-7F3E-62631DA67BA0}"/>
+              </a:ext>
+            </a:extLst>
+          </p:cNvPr>
+          <p:cNvSpPr/>
+          <p:nvPr/>
+        </p:nvSpPr>
+        <p:spPr>
+          <a:xfrm>
+            <a:off x="4189914" y="1759132"/>
+            <a:ext cx="4112309" cy="2899954"/>
+          </a:xfrm>
+          <a:prstGeom prst="rect">
+            <a:avLst/>
+          </a:prstGeom>
+          <a:solidFill>
+            <a:srgbClr val="FFFFFF"/>
+          </a:solidFill>
+          <a:ln w="12700">
+            <a:solidFill>
+              <a:srgbClr val="D5DDE6"/>
+            </a:solidFill>
+            <a:prstDash val="solid"/>
+          </a:ln>
+        </p:spPr>
+      </p:sp>
+      <p:sp>
+        <p:nvSpPr>
+          <p:cNvPr id="9" name="Shape 3">
+            <a:extLst>
+              <a:ext uri="{FF2B5EF4-FFF2-40B4-BE49-F238E27FC236}">
+                <a16:creationId xmlns:a16="http://schemas.microsoft.com/office/drawing/2014/main" id="{087F439A-BE1E-EAC7-5425-7AD6313DB41C}"/>
+              </a:ext>
+            </a:extLst>
+          </p:cNvPr>
+          <p:cNvSpPr/>
+          <p:nvPr/>
+        </p:nvSpPr>
+        <p:spPr>
+          <a:xfrm>
+            <a:off x="4189914" y="1759132"/>
+            <a:ext cx="4112308" cy="84908"/>
+          </a:xfrm>
+          <a:prstGeom prst="rect">
+            <a:avLst/>
+          </a:prstGeom>
+          <a:solidFill>
+            <a:srgbClr val="2A9D8F"/>
+          </a:solidFill>
+          <a:ln w="12700">
+            <a:solidFill>
+              <a:srgbClr val="2A9D8F"/>
+            </a:solidFill>
+            <a:prstDash val="solid"/>
+          </a:ln>
+        </p:spPr>
+      </p:sp>
+      <p:sp>
+        <p:nvSpPr>
+          <p:cNvPr id="10" name="Text 4">
+            <a:extLst>
+              <a:ext uri="{FF2B5EF4-FFF2-40B4-BE49-F238E27FC236}">
+                <a16:creationId xmlns:a16="http://schemas.microsoft.com/office/drawing/2014/main" id="{BB846780-A07B-16D4-9135-B5CD50CB15BF}"/>
+              </a:ext>
+            </a:extLst>
+          </p:cNvPr>
+          <p:cNvSpPr txBox="1"/>
+          <p:nvPr/>
+        </p:nvSpPr>
+        <p:spPr>
+          <a:xfrm>
+            <a:off x="4298456" y="1889760"/>
+            <a:ext cx="2286000" cy="548640"/>
+          </a:xfrm>
+          <a:prstGeom prst="rect">
+            <a:avLst/>
+          </a:prstGeom>
+          <a:noFill/>
+          <a:ln/>
+        </p:spPr>
+        <p:txBody>
+          <a:bodyPr wrap="square" lIns="0" tIns="0" rIns="0" bIns="0" rtlCol="0" anchor="ctr"/>
+          <a:lstStyle/>
+          <a:p>
+            <a:pPr marL="0" indent="0">
+              <a:buNone/>
+            </a:pPr>
+            <a:r>
+              <a:rPr lang="en-US" sz="1800" b="1" dirty="0" err="1">
+                <a:solidFill>
+                  <a:srgbClr val="1F3A5F"/>
+                </a:solidFill>
+              </a:rPr>
+              <a:t>Tráfico</a:t>
+            </a:r>
+            <a:endParaRPr lang="en-US" sz="1800" dirty="0"/>
+          </a:p>
+        </p:txBody>
+      </p:sp>
+      <p:sp>
+        <p:nvSpPr>
+          <p:cNvPr id="11" name="Text 5">
+            <a:extLst>
+              <a:ext uri="{FF2B5EF4-FFF2-40B4-BE49-F238E27FC236}">
+                <a16:creationId xmlns:a16="http://schemas.microsoft.com/office/drawing/2014/main" id="{B42A32B2-A6F5-4317-BA1F-C3D578F53C91}"/>
+              </a:ext>
+            </a:extLst>
+          </p:cNvPr>
+          <p:cNvSpPr txBox="1"/>
+          <p:nvPr/>
+        </p:nvSpPr>
+        <p:spPr>
+          <a:xfrm>
+            <a:off x="4298456" y="2577737"/>
+            <a:ext cx="3921350" cy="2246811"/>
+          </a:xfrm>
+          <a:prstGeom prst="rect">
+            <a:avLst/>
+          </a:prstGeom>
+          <a:noFill/>
+          <a:ln/>
+        </p:spPr>
+        <p:txBody>
+          <a:bodyPr wrap="square" lIns="0" tIns="0" rIns="0" bIns="0" rtlCol="0" anchor="t"/>
+          <a:lstStyle/>
+          <a:p>
+            <a:pPr algn="just"/>
+            <a:r>
+              <a:rPr lang="en-US" sz="1200" dirty="0">
+                <a:solidFill>
+                  <a:srgbClr val="4A5568"/>
+                </a:solidFill>
+              </a:rPr>
+              <a:t>Se </a:t>
+            </a:r>
+            <a:r>
+              <a:rPr lang="en-US" sz="1200" dirty="0" err="1">
+                <a:solidFill>
+                  <a:srgbClr val="4A5568"/>
+                </a:solidFill>
+              </a:rPr>
+              <a:t>obtiene</a:t>
+            </a:r>
+            <a:r>
+              <a:rPr lang="en-US" sz="1200" dirty="0">
+                <a:solidFill>
+                  <a:srgbClr val="4A5568"/>
+                </a:solidFill>
+              </a:rPr>
+              <a:t> </a:t>
+            </a:r>
+            <a:r>
+              <a:rPr lang="en-US" sz="1200" dirty="0" err="1">
+                <a:solidFill>
+                  <a:srgbClr val="4A5568"/>
+                </a:solidFill>
+              </a:rPr>
+              <a:t>los</a:t>
+            </a:r>
+            <a:r>
+              <a:rPr lang="en-US" sz="1200" dirty="0">
+                <a:solidFill>
+                  <a:srgbClr val="4A5568"/>
+                </a:solidFill>
+              </a:rPr>
+              <a:t> </a:t>
+            </a:r>
+            <a:r>
+              <a:rPr lang="en-US" sz="1200" dirty="0" err="1">
+                <a:solidFill>
+                  <a:srgbClr val="4A5568"/>
+                </a:solidFill>
+              </a:rPr>
+              <a:t>datos</a:t>
+            </a:r>
+            <a:r>
+              <a:rPr lang="en-US" sz="1200" dirty="0">
+                <a:solidFill>
+                  <a:srgbClr val="4A5568"/>
+                </a:solidFill>
+              </a:rPr>
+              <a:t> de </a:t>
+            </a:r>
+            <a:r>
+              <a:rPr lang="en-US" sz="1200" dirty="0" err="1">
+                <a:solidFill>
+                  <a:srgbClr val="4A5568"/>
+                </a:solidFill>
+              </a:rPr>
+              <a:t>tráfico</a:t>
+            </a:r>
+            <a:r>
+              <a:rPr lang="en-US" sz="1200" dirty="0">
+                <a:solidFill>
+                  <a:srgbClr val="4A5568"/>
+                </a:solidFill>
+              </a:rPr>
+              <a:t> </a:t>
+            </a:r>
+            <a:r>
+              <a:rPr lang="en-US" sz="1200" dirty="0" err="1">
+                <a:solidFill>
+                  <a:srgbClr val="4A5568"/>
+                </a:solidFill>
+              </a:rPr>
+              <a:t>sobre</a:t>
+            </a:r>
+            <a:r>
+              <a:rPr lang="en-US" sz="1200" dirty="0">
+                <a:solidFill>
+                  <a:srgbClr val="4A5568"/>
+                </a:solidFill>
+              </a:rPr>
+              <a:t> las vias </a:t>
+            </a:r>
+            <a:r>
+              <a:rPr lang="en-US" sz="1200" dirty="0" err="1">
+                <a:solidFill>
+                  <a:srgbClr val="4A5568"/>
+                </a:solidFill>
+              </a:rPr>
+              <a:t>cada</a:t>
+            </a:r>
+            <a:r>
+              <a:rPr lang="en-US" sz="1200" dirty="0">
+                <a:solidFill>
+                  <a:srgbClr val="4A5568"/>
+                </a:solidFill>
+              </a:rPr>
+              <a:t> </a:t>
+            </a:r>
+            <a:r>
+              <a:rPr lang="en-US" sz="1200" dirty="0" err="1">
+                <a:solidFill>
+                  <a:srgbClr val="4A5568"/>
+                </a:solidFill>
+              </a:rPr>
+              <a:t>momento</a:t>
+            </a:r>
+            <a:r>
+              <a:rPr lang="en-US" sz="1200" dirty="0">
+                <a:solidFill>
+                  <a:srgbClr val="4A5568"/>
+                </a:solidFill>
+              </a:rPr>
+              <a:t>:</a:t>
+            </a:r>
+          </a:p>
+          <a:p>
+            <a:pPr marL="742950" lvl="1" indent="-285750" algn="just">
+              <a:buFont typeface="Arial" panose="020B0604020202020204" pitchFamily="34" charset="0"/>
+              <a:buChar char="•"/>
+            </a:pPr>
+            <a:r>
+              <a:rPr lang="es-ES_tradnl" sz="1200" b="0" i="0" dirty="0" err="1">
+                <a:solidFill>
+                  <a:srgbClr val="495057"/>
+                </a:solidFill>
+                <a:effectLst/>
+                <a:latin typeface="-apple-system"/>
+              </a:rPr>
+              <a:t>Density</a:t>
+            </a:r>
+            <a:r>
+              <a:rPr lang="es-ES_tradnl" sz="1200" b="0" i="0" dirty="0">
+                <a:solidFill>
+                  <a:srgbClr val="495057"/>
+                </a:solidFill>
+                <a:effectLst/>
+                <a:latin typeface="-apple-system"/>
+              </a:rPr>
+              <a:t> </a:t>
+            </a:r>
+            <a:r>
+              <a:rPr lang="en-US" sz="1200" dirty="0">
+                <a:solidFill>
+                  <a:srgbClr val="4A5568"/>
+                </a:solidFill>
+              </a:rPr>
+              <a:t>- </a:t>
+            </a:r>
+            <a:r>
+              <a:rPr lang="en-US" sz="1200" dirty="0" err="1">
+                <a:solidFill>
+                  <a:srgbClr val="4A5568"/>
+                </a:solidFill>
+              </a:rPr>
+              <a:t>desidad</a:t>
+            </a:r>
+            <a:r>
+              <a:rPr lang="en-US" sz="1200" dirty="0">
+                <a:solidFill>
+                  <a:srgbClr val="4A5568"/>
+                </a:solidFill>
+              </a:rPr>
+              <a:t> de </a:t>
+            </a:r>
+            <a:r>
+              <a:rPr lang="en-US" sz="1200" dirty="0" err="1">
+                <a:solidFill>
+                  <a:srgbClr val="4A5568"/>
+                </a:solidFill>
+              </a:rPr>
+              <a:t>vehiculos</a:t>
+            </a:r>
+            <a:r>
+              <a:rPr lang="en-US" sz="1200" dirty="0">
+                <a:solidFill>
+                  <a:srgbClr val="4A5568"/>
+                </a:solidFill>
+              </a:rPr>
+              <a:t> </a:t>
+            </a:r>
+            <a:r>
+              <a:rPr lang="en-US" sz="1200" dirty="0" err="1">
+                <a:solidFill>
+                  <a:srgbClr val="4A5568"/>
+                </a:solidFill>
+              </a:rPr>
+              <a:t>en</a:t>
+            </a:r>
+            <a:r>
+              <a:rPr lang="en-US" sz="1200" dirty="0">
+                <a:solidFill>
+                  <a:srgbClr val="4A5568"/>
+                </a:solidFill>
+              </a:rPr>
+              <a:t> la via</a:t>
+            </a:r>
+          </a:p>
+          <a:p>
+            <a:pPr marL="742950" lvl="1" indent="-285750" algn="just">
+              <a:buFont typeface="Arial" panose="020B0604020202020204" pitchFamily="34" charset="0"/>
+              <a:buChar char="•"/>
+            </a:pPr>
+            <a:r>
+              <a:rPr lang="en-US" sz="1200" dirty="0" err="1">
+                <a:solidFill>
+                  <a:srgbClr val="4A5568"/>
+                </a:solidFill>
+              </a:rPr>
+              <a:t>Ocupacion</a:t>
+            </a:r>
+            <a:r>
+              <a:rPr lang="en-US" sz="1200" dirty="0">
+                <a:solidFill>
+                  <a:srgbClr val="4A5568"/>
+                </a:solidFill>
+              </a:rPr>
+              <a:t> - </a:t>
+            </a:r>
+            <a:r>
+              <a:rPr lang="en-US" sz="1200" dirty="0" err="1">
+                <a:solidFill>
+                  <a:srgbClr val="4A5568"/>
+                </a:solidFill>
+              </a:rPr>
+              <a:t>porcentaje</a:t>
+            </a:r>
+            <a:r>
+              <a:rPr lang="en-US" sz="1200" dirty="0">
+                <a:solidFill>
+                  <a:srgbClr val="4A5568"/>
+                </a:solidFill>
+              </a:rPr>
+              <a:t> de </a:t>
+            </a:r>
+            <a:r>
+              <a:rPr lang="en-US" sz="1200" dirty="0" err="1">
+                <a:solidFill>
+                  <a:srgbClr val="4A5568"/>
+                </a:solidFill>
+              </a:rPr>
+              <a:t>ocupación</a:t>
+            </a:r>
+            <a:r>
+              <a:rPr lang="en-US" sz="1200" dirty="0">
+                <a:solidFill>
+                  <a:srgbClr val="4A5568"/>
+                </a:solidFill>
+              </a:rPr>
+              <a:t> de la via</a:t>
+            </a:r>
+          </a:p>
+          <a:p>
+            <a:pPr marL="742950" lvl="1" indent="-285750" algn="just">
+              <a:buFont typeface="Arial" panose="020B0604020202020204" pitchFamily="34" charset="0"/>
+              <a:buChar char="•"/>
+            </a:pPr>
+            <a:r>
+              <a:rPr lang="es-ES_tradnl" sz="1200" b="0" i="0" dirty="0" err="1">
+                <a:solidFill>
+                  <a:srgbClr val="495057"/>
+                </a:solidFill>
+                <a:effectLst/>
+                <a:latin typeface="-apple-system"/>
+              </a:rPr>
+              <a:t>timeLoss</a:t>
+            </a:r>
+            <a:r>
+              <a:rPr lang="en-US" sz="1200" b="0" i="0" dirty="0">
+                <a:solidFill>
+                  <a:srgbClr val="4A5568"/>
+                </a:solidFill>
+                <a:effectLst/>
+                <a:latin typeface="-apple-system"/>
+              </a:rPr>
+              <a:t> – </a:t>
+            </a:r>
+            <a:r>
+              <a:rPr lang="en-US" sz="1200" b="0" i="0" dirty="0" err="1">
+                <a:solidFill>
+                  <a:srgbClr val="4A5568"/>
+                </a:solidFill>
+                <a:effectLst/>
+                <a:latin typeface="-apple-system"/>
+              </a:rPr>
+              <a:t>tiempo</a:t>
+            </a:r>
+            <a:r>
+              <a:rPr lang="en-US" sz="1200" b="0" i="0" dirty="0">
+                <a:solidFill>
+                  <a:srgbClr val="4A5568"/>
+                </a:solidFill>
+                <a:effectLst/>
+                <a:latin typeface="-apple-system"/>
+              </a:rPr>
+              <a:t> </a:t>
+            </a:r>
+            <a:r>
+              <a:rPr lang="en-US" sz="1200" b="0" i="0" dirty="0" err="1">
+                <a:solidFill>
+                  <a:srgbClr val="4A5568"/>
+                </a:solidFill>
+                <a:effectLst/>
+                <a:latin typeface="-apple-system"/>
+              </a:rPr>
+              <a:t>perdido</a:t>
+            </a:r>
+            <a:r>
+              <a:rPr lang="en-US" sz="1200" b="0" i="0" dirty="0">
+                <a:solidFill>
+                  <a:srgbClr val="4A5568"/>
+                </a:solidFill>
+                <a:effectLst/>
+                <a:latin typeface="-apple-system"/>
+              </a:rPr>
+              <a:t> </a:t>
+            </a:r>
+            <a:r>
+              <a:rPr lang="en-US" sz="1200" b="0" i="0" dirty="0" err="1">
+                <a:solidFill>
+                  <a:srgbClr val="4A5568"/>
+                </a:solidFill>
+                <a:effectLst/>
+                <a:latin typeface="-apple-system"/>
+              </a:rPr>
+              <a:t>por</a:t>
+            </a:r>
+            <a:r>
+              <a:rPr lang="en-US" sz="1200" b="0" i="0" dirty="0">
+                <a:solidFill>
+                  <a:srgbClr val="4A5568"/>
+                </a:solidFill>
+                <a:effectLst/>
+                <a:latin typeface="-apple-system"/>
+              </a:rPr>
+              <a:t> </a:t>
+            </a:r>
+            <a:r>
+              <a:rPr lang="en-US" sz="1200" b="0" i="0" dirty="0" err="1">
+                <a:solidFill>
+                  <a:srgbClr val="4A5568"/>
+                </a:solidFill>
+                <a:effectLst/>
+                <a:latin typeface="-apple-system"/>
+              </a:rPr>
+              <a:t>conducir</a:t>
+            </a:r>
+            <a:r>
+              <a:rPr lang="en-US" sz="1200" b="0" i="0" dirty="0">
+                <a:solidFill>
+                  <a:srgbClr val="4A5568"/>
+                </a:solidFill>
+                <a:effectLst/>
+                <a:latin typeface="-apple-system"/>
+              </a:rPr>
+              <a:t> mas </a:t>
+            </a:r>
+            <a:r>
+              <a:rPr lang="en-US" sz="1200" b="0" i="0" dirty="0" err="1">
+                <a:solidFill>
+                  <a:srgbClr val="4A5568"/>
+                </a:solidFill>
+                <a:effectLst/>
+                <a:latin typeface="-apple-system"/>
+              </a:rPr>
+              <a:t>despacio</a:t>
+            </a:r>
+            <a:endParaRPr lang="en-US" sz="1200" b="0" i="0" dirty="0">
+              <a:solidFill>
+                <a:srgbClr val="4A5568"/>
+              </a:solidFill>
+              <a:effectLst/>
+              <a:latin typeface="-apple-system"/>
+            </a:endParaRPr>
+          </a:p>
+          <a:p>
+            <a:pPr marL="742950" lvl="1" indent="-285750" algn="just">
+              <a:buFont typeface="Arial" panose="020B0604020202020204" pitchFamily="34" charset="0"/>
+              <a:buChar char="•"/>
+            </a:pPr>
+            <a:r>
+              <a:rPr lang="es-ES_tradnl" sz="1200" b="0" i="0" dirty="0" err="1">
+                <a:solidFill>
+                  <a:srgbClr val="495057"/>
+                </a:solidFill>
+                <a:effectLst/>
+                <a:latin typeface="-apple-system"/>
+              </a:rPr>
+              <a:t>waitingTime</a:t>
+            </a:r>
+            <a:r>
+              <a:rPr lang="en-US" sz="1200" dirty="0">
+                <a:solidFill>
+                  <a:srgbClr val="4A5568"/>
+                </a:solidFill>
+                <a:latin typeface="-apple-system"/>
+              </a:rPr>
+              <a:t> – </a:t>
+            </a:r>
+            <a:r>
+              <a:rPr lang="en-US" sz="1200" dirty="0" err="1">
+                <a:solidFill>
+                  <a:srgbClr val="4A5568"/>
+                </a:solidFill>
+                <a:latin typeface="-apple-system"/>
+              </a:rPr>
+              <a:t>tiempo</a:t>
+            </a:r>
+            <a:r>
+              <a:rPr lang="en-US" sz="1200" dirty="0">
+                <a:solidFill>
+                  <a:srgbClr val="4A5568"/>
+                </a:solidFill>
+                <a:latin typeface="-apple-system"/>
+              </a:rPr>
+              <a:t> de </a:t>
+            </a:r>
+            <a:r>
+              <a:rPr lang="en-US" sz="1200" dirty="0" err="1">
+                <a:solidFill>
+                  <a:srgbClr val="4A5568"/>
+                </a:solidFill>
+                <a:latin typeface="-apple-system"/>
+              </a:rPr>
+              <a:t>vehiculo</a:t>
+            </a:r>
+            <a:r>
+              <a:rPr lang="en-US" sz="1200" dirty="0">
+                <a:solidFill>
+                  <a:srgbClr val="4A5568"/>
+                </a:solidFill>
+                <a:latin typeface="-apple-system"/>
+              </a:rPr>
+              <a:t> parados</a:t>
+            </a:r>
+            <a:endParaRPr lang="en-US" sz="1200" dirty="0">
+              <a:solidFill>
+                <a:srgbClr val="4A5568"/>
+              </a:solidFill>
+            </a:endParaRPr>
+          </a:p>
+          <a:p>
+            <a:pPr marL="742950" lvl="1" indent="-285750" algn="just">
+              <a:buFont typeface="Arial" panose="020B0604020202020204" pitchFamily="34" charset="0"/>
+              <a:buChar char="•"/>
+            </a:pPr>
+            <a:endParaRPr lang="en-US" sz="1200" dirty="0">
+              <a:solidFill>
+                <a:srgbClr val="4A5568"/>
+              </a:solidFill>
+            </a:endParaRPr>
+          </a:p>
+          <a:p>
+            <a:pPr marL="742950" lvl="1" indent="-285750" algn="just">
+              <a:buFont typeface="Arial" panose="020B0604020202020204" pitchFamily="34" charset="0"/>
+              <a:buChar char="•"/>
+            </a:pPr>
+            <a:endParaRPr lang="en-US" sz="1200" dirty="0">
+              <a:solidFill>
+                <a:srgbClr val="4A5568"/>
+              </a:solidFill>
+            </a:endParaRPr>
+          </a:p>
+          <a:p>
+            <a:pPr marL="0" indent="0" algn="just">
+              <a:buNone/>
+            </a:pPr>
+            <a:endParaRPr lang="en-US" sz="1400" dirty="0">
+              <a:solidFill>
+                <a:srgbClr val="4A5568"/>
+              </a:solidFill>
+            </a:endParaRPr>
+          </a:p>
+        </p:txBody>
+      </p:sp>
+      <p:sp>
+        <p:nvSpPr>
+          <p:cNvPr id="12" name="CuadroTexto 11">
+            <a:extLst>
+              <a:ext uri="{FF2B5EF4-FFF2-40B4-BE49-F238E27FC236}">
+                <a16:creationId xmlns:a16="http://schemas.microsoft.com/office/drawing/2014/main" id="{6863701A-08D4-2AFE-96A8-3697D8D709FD}"/>
+              </a:ext>
+            </a:extLst>
+          </p:cNvPr>
+          <p:cNvSpPr txBox="1"/>
+          <p:nvPr/>
+        </p:nvSpPr>
+        <p:spPr>
+          <a:xfrm>
+            <a:off x="457200" y="927548"/>
+            <a:ext cx="7238456" cy="707886"/>
+          </a:xfrm>
+          <a:prstGeom prst="rect">
+            <a:avLst/>
+          </a:prstGeom>
+          <a:noFill/>
+        </p:spPr>
+        <p:txBody>
+          <a:bodyPr wrap="none" rtlCol="0">
+            <a:spAutoFit/>
+          </a:bodyPr>
+          <a:lstStyle/>
+          <a:p>
+            <a:r>
+              <a:rPr lang="es-ES" sz="2000" dirty="0">
+                <a:solidFill>
+                  <a:srgbClr val="4A5568"/>
+                </a:solidFill>
+              </a:rPr>
+              <a:t>Todos estos resultado se pueden agrupar por tiempo de simulación,</a:t>
+            </a:r>
+            <a:br>
+              <a:rPr lang="es-ES" sz="2000" dirty="0">
+                <a:solidFill>
+                  <a:srgbClr val="4A5568"/>
+                </a:solidFill>
+              </a:rPr>
+            </a:br>
+            <a:r>
+              <a:rPr lang="es-ES" sz="2000" dirty="0">
+                <a:solidFill>
+                  <a:srgbClr val="4A5568"/>
+                </a:solidFill>
+              </a:rPr>
+              <a:t>por ejemplo, por cada 60s de simulación en cada </a:t>
+            </a:r>
+            <a:r>
+              <a:rPr lang="es-ES" sz="2000" dirty="0" err="1">
+                <a:solidFill>
+                  <a:srgbClr val="4A5568"/>
+                </a:solidFill>
+              </a:rPr>
+              <a:t>via</a:t>
+            </a:r>
+            <a:endParaRPr lang="es-ES_tradnl" sz="2000" dirty="0">
+              <a:solidFill>
+                <a:srgbClr val="4A5568"/>
+              </a:solidFill>
+            </a:endParaRPr>
+          </a:p>
+        </p:txBody>
+      </p:sp>
     </p:spTree>
     <p:extLst>
       <p:ext uri="{BB962C8B-B14F-4D97-AF65-F5344CB8AC3E}">
@@ -4890,7 +6318,7 @@
 </p:sld>
 </file>
 
-<file path=ppt/slides/slide16.xml><?xml version="1.0" encoding="utf-8"?>
+<file path=ppt/slides/slide17.xml><?xml version="1.0" encoding="utf-8"?>
 <p:sld xmlns:a="http://schemas.openxmlformats.org/drawingml/2006/main" xmlns:r="http://schemas.openxmlformats.org/officeDocument/2006/relationships" xmlns:p="http://schemas.openxmlformats.org/presentationml/2006/main">
   <p:cSld name="Slide 11">
     <p:bg>
@@ -5198,7 +6626,23 @@
                   <a:srgbClr val="4A5568"/>
                 </a:solidFill>
               </a:rPr>
-              <a:t>¿Que es SUMO?</a:t>
+              <a:t>¿</a:t>
+            </a:r>
+            <a:r>
+              <a:rPr lang="en-US" sz="1800" dirty="0" err="1">
+                <a:solidFill>
+                  <a:srgbClr val="4A5568"/>
+                </a:solidFill>
+              </a:rPr>
+              <a:t>Qué</a:t>
+            </a:r>
+            <a:r>
+              <a:rPr lang="en-US" sz="1800" dirty="0">
+                <a:solidFill>
+                  <a:srgbClr val="4A5568"/>
+                </a:solidFill>
+              </a:rPr>
+              <a:t> es SUMO?</a:t>
             </a:r>
           </a:p>
           <a:p>
@@ -5213,7 +6657,71 @@
                   <a:srgbClr val="4A5568"/>
                 </a:solidFill>
               </a:rPr>
-              <a:t>Instalación</a:t>
+              <a:t>Tipos</a:t>
+            </a:r>
+            <a:r>
+              <a:rPr lang="en-US" sz="1800" dirty="0">
+                <a:solidFill>
+                  <a:srgbClr val="4A5568"/>
+                </a:solidFill>
+              </a:rPr>
+              <a:t> de </a:t>
+            </a:r>
+            <a:r>
+              <a:rPr lang="en-US" sz="1800" dirty="0" err="1">
+                <a:solidFill>
+                  <a:srgbClr val="4A5568"/>
+                </a:solidFill>
+              </a:rPr>
+              <a:t>enfoques</a:t>
+            </a:r>
+            <a:r>
+              <a:rPr lang="en-US" sz="1800" dirty="0">
+                <a:solidFill>
+                  <a:srgbClr val="4A5568"/>
+                </a:solidFill>
+              </a:rPr>
+              <a:t> a la hora de </a:t>
+            </a:r>
+            <a:r>
+              <a:rPr lang="en-US" sz="1800" dirty="0" err="1">
+                <a:solidFill>
+                  <a:srgbClr val="4A5568"/>
+                </a:solidFill>
+              </a:rPr>
+              <a:t>crear</a:t>
+            </a:r>
+            <a:r>
+              <a:rPr lang="en-US" sz="1800" dirty="0">
+                <a:solidFill>
+                  <a:srgbClr val="4A5568"/>
+                </a:solidFill>
+              </a:rPr>
+              <a:t> </a:t>
+            </a:r>
+            <a:r>
+              <a:rPr lang="en-US" sz="1800" dirty="0" err="1">
+                <a:solidFill>
+                  <a:srgbClr val="4A5568"/>
+                </a:solidFill>
+              </a:rPr>
+              <a:t>una</a:t>
+            </a:r>
+            <a:r>
+              <a:rPr lang="en-US" sz="1800" dirty="0">
+                <a:solidFill>
+                  <a:srgbClr val="4A5568"/>
+                </a:solidFill>
+              </a:rPr>
+              <a:t> </a:t>
+            </a:r>
+            <a:r>
+              <a:rPr lang="en-US" sz="1800" dirty="0" err="1">
+                <a:solidFill>
+                  <a:srgbClr val="4A5568"/>
+                </a:solidFill>
+              </a:rPr>
+              <a:t>simulación</a:t>
             </a:r>
             <a:endParaRPr lang="en-US" sz="1800" dirty="0">
               <a:solidFill>
@@ -5233,7 +6741,7 @@
                   <a:srgbClr val="4A5568"/>
                 </a:solidFill>
               </a:rPr>
-              <a:t>Tipos</a:t>
+              <a:t>Posibles</a:t>
             </a:r>
             <a:r>
               <a:rPr lang="en-US" sz="1800" dirty="0">
@@ -5241,6 +6749,22 @@
                   <a:srgbClr val="4A5568"/>
                 </a:solidFill>
               </a:rPr>
+              <a:t> </a:t>
+            </a:r>
+            <a:r>
+              <a:rPr lang="en-US" sz="1800" dirty="0" err="1">
+                <a:solidFill>
+                  <a:srgbClr val="4A5568"/>
+                </a:solidFill>
+              </a:rPr>
+              <a:t>usos</a:t>
+            </a:r>
+            <a:r>
+              <a:rPr lang="en-US" sz="1800" dirty="0">
+                <a:solidFill>
+                  <a:srgbClr val="4A5568"/>
+                </a:solidFill>
+              </a:rPr>
               <a:t> de </a:t>
             </a:r>
             <a:r>
@@ -5249,7 +6773,7 @@
                   <a:srgbClr val="4A5568"/>
                 </a:solidFill>
               </a:rPr>
-              <a:t>enfoques</a:t>
+              <a:t>los</a:t>
             </a:r>
             <a:r>
               <a:rPr lang="en-US" sz="1800" dirty="0">
@@ -5257,7 +6781,7 @@
                   <a:srgbClr val="4A5568"/>
                 </a:solidFill>
               </a:rPr>
-              <a:t> a la hora de </a:t>
+              <a:t> </a:t>
             </a:r>
             <a:r>
               <a:rPr lang="en-US" sz="1800" dirty="0" err="1">
@@ -5265,7 +6789,7 @@
                   <a:srgbClr val="4A5568"/>
                 </a:solidFill>
               </a:rPr>
-              <a:t>crear</a:t>
+              <a:t>datos</a:t>
             </a:r>
             <a:r>
               <a:rPr lang="en-US" sz="1800" dirty="0">
@@ -5273,7 +6797,7 @@
                   <a:srgbClr val="4A5568"/>
                 </a:solidFill>
               </a:rPr>
-              <a:t> </a:t>
+              <a:t> las </a:t>
             </a:r>
             <a:r>
               <a:rPr lang="en-US" sz="1800" dirty="0" err="1">
@@ -5281,23 +6805,7 @@
                   <a:srgbClr val="4A5568"/>
                 </a:solidFill>
               </a:rPr>
-              <a:t>una</a:t>
-            </a:r>
-            <a:r>
-              <a:rPr lang="en-US" sz="1800" dirty="0">
-                <a:solidFill>
-                  <a:srgbClr val="4A5568"/>
-                </a:solidFill>
-              </a:rPr>
-              <a:t> </a:t>
-            </a:r>
-            <a:r>
-              <a:rPr lang="en-US" sz="1800" dirty="0" err="1">
-                <a:solidFill>
-                  <a:srgbClr val="4A5568"/>
-                </a:solidFill>
-              </a:rPr>
-              <a:t>simulación</a:t>
+              <a:t>simulaciones</a:t>
             </a:r>
             <a:endParaRPr lang="en-US" sz="1800" dirty="0">
               <a:solidFill>
@@ -5317,7 +6825,7 @@
                   <a:srgbClr val="4A5568"/>
                 </a:solidFill>
               </a:rPr>
-              <a:t>Posibles</a:t>
+              <a:t>Herramientas</a:t>
             </a:r>
             <a:r>
               <a:rPr lang="en-US" sz="1800" dirty="0">
@@ -5333,7 +6841,7 @@
                   <a:srgbClr val="4A5568"/>
                 </a:solidFill>
               </a:rPr>
-              <a:t>usos</a:t>
+              <a:t>principales</a:t>
             </a:r>
             <a:r>
               <a:rPr lang="en-US" sz="1800" dirty="0">
@@ -5341,6 +6849,29 @@
                   <a:srgbClr val="4A5568"/>
                 </a:solidFill>
               </a:rPr>
+              <a:t> de SUMO</a:t>
+            </a:r>
+          </a:p>
+          <a:p>
+            <a:pPr marL="342900" indent="-342900">
+              <a:buSzPct val="100000"/>
+              <a:buFontTx/>
+              <a:buChar char="•"/>
+            </a:pPr>
+            <a:r>
+              <a:rPr lang="en-US" sz="1800" dirty="0" err="1">
+                <a:solidFill>
+                  <a:srgbClr val="4A5568"/>
+                </a:solidFill>
+              </a:rPr>
+              <a:t>Flujo</a:t>
+            </a:r>
+            <a:r>
+              <a:rPr lang="en-US" sz="1800" dirty="0">
+                <a:solidFill>
+                  <a:srgbClr val="4A5568"/>
+                </a:solidFill>
+              </a:rPr>
               <a:t> de </a:t>
             </a:r>
             <a:r>
@@ -5349,7 +6880,7 @@
                   <a:srgbClr val="4A5568"/>
                 </a:solidFill>
               </a:rPr>
-              <a:t>los</a:t>
+              <a:t>trabajo</a:t>
             </a:r>
             <a:r>
               <a:rPr lang="en-US" sz="1800" dirty="0">
@@ -5357,6 +6888,22 @@
                   <a:srgbClr val="4A5568"/>
                 </a:solidFill>
               </a:rPr>
+              <a:t> para </a:t>
+            </a:r>
+            <a:r>
+              <a:rPr lang="en-US" sz="1800" dirty="0" err="1">
+                <a:solidFill>
+                  <a:srgbClr val="4A5568"/>
+                </a:solidFill>
+              </a:rPr>
+              <a:t>crear</a:t>
+            </a:r>
+            <a:r>
+              <a:rPr lang="en-US" sz="1800" dirty="0">
+                <a:solidFill>
+                  <a:srgbClr val="4A5568"/>
+                </a:solidFill>
+              </a:rPr>
               <a:t> </a:t>
             </a:r>
             <a:r>
@@ -5365,7 +6912,7 @@
                   <a:srgbClr val="4A5568"/>
                 </a:solidFill>
               </a:rPr>
-              <a:t>datos</a:t>
+              <a:t>una</a:t>
             </a:r>
             <a:r>
               <a:rPr lang="en-US" sz="1800" dirty="0">
@@ -5373,7 +6920,7 @@
                   <a:srgbClr val="4A5568"/>
                 </a:solidFill>
               </a:rPr>
-              <a:t> las </a:t>
+              <a:t> </a:t>
             </a:r>
             <a:r>
               <a:rPr lang="en-US" sz="1800" dirty="0" err="1">
@@ -5381,7 +6928,7 @@
                   <a:srgbClr val="4A5568"/>
                 </a:solidFill>
               </a:rPr>
-              <a:t>simulaciones</a:t>
+              <a:t>simulación</a:t>
             </a:r>
             <a:endParaRPr lang="en-US" sz="1800" dirty="0">
               <a:solidFill>
@@ -5401,110 +6948,7 @@
                   <a:srgbClr val="4A5568"/>
                 </a:solidFill>
               </a:rPr>
-              <a:t>Herramientas</a:t>
-            </a:r>
-            <a:r>
-              <a:rPr lang="en-US" sz="1800" dirty="0">
-                <a:solidFill>
-                  <a:srgbClr val="4A5568"/>
-                </a:solidFill>
-              </a:rPr>
-              <a:t> </a:t>
-            </a:r>
-            <a:r>
-              <a:rPr lang="en-US" sz="1800" dirty="0" err="1">
-                <a:solidFill>
-                  <a:srgbClr val="4A5568"/>
-                </a:solidFill>
-              </a:rPr>
-              <a:t>principales</a:t>
-            </a:r>
-            <a:r>
-              <a:rPr lang="en-US" sz="1800" dirty="0">
-                <a:solidFill>
-                  <a:srgbClr val="4A5568"/>
-                </a:solidFill>
-              </a:rPr>
-              <a:t> de SUMO</a:t>
-            </a:r>
-          </a:p>
-          <a:p>
-            <a:pPr marL="342900" indent="-342900">
-              <a:buSzPct val="100000"/>
-              <a:buFontTx/>
-              <a:buChar char="•"/>
-            </a:pPr>
-            <a:r>
-              <a:rPr lang="en-US" sz="1800" dirty="0" err="1">
-                <a:solidFill>
-                  <a:srgbClr val="4A5568"/>
-                </a:solidFill>
-              </a:rPr>
-              <a:t>Flujo</a:t>
-            </a:r>
-            <a:r>
-              <a:rPr lang="en-US" sz="1800" dirty="0">
-                <a:solidFill>
-                  <a:srgbClr val="4A5568"/>
-                </a:solidFill>
-              </a:rPr>
-              <a:t> de </a:t>
-            </a:r>
-            <a:r>
-              <a:rPr lang="en-US" sz="1800" dirty="0" err="1">
-                <a:solidFill>
-                  <a:srgbClr val="4A5568"/>
-                </a:solidFill>
-              </a:rPr>
-              <a:t>trabajo</a:t>
-            </a:r>
-            <a:r>
-              <a:rPr lang="en-US" sz="1800" dirty="0">
-                <a:solidFill>
-                  <a:srgbClr val="4A5568"/>
-                </a:solidFill>
-              </a:rPr>
-              <a:t> para </a:t>
-            </a:r>
-            <a:r>
-              <a:rPr lang="en-US" sz="1800" dirty="0" err="1">
-                <a:solidFill>
-                  <a:srgbClr val="4A5568"/>
-                </a:solidFill>
-              </a:rPr>
-              <a:t>crear</a:t>
-            </a:r>
-            <a:r>
-              <a:rPr lang="en-US" sz="1800" dirty="0">
-                <a:solidFill>
-                  <a:srgbClr val="4A5568"/>
-                </a:solidFill>
-              </a:rPr>
-              <a:t> </a:t>
-            </a:r>
-            <a:r>
-              <a:rPr lang="en-US" sz="1800" dirty="0" err="1">
-                <a:solidFill>
-                  <a:srgbClr val="4A5568"/>
-                </a:solidFill>
-              </a:rPr>
-              <a:t>una</a:t>
-            </a:r>
-            <a:r>
-              <a:rPr lang="en-US" sz="1800" dirty="0">
-                <a:solidFill>
-                  <a:srgbClr val="4A5568"/>
-                </a:solidFill>
-              </a:rPr>
-              <a:t> </a:t>
-            </a:r>
-            <a:r>
-              <a:rPr lang="en-US" sz="1800" dirty="0" err="1">
-                <a:solidFill>
-                  <a:srgbClr val="4A5568"/>
-                </a:solidFill>
-              </a:rPr>
-              <a:t>simulación</a:t>
+              <a:t>Instalación</a:t>
             </a:r>
             <a:endParaRPr lang="en-US" sz="1800" dirty="0">
               <a:solidFill>
@@ -5820,7 +7264,7 @@
         <p:spPr>
           <a:xfrm>
             <a:off x="457200" y="1316182"/>
-            <a:ext cx="8288383" cy="3131127"/>
+            <a:ext cx="8288383" cy="3353789"/>
           </a:xfrm>
           <a:prstGeom prst="rect">
             <a:avLst/>
@@ -5836,122 +7280,138 @@
           <a:bodyPr wrap="square" rtlCol="0" anchor="t"/>
           <a:lstStyle/>
           <a:p>
-            <a:pPr marL="342900" indent="-342900">
+            <a:pPr>
               <a:buSzPct val="100000"/>
-              <a:buFontTx/>
-              <a:buChar char="•"/>
-            </a:pPr>
-            <a:r>
-              <a:rPr lang="en-US" sz="2000" dirty="0">
-                <a:solidFill>
-                  <a:srgbClr val="4A5568"/>
-                </a:solidFill>
-              </a:rPr>
-              <a:t>SUMO(</a:t>
-            </a:r>
-            <a:r>
-              <a:rPr lang="en-US" sz="2000" b="1" dirty="0">
-                <a:solidFill>
-                  <a:srgbClr val="4A5568"/>
-                </a:solidFill>
+            </a:pPr>
+            <a:r>
+              <a:rPr lang="es-ES" sz="2000" b="1" i="0" dirty="0">
+                <a:solidFill>
+                  <a:srgbClr val="403B3B"/>
+                </a:solidFill>
+                <a:effectLst/>
+                <a:latin typeface="-apple-system"/>
+              </a:rPr>
+              <a:t>SUMO</a:t>
+            </a:r>
+            <a:r>
+              <a:rPr lang="es-ES_tradnl" sz="2000" b="0" i="0" dirty="0">
+                <a:solidFill>
+                  <a:srgbClr val="403B3B"/>
+                </a:solidFill>
+                <a:effectLst/>
+                <a:latin typeface="-apple-system"/>
+              </a:rPr>
+              <a:t>(</a:t>
+            </a:r>
+            <a:r>
+              <a:rPr lang="es-ES_tradnl" sz="2000" b="1" i="0" dirty="0" err="1">
+                <a:solidFill>
+                  <a:srgbClr val="403B3B"/>
+                </a:solidFill>
+                <a:effectLst/>
+                <a:latin typeface="-apple-system"/>
               </a:rPr>
               <a:t>S</a:t>
             </a:r>
             <a:r>
-              <a:rPr lang="en-US" sz="2000" dirty="0">
-                <a:solidFill>
-                  <a:srgbClr val="4A5568"/>
-                </a:solidFill>
-              </a:rPr>
-              <a:t>imulation of </a:t>
-            </a:r>
-            <a:r>
-              <a:rPr lang="en-US" sz="2000" b="1" dirty="0">
-                <a:solidFill>
-                  <a:srgbClr val="4A5568"/>
-                </a:solidFill>
+              <a:rPr lang="es-ES_tradnl" sz="2000" b="0" i="0" dirty="0" err="1">
+                <a:solidFill>
+                  <a:srgbClr val="403B3B"/>
+                </a:solidFill>
+                <a:effectLst/>
+                <a:latin typeface="-apple-system"/>
+              </a:rPr>
+              <a:t>imulation</a:t>
+            </a:r>
+            <a:r>
+              <a:rPr lang="es-ES_tradnl" sz="2000" b="0" i="0" dirty="0">
+                <a:solidFill>
+                  <a:srgbClr val="403B3B"/>
+                </a:solidFill>
+                <a:effectLst/>
+                <a:latin typeface="-apple-system"/>
+              </a:rPr>
+              <a:t> </a:t>
+            </a:r>
+            <a:r>
+              <a:rPr lang="es-ES_tradnl" sz="2000" b="0" i="0" dirty="0" err="1">
+                <a:solidFill>
+                  <a:srgbClr val="403B3B"/>
+                </a:solidFill>
+                <a:effectLst/>
+                <a:latin typeface="-apple-system"/>
+              </a:rPr>
+              <a:t>of</a:t>
+            </a:r>
+            <a:r>
+              <a:rPr lang="es-ES_tradnl" sz="2000" b="0" i="0" dirty="0">
+                <a:solidFill>
+                  <a:srgbClr val="403B3B"/>
+                </a:solidFill>
+                <a:effectLst/>
+                <a:latin typeface="-apple-system"/>
+              </a:rPr>
+              <a:t> </a:t>
+            </a:r>
+            <a:r>
+              <a:rPr lang="es-ES_tradnl" sz="2000" b="1" i="0" dirty="0">
+                <a:solidFill>
+                  <a:srgbClr val="403B3B"/>
+                </a:solidFill>
+                <a:effectLst/>
+                <a:latin typeface="-apple-system"/>
               </a:rPr>
               <a:t>U</a:t>
             </a:r>
             <a:r>
-              <a:rPr lang="en-US" sz="2000" dirty="0">
-                <a:solidFill>
-                  <a:srgbClr val="4A5568"/>
-                </a:solidFill>
+              <a:rPr lang="es-ES_tradnl" sz="2000" b="0" i="0" dirty="0">
+                <a:solidFill>
+                  <a:srgbClr val="403B3B"/>
+                </a:solidFill>
+                <a:effectLst/>
+                <a:latin typeface="-apple-system"/>
               </a:rPr>
               <a:t>rban </a:t>
             </a:r>
             <a:r>
-              <a:rPr lang="en-US" sz="2000" b="1" dirty="0">
-                <a:solidFill>
-                  <a:srgbClr val="4A5568"/>
-                </a:solidFill>
-              </a:rPr>
-              <a:t>Mo</a:t>
-            </a:r>
-            <a:r>
-              <a:rPr lang="en-US" sz="2000" dirty="0">
-                <a:solidFill>
-                  <a:srgbClr val="4A5568"/>
-                </a:solidFill>
-              </a:rPr>
-              <a:t>bility) es un conjuntos de </a:t>
-            </a:r>
-            <a:r>
-              <a:rPr lang="en-US" sz="2000" dirty="0" err="1">
-                <a:solidFill>
-                  <a:srgbClr val="4A5568"/>
-                </a:solidFill>
-              </a:rPr>
-              <a:t>aplicaciones</a:t>
-            </a:r>
-            <a:r>
-              <a:rPr lang="en-US" sz="2000" dirty="0">
-                <a:solidFill>
-                  <a:srgbClr val="4A5568"/>
-                </a:solidFill>
-              </a:rPr>
-              <a:t> para la </a:t>
-            </a:r>
-            <a:r>
-              <a:rPr lang="en-US" sz="2000" dirty="0" err="1">
-                <a:solidFill>
-                  <a:srgbClr val="4A5568"/>
-                </a:solidFill>
-              </a:rPr>
-              <a:t>creación</a:t>
-            </a:r>
-            <a:r>
-              <a:rPr lang="en-US" sz="2000" dirty="0">
-                <a:solidFill>
-                  <a:srgbClr val="4A5568"/>
-                </a:solidFill>
-              </a:rPr>
-              <a:t> de </a:t>
-            </a:r>
-            <a:r>
-              <a:rPr lang="en-US" sz="2000" dirty="0" err="1">
-                <a:solidFill>
-                  <a:srgbClr val="4A5568"/>
-                </a:solidFill>
-              </a:rPr>
-              <a:t>simulaciones</a:t>
-            </a:r>
-            <a:r>
-              <a:rPr lang="en-US" sz="2000" dirty="0">
-                <a:solidFill>
-                  <a:srgbClr val="4A5568"/>
-                </a:solidFill>
-              </a:rPr>
-              <a:t> </a:t>
-            </a:r>
-            <a:r>
-              <a:rPr lang="en-US" sz="2000" dirty="0" err="1">
-                <a:solidFill>
-                  <a:srgbClr val="4A5568"/>
-                </a:solidFill>
-              </a:rPr>
-              <a:t>tráfico</a:t>
+              <a:rPr lang="es-ES_tradnl" sz="2000" b="1" i="0" dirty="0" err="1">
+                <a:solidFill>
+                  <a:srgbClr val="403B3B"/>
+                </a:solidFill>
+                <a:effectLst/>
+                <a:latin typeface="-apple-system"/>
+              </a:rPr>
+              <a:t>MO</a:t>
+            </a:r>
+            <a:r>
+              <a:rPr lang="es-ES_tradnl" sz="2000" b="0" i="0" dirty="0" err="1">
+                <a:solidFill>
+                  <a:srgbClr val="403B3B"/>
+                </a:solidFill>
+                <a:effectLst/>
+                <a:latin typeface="-apple-system"/>
+              </a:rPr>
+              <a:t>bility</a:t>
+            </a:r>
+            <a:r>
+              <a:rPr lang="es-ES_tradnl" sz="2000" b="0" i="0" dirty="0">
+                <a:solidFill>
+                  <a:srgbClr val="403B3B"/>
+                </a:solidFill>
+                <a:effectLst/>
+                <a:latin typeface="-apple-system"/>
+              </a:rPr>
+              <a:t>),</a:t>
+            </a:r>
+            <a:r>
+              <a:rPr lang="es-ES" sz="2000" b="0" i="0" dirty="0">
+                <a:solidFill>
+                  <a:srgbClr val="403B3B"/>
+                </a:solidFill>
+                <a:effectLst/>
+                <a:latin typeface="-apple-system"/>
+              </a:rPr>
+              <a:t> un paquete de simulación de tráfico multimodal de código abierto(licencia EPL) diseñado para manejar grandes redes.</a:t>
             </a:r>
             <a:endParaRPr lang="en-US" sz="2000" dirty="0">
               <a:solidFill>
@@ -5960,115 +7420,9 @@
             </a:endParaRPr>
           </a:p>
           <a:p>
-            <a:pPr marL="342900" indent="-342900">
+            <a:pPr>
               <a:buSzPct val="100000"/>
-              <a:buFontTx/>
-              <a:buChar char="•"/>
-            </a:pPr>
-            <a:r>
-              <a:rPr lang="en-US" sz="2000" dirty="0" err="1">
-                <a:solidFill>
-                  <a:srgbClr val="4A5568"/>
-                </a:solidFill>
-              </a:rPr>
-              <a:t>Desarrollado</a:t>
-            </a:r>
-            <a:r>
-              <a:rPr lang="en-US" sz="2000" dirty="0">
-                <a:solidFill>
-                  <a:srgbClr val="4A5568"/>
-                </a:solidFill>
-              </a:rPr>
-              <a:t> </a:t>
-            </a:r>
-            <a:r>
-              <a:rPr lang="en-US" sz="2000" dirty="0" err="1">
-                <a:solidFill>
-                  <a:srgbClr val="4A5568"/>
-                </a:solidFill>
-              </a:rPr>
-              <a:t>por</a:t>
-            </a:r>
-            <a:r>
-              <a:rPr lang="en-US" sz="2000" dirty="0">
-                <a:solidFill>
-                  <a:srgbClr val="4A5568"/>
-                </a:solidFill>
-              </a:rPr>
-              <a:t> </a:t>
-            </a:r>
-            <a:r>
-              <a:rPr lang="en-US" sz="2000" dirty="0" err="1">
-                <a:solidFill>
-                  <a:srgbClr val="4A5568"/>
-                </a:solidFill>
-              </a:rPr>
-              <a:t>el</a:t>
-            </a:r>
-            <a:r>
-              <a:rPr lang="en-US" sz="2000" dirty="0">
-                <a:solidFill>
-                  <a:srgbClr val="4A5568"/>
-                </a:solidFill>
-              </a:rPr>
-              <a:t> DLR, </a:t>
-            </a:r>
-            <a:r>
-              <a:rPr lang="en-US" sz="2000" dirty="0" err="1">
-                <a:solidFill>
-                  <a:srgbClr val="4A5568"/>
-                </a:solidFill>
-              </a:rPr>
-              <a:t>el</a:t>
-            </a:r>
-            <a:r>
-              <a:rPr lang="en-US" sz="2000" dirty="0">
-                <a:solidFill>
-                  <a:srgbClr val="4A5568"/>
-                </a:solidFill>
-              </a:rPr>
-              <a:t> </a:t>
-            </a:r>
-            <a:r>
-              <a:rPr lang="en-US" sz="2000" dirty="0" err="1">
-                <a:solidFill>
-                  <a:srgbClr val="4A5568"/>
-                </a:solidFill>
-              </a:rPr>
-              <a:t>centro</a:t>
-            </a:r>
-            <a:r>
-              <a:rPr lang="en-US" sz="2000" dirty="0">
-                <a:solidFill>
-                  <a:srgbClr val="4A5568"/>
-                </a:solidFill>
-              </a:rPr>
-              <a:t> </a:t>
-            </a:r>
-            <a:r>
-              <a:rPr lang="en-US" sz="2000" dirty="0" err="1">
-                <a:solidFill>
-                  <a:srgbClr val="4A5568"/>
-                </a:solidFill>
-              </a:rPr>
-              <a:t>aeroespacial</a:t>
-            </a:r>
-            <a:r>
-              <a:rPr lang="en-US" sz="2000" dirty="0">
-                <a:solidFill>
-                  <a:srgbClr val="4A5568"/>
-                </a:solidFill>
-              </a:rPr>
-              <a:t> </a:t>
-            </a:r>
-            <a:r>
-              <a:rPr lang="en-US" sz="2000" dirty="0" err="1">
-                <a:solidFill>
-                  <a:srgbClr val="4A5568"/>
-                </a:solidFill>
-              </a:rPr>
-              <a:t>alemán</a:t>
-            </a:r>
+            </a:pPr>
             <a:endParaRPr lang="en-US" sz="2000" dirty="0">
               <a:solidFill>
                 <a:srgbClr val="4A5568"/>
@@ -6076,10 +7430,8 @@
             </a:endParaRPr>
           </a:p>
           <a:p>
-            <a:pPr marL="342900" indent="-342900">
+            <a:pPr>
               <a:buSzPct val="100000"/>
-              <a:buFontTx/>
-              <a:buChar char="•"/>
             </a:pPr>
             <a:r>
               <a:rPr lang="en-US" sz="2000" dirty="0" err="1">
@@ -6087,7 +7439,7 @@
                   <a:srgbClr val="4A5568"/>
                 </a:solidFill>
               </a:rPr>
-              <a:t>Pertenece</a:t>
+              <a:t>Desarrollado</a:t>
             </a:r>
             <a:r>
               <a:rPr lang="en-US" sz="2000" dirty="0">
@@ -6095,7 +7447,7 @@
                   <a:srgbClr val="4A5568"/>
                 </a:solidFill>
               </a:rPr>
-              <a:t> a la </a:t>
+              <a:t> </a:t>
             </a:r>
             <a:r>
               <a:rPr lang="en-US" sz="2000" dirty="0" err="1">
@@ -6103,7 +7455,7 @@
                   <a:srgbClr val="4A5568"/>
                 </a:solidFill>
               </a:rPr>
-              <a:t>fundacion</a:t>
+              <a:t>por</a:t>
             </a:r>
             <a:r>
               <a:rPr lang="en-US" sz="2000" dirty="0">
@@ -6111,21 +7463,15 @@
                   <a:srgbClr val="4A5568"/>
                 </a:solidFill>
               </a:rPr>
-              <a:t> Eclipse</a:t>
-            </a:r>
-          </a:p>
-          <a:p>
-            <a:pPr marL="342900" indent="-342900">
-              <a:buSzPct val="100000"/>
-              <a:buChar char="•"/>
-            </a:pPr>
+              <a:t> </a:t>
+            </a:r>
             <a:r>
               <a:rPr lang="en-US" sz="2000" dirty="0" err="1">
                 <a:solidFill>
                   <a:srgbClr val="4A5568"/>
                 </a:solidFill>
               </a:rPr>
-              <a:t>Simulador</a:t>
+              <a:t>el</a:t>
             </a:r>
             <a:r>
               <a:rPr lang="en-US" sz="2000" dirty="0">
@@ -6133,22 +7479,15 @@
                   <a:srgbClr val="4A5568"/>
                 </a:solidFill>
               </a:rPr>
-              <a:t> de tráfico de código abierto (licencia EPL)</a:t>
-            </a:r>
-          </a:p>
-          <a:p>
-            <a:pPr marL="342900" indent="-342900">
-              <a:buSzPct val="100000"/>
-              <a:buFontTx/>
-              <a:buChar char="•"/>
-            </a:pPr>
+              <a:t> DLR, </a:t>
+            </a:r>
             <a:r>
               <a:rPr lang="en-US" sz="2000" dirty="0" err="1">
                 <a:solidFill>
                   <a:srgbClr val="4A5568"/>
                 </a:solidFill>
               </a:rPr>
-              <a:t>Multiplataforma</a:t>
+              <a:t>el</a:t>
             </a:r>
             <a:r>
               <a:rPr lang="en-US" sz="2000" dirty="0">
@@ -6156,7 +7495,7 @@
                   <a:srgbClr val="4A5568"/>
                 </a:solidFill>
               </a:rPr>
-              <a:t>: </a:t>
+              <a:t> </a:t>
             </a:r>
             <a:r>
               <a:rPr lang="en-US" sz="2000" dirty="0" err="1">
@@ -6164,7 +7503,7 @@
                   <a:srgbClr val="4A5568"/>
                 </a:solidFill>
               </a:rPr>
-              <a:t>Funciona</a:t>
+              <a:t>centro</a:t>
             </a:r>
             <a:r>
               <a:rPr lang="en-US" sz="2000" dirty="0">
@@ -6180,7 +7519,7 @@
                   <a:srgbClr val="4A5568"/>
                 </a:solidFill>
               </a:rPr>
-              <a:t>en</a:t>
+              <a:t>aeroespacial</a:t>
             </a:r>
             <a:r>
               <a:rPr lang="en-US" sz="2000" dirty="0">
@@ -6188,21 +7527,7 @@
                   <a:srgbClr val="4A5568"/>
                 </a:solidFill>
               </a:rPr>
-              <a:t> Windows, Linux y macOS</a:t>
-            </a:r>
-          </a:p>
-          <a:p>
-            <a:pPr marL="342900" indent="-342900">
-              <a:buSzPct val="100000"/>
-              <a:buChar char="•"/>
-            </a:pPr>
-            <a:r>
-              <a:rPr lang="en-US" sz="2000" dirty="0">
-                <a:solidFill>
-                  <a:srgbClr val="4A5568"/>
-                </a:solidFill>
-              </a:rPr>
-              <a:t>Multimodal: coches, </a:t>
+              <a:t> </a:t>
             </a:r>
             <a:r>
               <a:rPr lang="en-US" sz="2000" dirty="0" err="1">
@@ -6210,39 +7535,7 @@
                   <a:srgbClr val="4A5568"/>
                 </a:solidFill>
               </a:rPr>
-              <a:t>autobuses,motocicletas,bicicletas</a:t>
-            </a:r>
-            <a:r>
-              <a:rPr lang="en-US" sz="2000" dirty="0">
-                <a:solidFill>
-                  <a:srgbClr val="4A5568"/>
-                </a:solidFill>
-              </a:rPr>
-              <a:t>, peatones, </a:t>
-            </a:r>
-            <a:r>
-              <a:rPr lang="en-US" sz="2000" dirty="0" err="1">
-                <a:solidFill>
-                  <a:srgbClr val="4A5568"/>
-                </a:solidFill>
-              </a:rPr>
-              <a:t>tranvías</a:t>
-            </a:r>
-            <a:r>
-              <a:rPr lang="en-US" sz="2000" dirty="0">
-                <a:solidFill>
-                  <a:srgbClr val="4A5568"/>
-                </a:solidFill>
-              </a:rPr>
-              <a:t>, </a:t>
-            </a:r>
-            <a:r>
-              <a:rPr lang="en-US" sz="2000" dirty="0" err="1">
-                <a:solidFill>
-                  <a:srgbClr val="4A5568"/>
-                </a:solidFill>
-              </a:rPr>
-              <a:t>trenes</a:t>
+              <a:t>alemán</a:t>
             </a:r>
             <a:endParaRPr lang="en-US" sz="2000" dirty="0">
               <a:solidFill>
@@ -6251,9 +7544,8 @@
             </a:endParaRPr>
           </a:p>
           <a:p>
-            <a:pPr marL="342900" indent="-342900">
+            <a:pPr>
               <a:buSzPct val="100000"/>
-              <a:buChar char="•"/>
             </a:pPr>
             <a:endParaRPr lang="en-US" sz="2000" dirty="0">
               <a:solidFill>
@@ -6262,115 +7554,155 @@
             </a:endParaRPr>
           </a:p>
           <a:p>
+            <a:pPr>
+              <a:buSzPct val="100000"/>
+            </a:pPr>
+            <a:r>
+              <a:rPr lang="en-US" sz="2000" dirty="0" err="1">
+                <a:solidFill>
+                  <a:srgbClr val="4A5568"/>
+                </a:solidFill>
+              </a:rPr>
+              <a:t>Multiplataforma</a:t>
+            </a:r>
+            <a:r>
+              <a:rPr lang="en-US" sz="2000" dirty="0">
+                <a:solidFill>
+                  <a:srgbClr val="4A5568"/>
+                </a:solidFill>
+              </a:rPr>
+              <a:t>: </a:t>
+            </a:r>
+            <a:r>
+              <a:rPr lang="en-US" sz="2000" dirty="0" err="1">
+                <a:solidFill>
+                  <a:srgbClr val="4A5568"/>
+                </a:solidFill>
+              </a:rPr>
+              <a:t>Funciona</a:t>
+            </a:r>
+            <a:r>
+              <a:rPr lang="en-US" sz="2000" dirty="0">
+                <a:solidFill>
+                  <a:srgbClr val="4A5568"/>
+                </a:solidFill>
+              </a:rPr>
+              <a:t> </a:t>
+            </a:r>
+            <a:r>
+              <a:rPr lang="en-US" sz="2000" dirty="0" err="1">
+                <a:solidFill>
+                  <a:srgbClr val="4A5568"/>
+                </a:solidFill>
+              </a:rPr>
+              <a:t>en</a:t>
+            </a:r>
+            <a:r>
+              <a:rPr lang="en-US" sz="2000" dirty="0">
+                <a:solidFill>
+                  <a:srgbClr val="4A5568"/>
+                </a:solidFill>
+              </a:rPr>
+              <a:t> Windows, Linux y macOS</a:t>
+            </a:r>
+          </a:p>
+          <a:p>
+            <a:pPr>
+              <a:buSzPct val="100000"/>
+            </a:pPr>
+            <a:endParaRPr lang="en-US" sz="2000" dirty="0">
+              <a:solidFill>
+                <a:srgbClr val="4A5568"/>
+              </a:solidFill>
+            </a:endParaRPr>
+          </a:p>
+          <a:p>
+            <a:pPr>
+              <a:buSzPct val="100000"/>
+            </a:pPr>
+            <a:r>
+              <a:rPr lang="en-US" sz="2000" dirty="0">
+                <a:solidFill>
+                  <a:srgbClr val="4A5568"/>
+                </a:solidFill>
+              </a:rPr>
+              <a:t>Multimodal: coches, </a:t>
+            </a:r>
+            <a:r>
+              <a:rPr lang="en-US" sz="2000" dirty="0" err="1">
+                <a:solidFill>
+                  <a:srgbClr val="4A5568"/>
+                </a:solidFill>
+              </a:rPr>
+              <a:t>autobuses,motocicletas,bicicletas</a:t>
+            </a:r>
+            <a:r>
+              <a:rPr lang="en-US" sz="2000" dirty="0">
+                <a:solidFill>
+                  <a:srgbClr val="4A5568"/>
+                </a:solidFill>
+              </a:rPr>
+              <a:t>, peatones, </a:t>
+            </a:r>
+            <a:r>
+              <a:rPr lang="en-US" sz="2000" dirty="0" err="1">
+                <a:solidFill>
+                  <a:srgbClr val="4A5568"/>
+                </a:solidFill>
+              </a:rPr>
+              <a:t>tranvías</a:t>
+            </a:r>
+            <a:r>
+              <a:rPr lang="en-US" sz="2000" dirty="0">
+                <a:solidFill>
+                  <a:srgbClr val="4A5568"/>
+                </a:solidFill>
+              </a:rPr>
+              <a:t>, </a:t>
+            </a:r>
+            <a:r>
+              <a:rPr lang="en-US" sz="2000" dirty="0" err="1">
+                <a:solidFill>
+                  <a:srgbClr val="4A5568"/>
+                </a:solidFill>
+              </a:rPr>
+              <a:t>trenes</a:t>
+            </a:r>
+            <a:r>
+              <a:rPr lang="en-US" sz="2000" dirty="0">
+                <a:solidFill>
+                  <a:srgbClr val="4A5568"/>
+                </a:solidFill>
+              </a:rPr>
+              <a:t>, </a:t>
+            </a:r>
+            <a:r>
+              <a:rPr lang="en-US" sz="2000" dirty="0" err="1">
+                <a:solidFill>
+                  <a:srgbClr val="4A5568"/>
+                </a:solidFill>
+              </a:rPr>
+              <a:t>etc</a:t>
+            </a:r>
+            <a:r>
+              <a:rPr lang="en-US" sz="2000" dirty="0">
+                <a:solidFill>
+                  <a:srgbClr val="4A5568"/>
+                </a:solidFill>
+              </a:rPr>
+              <a:t>…</a:t>
+            </a:r>
+          </a:p>
+          <a:p>
             <a:pPr marL="342900" indent="-342900">
               <a:buSzPct val="100000"/>
               <a:buChar char="•"/>
             </a:pPr>
-            <a:r>
-              <a:rPr lang="en-US" sz="2000" dirty="0" err="1">
-                <a:solidFill>
-                  <a:srgbClr val="4A5568"/>
-                </a:solidFill>
-              </a:rPr>
-              <a:t>Artesanal</a:t>
-            </a:r>
-            <a:r>
-              <a:rPr lang="en-US" sz="2000" dirty="0">
-                <a:solidFill>
-                  <a:srgbClr val="4A5568"/>
-                </a:solidFill>
-              </a:rPr>
-              <a:t>: </a:t>
-            </a:r>
-            <a:r>
-              <a:rPr lang="en-US" sz="2000" dirty="0" err="1">
-                <a:solidFill>
-                  <a:srgbClr val="4A5568"/>
-                </a:solidFill>
-              </a:rPr>
-              <a:t>Existe</a:t>
-            </a:r>
-            <a:r>
-              <a:rPr lang="en-US" sz="2000" dirty="0">
-                <a:solidFill>
-                  <a:srgbClr val="4A5568"/>
-                </a:solidFill>
-              </a:rPr>
-              <a:t> </a:t>
-            </a:r>
-            <a:r>
-              <a:rPr lang="en-US" sz="2000" dirty="0" err="1">
-                <a:solidFill>
-                  <a:srgbClr val="4A5568"/>
-                </a:solidFill>
-              </a:rPr>
-              <a:t>una</a:t>
-            </a:r>
-            <a:r>
-              <a:rPr lang="en-US" sz="2000" dirty="0">
-                <a:solidFill>
-                  <a:srgbClr val="4A5568"/>
-                </a:solidFill>
-              </a:rPr>
-              <a:t> suite de </a:t>
-            </a:r>
-            <a:r>
-              <a:rPr lang="en-US" sz="2000" dirty="0" err="1">
-                <a:solidFill>
-                  <a:srgbClr val="4A5568"/>
-                </a:solidFill>
-              </a:rPr>
-              <a:t>aplicaciones</a:t>
-            </a:r>
-            <a:r>
-              <a:rPr lang="en-US" sz="2000" dirty="0">
-                <a:solidFill>
-                  <a:srgbClr val="4A5568"/>
-                </a:solidFill>
-              </a:rPr>
-              <a:t> </a:t>
-            </a:r>
-            <a:r>
-              <a:rPr lang="en-US" sz="2000" dirty="0" err="1">
-                <a:solidFill>
-                  <a:srgbClr val="4A5568"/>
-                </a:solidFill>
-              </a:rPr>
-              <a:t>pero</a:t>
-            </a:r>
-            <a:r>
-              <a:rPr lang="en-US" sz="2000" dirty="0">
-                <a:solidFill>
-                  <a:srgbClr val="4A5568"/>
-                </a:solidFill>
-              </a:rPr>
-              <a:t> </a:t>
-            </a:r>
-            <a:r>
-              <a:rPr lang="en-US" sz="2000" dirty="0" err="1">
-                <a:solidFill>
-                  <a:srgbClr val="4A5568"/>
-                </a:solidFill>
-              </a:rPr>
-              <a:t>mejor</a:t>
-            </a:r>
-            <a:r>
-              <a:rPr lang="en-US" sz="2000" dirty="0">
-                <a:solidFill>
-                  <a:srgbClr val="4A5568"/>
-                </a:solidFill>
-              </a:rPr>
-              <a:t> con </a:t>
-            </a:r>
-            <a:r>
-              <a:rPr lang="en-US" sz="2000" dirty="0" err="1">
-                <a:solidFill>
-                  <a:srgbClr val="4A5568"/>
-                </a:solidFill>
-              </a:rPr>
-              <a:t>comandos</a:t>
-            </a:r>
-            <a:endParaRPr lang="en-US" sz="2000" dirty="0"/>
+            <a:endParaRPr lang="en-US" sz="2000" dirty="0">
+              <a:solidFill>
+                <a:srgbClr val="4A5568"/>
+              </a:solidFill>
+            </a:endParaRPr>
           </a:p>
         </p:txBody>
       </p:sp>
@@ -6459,6 +7791,53 @@
           </a:p>
         </p:txBody>
       </p:sp>
+      <p:pic>
+        <p:nvPicPr>
+          <p:cNvPr id="1026" name="Picture 2" descr="Centro Aeroespacial Alemán (DLR) - CIEMAT">
+            <a:extLst>
+              <a:ext uri="{FF2B5EF4-FFF2-40B4-BE49-F238E27FC236}">
+                <a16:creationId xmlns:a16="http://schemas.microsoft.com/office/drawing/2014/main" id="{952ADE88-AA74-5155-4831-8071F4916D17}"/>
+              </a:ext>
+            </a:extLst>
+          </p:cNvPr>
+          <p:cNvPicPr>
+            <a:picLocks noChangeAspect="1" noChangeArrowheads="1"/>
+          </p:cNvPicPr>
+          <p:nvPr/>
+        </p:nvPicPr>
+        <p:blipFill>
+          <a:blip r:embed="rId4">
+            <a:extLst>
+              <a:ext uri="{28A0092B-C50C-407E-A947-70E740481C1C}">
+                <a14:useLocalDpi xmlns:a14="http://schemas.microsoft.com/office/drawing/2010/main" val="0"/>
+              </a:ext>
+            </a:extLst>
+          </a:blip>
+          <a:srcRect/>
+          <a:stretch>
+            <a:fillRect/>
+          </a:stretch>
+        </p:blipFill>
+        <p:spPr bwMode="auto">
+          <a:xfrm>
+            <a:off x="6893557" y="2211406"/>
+            <a:ext cx="1852026" cy="1060562"/>
+          </a:xfrm>
+          <a:prstGeom prst="rect">
+            <a:avLst/>
+          </a:prstGeom>
+          <a:noFill/>
+          <a:extLst>
+            <a:ext uri="{909E8E84-426E-40DD-AFC4-6F175D3DCCD1}">
+              <a14:hiddenFill xmlns:a14="http://schemas.microsoft.com/office/drawing/2010/main">
+                <a:solidFill>
+                  <a:srgbClr val="FFFFFF"/>
+                </a:solidFill>
+              </a14:hiddenFill>
+            </a:ext>
+          </a:extLst>
+        </p:spPr>
+      </p:pic>
     </p:spTree>
   </p:cSld>
   <p:clrMapOvr>
@@ -6468,490 +7847,6 @@
 </file>
 
 <file path=ppt/slides/slide4.xml><?xml version="1.0" encoding="utf-8"?>
-<p:sld xmlns:a="http://schemas.openxmlformats.org/drawingml/2006/main" xmlns:r="http://schemas.openxmlformats.org/officeDocument/2006/relationships" xmlns:p="http://schemas.openxmlformats.org/presentationml/2006/main">
-  <p:cSld>
-    <p:spTree>
-      <p:nvGrpSpPr>
-        <p:cNvPr id="1" name=""/>
-        <p:cNvGrpSpPr/>
-        <p:nvPr/>
-      </p:nvGrpSpPr>
-      <p:grpSpPr>
-        <a:xfrm>
-          <a:off x="0" y="0"/>
-          <a:ext cx="0" cy="0"/>
-          <a:chOff x="0" y="0"/>
-          <a:chExt cx="0" cy="0"/>
-        </a:xfrm>
-      </p:grpSpPr>
-      <p:sp>
-        <p:nvSpPr>
-          <p:cNvPr id="2" name="Shape 0"/>
-          <p:cNvSpPr/>
-          <p:nvPr/>
-        </p:nvSpPr>
-        <p:spPr>
-          <a:xfrm>
-            <a:off x="0" y="0"/>
-            <a:ext cx="9144000" cy="822960"/>
-          </a:xfrm>
-          <a:prstGeom prst="rect">
-            <a:avLst/>
-          </a:prstGeom>
-          <a:solidFill>
-            <a:srgbClr val="1F3A5F"/>
-          </a:solidFill>
-          <a:ln/>
-        </p:spPr>
-      </p:sp>
-      <p:sp>
-        <p:nvSpPr>
-          <p:cNvPr id="3" name="Text 1"/>
-          <p:cNvSpPr txBox="1"/>
-          <p:nvPr/>
-        </p:nvSpPr>
-        <p:spPr>
-          <a:xfrm>
-            <a:off x="457200" y="91440"/>
-            <a:ext cx="8229600" cy="640080"/>
-          </a:xfrm>
-          <a:prstGeom prst="rect">
-            <a:avLst/>
-          </a:prstGeom>
-          <a:noFill/>
-          <a:ln/>
-        </p:spPr>
-        <p:txBody>
-          <a:bodyPr wrap="square" lIns="0" tIns="0" rIns="0" bIns="0" rtlCol="0" anchor="ctr"/>
-          <a:lstStyle/>
-          <a:p>
-            <a:pPr marL="0" indent="0">
-              <a:buNone/>
-            </a:pPr>
-            <a:r>
-              <a:rPr lang="en-US" sz="2600" b="1" dirty="0" err="1">
-                <a:solidFill>
-                  <a:srgbClr val="FFFFFF"/>
-                </a:solidFill>
-              </a:rPr>
-              <a:t>Instalación</a:t>
-            </a:r>
-            <a:endParaRPr lang="en-US" sz="2600" dirty="0"/>
-          </a:p>
-        </p:txBody>
-      </p:sp>
-      <p:sp>
-        <p:nvSpPr>
-          <p:cNvPr id="4" name="Text 2"/>
-          <p:cNvSpPr txBox="1"/>
-          <p:nvPr/>
-        </p:nvSpPr>
-        <p:spPr>
-          <a:xfrm>
-            <a:off x="502919" y="914400"/>
-            <a:ext cx="8288383" cy="3905794"/>
-          </a:xfrm>
-          <a:prstGeom prst="rect">
-            <a:avLst/>
-          </a:prstGeom>
-          <a:noFill/>
-          <a:ln w="12700">
-            <a:solidFill>
-              <a:srgbClr val="D5DDE6"/>
-            </a:solidFill>
-          </a:ln>
-        </p:spPr>
-        <p:txBody>
-          <a:bodyPr wrap="square" rtlCol="0" anchor="t"/>
-          <a:lstStyle/>
-          <a:p>
-            <a:pPr marL="342900" indent="-342900">
-              <a:buSzPct val="100000"/>
-              <a:buFontTx/>
-              <a:buChar char="•"/>
-            </a:pPr>
-            <a:r>
-              <a:rPr lang="es-ES" sz="2000" dirty="0">
-                <a:solidFill>
-                  <a:srgbClr val="4A5568"/>
-                </a:solidFill>
-              </a:rPr>
-              <a:t>Ruta de instalación</a:t>
-            </a:r>
-          </a:p>
-          <a:p>
-            <a:pPr marL="800100" lvl="1" indent="-342900">
-              <a:buSzPct val="100000"/>
-              <a:buFontTx/>
-              <a:buChar char="•"/>
-            </a:pPr>
-            <a:r>
-              <a:rPr lang="en-US" sz="2000" dirty="0">
-                <a:hlinkClick r:id="rId3"/>
-              </a:rPr>
-              <a:t>https://sumo.dlr.de/docs/Downloads.php</a:t>
-            </a:r>
-            <a:endParaRPr lang="en-US" sz="2000" dirty="0"/>
-          </a:p>
-          <a:p>
-            <a:pPr marL="342900" indent="-342900">
-              <a:buSzPct val="100000"/>
-              <a:buFontTx/>
-              <a:buChar char="•"/>
-            </a:pPr>
-            <a:endParaRPr lang="en-US" sz="2000" dirty="0"/>
-          </a:p>
-          <a:p>
-            <a:pPr marL="342900" indent="-342900">
-              <a:buSzPct val="100000"/>
-              <a:buFontTx/>
-              <a:buChar char="•"/>
-            </a:pPr>
-            <a:r>
-              <a:rPr lang="en-US" sz="2000" dirty="0"/>
-              <a:t>Windows</a:t>
-            </a:r>
-          </a:p>
-          <a:p>
-            <a:pPr marL="800100" lvl="1" indent="-342900">
-              <a:buSzPct val="100000"/>
-              <a:buFontTx/>
-              <a:buChar char="•"/>
-            </a:pPr>
-            <a:r>
-              <a:rPr lang="en-US" sz="2000" dirty="0" err="1"/>
-              <a:t>Instalador</a:t>
-            </a:r>
-            <a:r>
-              <a:rPr lang="en-US" sz="2000" dirty="0"/>
-              <a:t> </a:t>
-            </a:r>
-            <a:r>
-              <a:rPr lang="en-US" sz="2000" dirty="0" err="1"/>
-              <a:t>msi</a:t>
-            </a:r>
-            <a:endParaRPr lang="en-US" sz="2000" dirty="0"/>
-          </a:p>
-          <a:p>
-            <a:pPr marL="800100" lvl="1" indent="-342900">
-              <a:buSzPct val="100000"/>
-              <a:buFontTx/>
-              <a:buChar char="•"/>
-            </a:pPr>
-            <a:r>
-              <a:rPr lang="en-US" sz="2000" dirty="0"/>
-              <a:t>Zip:</a:t>
-            </a:r>
-          </a:p>
-          <a:p>
-            <a:pPr marL="1257300" lvl="2" indent="-342900">
-              <a:buSzPct val="100000"/>
-              <a:buFontTx/>
-              <a:buChar char="•"/>
-            </a:pPr>
-            <a:r>
-              <a:rPr lang="en-US" sz="2000" dirty="0" err="1"/>
-              <a:t>Descomprimir</a:t>
-            </a:r>
-            <a:r>
-              <a:rPr lang="en-US" sz="2000" dirty="0"/>
-              <a:t> </a:t>
-            </a:r>
-            <a:r>
-              <a:rPr lang="en-US" sz="2000" dirty="0" err="1"/>
-              <a:t>en</a:t>
-            </a:r>
-            <a:r>
-              <a:rPr lang="en-US" sz="2000" dirty="0"/>
-              <a:t> un </a:t>
-            </a:r>
-            <a:r>
-              <a:rPr lang="en-US" sz="2000" dirty="0" err="1"/>
-              <a:t>ruta</a:t>
-            </a:r>
-            <a:r>
-              <a:rPr lang="en-US" sz="2000" dirty="0"/>
-              <a:t> </a:t>
-            </a:r>
-          </a:p>
-          <a:p>
-            <a:pPr marL="1257300" lvl="2" indent="-342900">
-              <a:buSzPct val="100000"/>
-              <a:buFontTx/>
-              <a:buChar char="•"/>
-            </a:pPr>
-            <a:r>
-              <a:rPr lang="es-ES" sz="2000" dirty="0"/>
-              <a:t>SUMO_HOME=C:\Proyectos\01_SUMO\sumo-1.28.0</a:t>
-            </a:r>
-          </a:p>
-          <a:p>
-            <a:pPr marL="342900" indent="-342900">
-              <a:buSzPct val="100000"/>
-              <a:buFontTx/>
-              <a:buChar char="•"/>
-            </a:pPr>
-            <a:r>
-              <a:rPr lang="es-ES" sz="2000" dirty="0"/>
-              <a:t>Linux</a:t>
-            </a:r>
-          </a:p>
-          <a:p>
-            <a:pPr marL="800100" lvl="1" indent="-342900">
-              <a:buSzPct val="100000"/>
-              <a:buFontTx/>
-              <a:buChar char="•"/>
-            </a:pPr>
-            <a:r>
-              <a:rPr lang="es-ES" sz="2000" b="0" i="0" dirty="0">
-                <a:effectLst/>
-                <a:latin typeface="SFMono-Regular"/>
-              </a:rPr>
-              <a:t>sudo </a:t>
-            </a:r>
-            <a:r>
-              <a:rPr lang="es-ES" sz="2000" b="0" i="0" dirty="0" err="1">
-                <a:effectLst/>
-                <a:latin typeface="SFMono-Regular"/>
-              </a:rPr>
-              <a:t>add-apt-repository</a:t>
-            </a:r>
-            <a:r>
-              <a:rPr lang="es-ES" sz="2000" b="0" i="0" dirty="0">
-                <a:effectLst/>
-                <a:latin typeface="SFMono-Regular"/>
-              </a:rPr>
-              <a:t> </a:t>
-            </a:r>
-            <a:r>
-              <a:rPr lang="es-ES" sz="2000" b="0" i="0" dirty="0" err="1">
-                <a:effectLst/>
-                <a:latin typeface="SFMono-Regular"/>
-              </a:rPr>
-              <a:t>ppa:sumo</a:t>
-            </a:r>
-            <a:r>
-              <a:rPr lang="es-ES" sz="2000" b="0" i="0" dirty="0">
-                <a:effectLst/>
-                <a:latin typeface="SFMono-Regular"/>
-              </a:rPr>
-              <a:t>/</a:t>
-            </a:r>
-            <a:r>
-              <a:rPr lang="es-ES" sz="2000" b="0" i="0" dirty="0" err="1">
-                <a:effectLst/>
-                <a:latin typeface="SFMono-Regular"/>
-              </a:rPr>
-              <a:t>stable</a:t>
-            </a:r>
-            <a:r>
-              <a:rPr lang="es-ES" sz="2000" b="0" i="0" dirty="0">
-                <a:effectLst/>
-                <a:latin typeface="SFMono-Regular"/>
-              </a:rPr>
-              <a:t> </a:t>
-            </a:r>
-          </a:p>
-          <a:p>
-            <a:pPr marL="800100" lvl="1" indent="-342900">
-              <a:buSzPct val="100000"/>
-              <a:buFontTx/>
-              <a:buChar char="•"/>
-            </a:pPr>
-            <a:r>
-              <a:rPr lang="es-ES" sz="2000" b="0" i="0" dirty="0">
-                <a:effectLst/>
-                <a:latin typeface="SFMono-Regular"/>
-              </a:rPr>
-              <a:t>sudo </a:t>
-            </a:r>
-            <a:r>
-              <a:rPr lang="es-ES" sz="2000" b="0" i="0" dirty="0" err="1">
-                <a:effectLst/>
-                <a:latin typeface="SFMono-Regular"/>
-              </a:rPr>
-              <a:t>apt-get</a:t>
-            </a:r>
-            <a:r>
-              <a:rPr lang="es-ES" sz="2000" b="0" i="0" dirty="0">
-                <a:effectLst/>
-                <a:latin typeface="SFMono-Regular"/>
-              </a:rPr>
-              <a:t> </a:t>
-            </a:r>
-            <a:r>
-              <a:rPr lang="es-ES" sz="2000" b="0" i="0" dirty="0" err="1">
-                <a:effectLst/>
-                <a:latin typeface="SFMono-Regular"/>
-              </a:rPr>
-              <a:t>update</a:t>
-            </a:r>
-            <a:r>
-              <a:rPr lang="es-ES" sz="2000" b="0" i="0" dirty="0">
-                <a:effectLst/>
-                <a:latin typeface="SFMono-Regular"/>
-              </a:rPr>
-              <a:t> sudo </a:t>
-            </a:r>
-          </a:p>
-          <a:p>
-            <a:pPr marL="800100" lvl="1" indent="-342900">
-              <a:buSzPct val="100000"/>
-              <a:buFontTx/>
-              <a:buChar char="•"/>
-            </a:pPr>
-            <a:r>
-              <a:rPr lang="es-ES" sz="2000" b="0" i="0" dirty="0" err="1">
-                <a:effectLst/>
-                <a:latin typeface="SFMono-Regular"/>
-              </a:rPr>
-              <a:t>apt-get</a:t>
-            </a:r>
-            <a:r>
-              <a:rPr lang="es-ES" sz="2000" b="0" i="0" dirty="0">
-                <a:effectLst/>
-                <a:latin typeface="SFMono-Regular"/>
-              </a:rPr>
-              <a:t> </a:t>
-            </a:r>
-            <a:r>
-              <a:rPr lang="es-ES" sz="2000" b="0" i="0" dirty="0" err="1">
-                <a:effectLst/>
-                <a:latin typeface="SFMono-Regular"/>
-              </a:rPr>
-              <a:t>install</a:t>
-            </a:r>
-            <a:r>
-              <a:rPr lang="es-ES" sz="2000" b="0" i="0" dirty="0">
-                <a:effectLst/>
-                <a:latin typeface="SFMono-Regular"/>
-              </a:rPr>
-              <a:t> sumo sumo-</a:t>
-            </a:r>
-            <a:r>
-              <a:rPr lang="es-ES" sz="2000" b="0" i="0" dirty="0" err="1">
-                <a:effectLst/>
-                <a:latin typeface="SFMono-Regular"/>
-              </a:rPr>
-              <a:t>tools</a:t>
-            </a:r>
-            <a:r>
-              <a:rPr lang="es-ES" sz="2000" b="0" i="0" dirty="0">
-                <a:effectLst/>
-                <a:latin typeface="SFMono-Regular"/>
-              </a:rPr>
-              <a:t> sumo-</a:t>
-            </a:r>
-            <a:r>
-              <a:rPr lang="es-ES" sz="2000" b="0" i="0" dirty="0" err="1">
-                <a:effectLst/>
-                <a:latin typeface="SFMono-Regular"/>
-              </a:rPr>
-              <a:t>doc</a:t>
-            </a:r>
-            <a:endParaRPr lang="en-US" sz="2000" dirty="0"/>
-          </a:p>
-        </p:txBody>
-      </p:sp>
-      <p:pic>
-        <p:nvPicPr>
-          <p:cNvPr id="6" name="Imagen 5">
-            <a:extLst>
-              <a:ext uri="{FF2B5EF4-FFF2-40B4-BE49-F238E27FC236}">
-                <a16:creationId xmlns:a16="http://schemas.microsoft.com/office/drawing/2014/main" id="{61F00D33-49E3-7C35-E60E-6467A4CABF50}"/>
-              </a:ext>
-            </a:extLst>
-          </p:cNvPr>
-          <p:cNvPicPr>
-            <a:picLocks noChangeAspect="1"/>
-          </p:cNvPicPr>
-          <p:nvPr/>
-        </p:nvPicPr>
-        <p:blipFill>
-          <a:blip r:embed="rId4"/>
-          <a:stretch>
-            <a:fillRect/>
-          </a:stretch>
-        </p:blipFill>
-        <p:spPr>
-          <a:xfrm>
-            <a:off x="8233640" y="42972"/>
-            <a:ext cx="681760" cy="737015"/>
-          </a:xfrm>
-          <a:prstGeom prst="rect">
-            <a:avLst/>
-          </a:prstGeom>
-          <a:solidFill>
-            <a:srgbClr val="F4F7FA"/>
-          </a:solidFill>
-        </p:spPr>
-      </p:pic>
-      <p:sp>
-        <p:nvSpPr>
-          <p:cNvPr id="5" name="Rectángulo 4">
-            <a:extLst>
-              <a:ext uri="{FF2B5EF4-FFF2-40B4-BE49-F238E27FC236}">
-                <a16:creationId xmlns:a16="http://schemas.microsoft.com/office/drawing/2014/main" id="{7B2A0E82-D2A8-4670-C307-8504373B3F12}"/>
-              </a:ext>
-            </a:extLst>
-          </p:cNvPr>
-          <p:cNvSpPr/>
-          <p:nvPr/>
-        </p:nvSpPr>
-        <p:spPr>
-          <a:xfrm>
-            <a:off x="502919" y="914401"/>
-            <a:ext cx="8288383" cy="71846"/>
-          </a:xfrm>
-          <a:prstGeom prst="rect">
-            <a:avLst/>
-          </a:prstGeom>
-          <a:solidFill>
-            <a:srgbClr val="2A9D8F"/>
-          </a:solidFill>
-          <a:ln>
-            <a:solidFill>
-              <a:srgbClr val="2A9D8F"/>
-            </a:solidFill>
-          </a:ln>
-        </p:spPr>
-        <p:style>
-          <a:lnRef idx="1">
-            <a:schemeClr val="accent6"/>
-          </a:lnRef>
-          <a:fillRef idx="3">
-            <a:schemeClr val="accent6"/>
-          </a:fillRef>
-          <a:effectRef idx="2">
-            <a:schemeClr val="accent6"/>
-          </a:effectRef>
-          <a:fontRef idx="minor">
-            <a:schemeClr val="lt1"/>
-          </a:fontRef>
-        </p:style>
-        <p:txBody>
-          <a:bodyPr rtlCol="0" anchor="ctr"/>
-          <a:lstStyle/>
-          <a:p>
-            <a:pPr algn="ctr"/>
-            <a:endParaRPr lang="es-ES"/>
-          </a:p>
-        </p:txBody>
-      </p:sp>
-    </p:spTree>
-    <p:extLst>
-      <p:ext uri="{BB962C8B-B14F-4D97-AF65-F5344CB8AC3E}">
-        <p14:creationId xmlns:p14="http://schemas.microsoft.com/office/powerpoint/2010/main" val="912194059"/>
-      </p:ext>
-    </p:extLst>
-  </p:cSld>
-  <p:clrMapOvr>
-    <a:masterClrMapping/>
-  </p:clrMapOvr>
-</p:sld>
-</file>
-
-<file path=ppt/slides/slide5.xml><?xml version="1.0" encoding="utf-8"?>
 <p:sld xmlns:a="http://schemas.openxmlformats.org/drawingml/2006/main" xmlns:r="http://schemas.openxmlformats.org/officeDocument/2006/relationships" xmlns:p="http://schemas.openxmlformats.org/presentationml/2006/main">
   <p:cSld name="Slide 3">
     <p:bg>
@@ -7855,7 +8750,7 @@
 </p:sld>
 </file>
 
-<file path=ppt/slides/slide6.xml><?xml version="1.0" encoding="utf-8"?>
+<file path=ppt/slides/slide5.xml><?xml version="1.0" encoding="utf-8"?>
 <p:sld xmlns:a="http://schemas.openxmlformats.org/drawingml/2006/main" xmlns:r="http://schemas.openxmlformats.org/officeDocument/2006/relationships" xmlns:p="http://schemas.openxmlformats.org/presentationml/2006/main">
   <p:cSld name="Slide 8">
     <p:bg>
@@ -8252,7 +9147,7 @@
         </p:nvSpPr>
         <p:spPr>
           <a:xfrm>
-            <a:off x="6204857" y="1408176"/>
+            <a:off x="6328954" y="1371600"/>
             <a:ext cx="1851660" cy="2560320"/>
           </a:xfrm>
           <a:prstGeom prst="rect">
@@ -8277,7 +9172,7 @@
         </p:nvSpPr>
         <p:spPr>
           <a:xfrm>
-            <a:off x="6204857" y="1408176"/>
+            <a:off x="6328954" y="1371600"/>
             <a:ext cx="1851660" cy="73152"/>
           </a:xfrm>
           <a:prstGeom prst="rect">
@@ -8302,7 +9197,7 @@
         </p:nvSpPr>
         <p:spPr>
           <a:xfrm>
-            <a:off x="6342017" y="1591056"/>
+            <a:off x="6466114" y="1554480"/>
             <a:ext cx="1577340" cy="548640"/>
           </a:xfrm>
           <a:prstGeom prst="rect">
@@ -8338,7 +9233,7 @@
         </p:nvSpPr>
         <p:spPr>
           <a:xfrm>
-            <a:off x="6342017" y="2185416"/>
+            <a:off x="6466114" y="2148840"/>
             <a:ext cx="1577340" cy="1645920"/>
           </a:xfrm>
           <a:prstGeom prst="rect">
@@ -8407,7 +9302,7 @@
 </p:sld>
 </file>
 
-<file path=ppt/slides/slide7.xml><?xml version="1.0" encoding="utf-8"?>
+<file path=ppt/slides/slide6.xml><?xml version="1.0" encoding="utf-8"?>
 <p:sld xmlns:a="http://schemas.openxmlformats.org/drawingml/2006/main" xmlns:r="http://schemas.openxmlformats.org/officeDocument/2006/relationships" xmlns:p="http://schemas.openxmlformats.org/presentationml/2006/main">
   <p:cSld name="Slide 4">
     <p:bg>
@@ -9291,7 +10186,7 @@
 </p:sld>
 </file>
 
-<file path=ppt/slides/slide8.xml><?xml version="1.0" encoding="utf-8"?>
+<file path=ppt/slides/slide7.xml><?xml version="1.0" encoding="utf-8"?>
 <p:sld xmlns:a="http://schemas.openxmlformats.org/drawingml/2006/main" xmlns:r="http://schemas.openxmlformats.org/officeDocument/2006/relationships" xmlns:p="http://schemas.openxmlformats.org/presentationml/2006/main">
   <p:cSld name="Slide 5">
     <p:bg>
@@ -9380,7 +10275,7 @@
         </p:nvSpPr>
         <p:spPr>
           <a:xfrm>
-            <a:off x="457200" y="1645920"/>
+            <a:off x="461240" y="1110343"/>
             <a:ext cx="1463040" cy="822960"/>
           </a:xfrm>
           <a:prstGeom prst="rect">
@@ -9405,7 +10300,7 @@
         </p:nvSpPr>
         <p:spPr>
           <a:xfrm>
-            <a:off x="457200" y="1645920"/>
+            <a:off x="461240" y="1110343"/>
             <a:ext cx="1463040" cy="822960"/>
           </a:xfrm>
           <a:prstGeom prst="rect">
@@ -9441,7 +10336,7 @@
         </p:nvSpPr>
         <p:spPr>
           <a:xfrm>
-            <a:off x="457200" y="2606040"/>
+            <a:off x="461240" y="2070463"/>
             <a:ext cx="1463040" cy="914400"/>
           </a:xfrm>
           <a:prstGeom prst="rect">
@@ -9477,7 +10372,7 @@
         </p:nvSpPr>
         <p:spPr>
           <a:xfrm>
-            <a:off x="2034540" y="1645920"/>
+            <a:off x="2038580" y="1110343"/>
             <a:ext cx="1463040" cy="822960"/>
           </a:xfrm>
           <a:prstGeom prst="rect">
@@ -9502,7 +10397,7 @@
         </p:nvSpPr>
         <p:spPr>
           <a:xfrm>
-            <a:off x="2034540" y="1645920"/>
+            <a:off x="2038580" y="1110343"/>
             <a:ext cx="1463040" cy="822960"/>
           </a:xfrm>
           <a:prstGeom prst="rect">
@@ -9538,7 +10433,7 @@
         </p:nvSpPr>
         <p:spPr>
           <a:xfrm>
-            <a:off x="2034540" y="2606040"/>
+            <a:off x="2038580" y="2070463"/>
             <a:ext cx="1463040" cy="914400"/>
           </a:xfrm>
           <a:prstGeom prst="rect">
@@ -9574,7 +10469,7 @@
         </p:nvSpPr>
         <p:spPr>
           <a:xfrm>
-            <a:off x="3611880" y="1645920"/>
+            <a:off x="3615920" y="1110343"/>
             <a:ext cx="1463040" cy="822960"/>
           </a:xfrm>
           <a:prstGeom prst="rect">
@@ -9599,7 +10494,7 @@
         </p:nvSpPr>
         <p:spPr>
           <a:xfrm>
-            <a:off x="3611880" y="1645920"/>
+            <a:off x="3615920" y="1110343"/>
             <a:ext cx="1463040" cy="822960"/>
           </a:xfrm>
           <a:prstGeom prst="rect">
@@ -9635,7 +10530,7 @@
         </p:nvSpPr>
         <p:spPr>
           <a:xfrm>
-            <a:off x="3611880" y="2606040"/>
+            <a:off x="3615920" y="2070463"/>
             <a:ext cx="1463040" cy="914400"/>
           </a:xfrm>
           <a:prstGeom prst="rect">
@@ -9671,7 +10566,7 @@
         </p:nvSpPr>
         <p:spPr>
           <a:xfrm>
-            <a:off x="5189220" y="1645920"/>
+            <a:off x="5193260" y="1110343"/>
             <a:ext cx="1463040" cy="822960"/>
           </a:xfrm>
           <a:prstGeom prst="rect">
@@ -9696,7 +10591,7 @@
         </p:nvSpPr>
         <p:spPr>
           <a:xfrm>
-            <a:off x="5189220" y="1645920"/>
+            <a:off x="5193260" y="1110343"/>
             <a:ext cx="1463040" cy="822960"/>
           </a:xfrm>
           <a:prstGeom prst="rect">
@@ -9732,7 +10627,7 @@
         </p:nvSpPr>
         <p:spPr>
           <a:xfrm>
-            <a:off x="5189220" y="2606040"/>
+            <a:off x="5193260" y="2070463"/>
             <a:ext cx="1463040" cy="914400"/>
           </a:xfrm>
           <a:prstGeom prst="rect">
@@ -9768,7 +10663,7 @@
         </p:nvSpPr>
         <p:spPr>
           <a:xfrm>
-            <a:off x="6766560" y="1645920"/>
+            <a:off x="6770600" y="1110343"/>
             <a:ext cx="1463040" cy="822960"/>
           </a:xfrm>
           <a:prstGeom prst="rect">
@@ -9793,7 +10688,7 @@
         </p:nvSpPr>
         <p:spPr>
           <a:xfrm>
-            <a:off x="6766560" y="1645920"/>
+            <a:off x="6770600" y="1110343"/>
             <a:ext cx="1463040" cy="822960"/>
           </a:xfrm>
           <a:prstGeom prst="rect">
@@ -9829,7 +10724,7 @@
         </p:nvSpPr>
         <p:spPr>
           <a:xfrm>
-            <a:off x="6766560" y="2606040"/>
+            <a:off x="6770600" y="2070463"/>
             <a:ext cx="1463040" cy="914400"/>
           </a:xfrm>
           <a:prstGeom prst="rect">
@@ -9846,12 +10741,36 @@
               <a:buNone/>
             </a:pPr>
             <a:r>
+              <a:rPr lang="en-US" sz="1300" dirty="0" err="1">
+                <a:solidFill>
+                  <a:srgbClr val="4A5568"/>
+                </a:solidFill>
+              </a:rPr>
+              <a:t>Salidas</a:t>
+            </a:r>
+            <a:r>
               <a:rPr lang="en-US" sz="1300" dirty="0">
                 <a:solidFill>
                   <a:srgbClr val="4A5568"/>
                 </a:solidFill>
               </a:rPr>
-              <a:t>Salidas XML o TraCI</a:t>
+              <a:t> </a:t>
+            </a:r>
+            <a:r>
+              <a:rPr lang="en-US" sz="1300" dirty="0" err="1">
+                <a:solidFill>
+                  <a:srgbClr val="4A5568"/>
+                </a:solidFill>
+              </a:rPr>
+              <a:t>XML,Parquet</a:t>
+            </a:r>
+            <a:r>
+              <a:rPr lang="en-US" sz="1300" dirty="0">
+                <a:solidFill>
+                  <a:srgbClr val="4A5568"/>
+                </a:solidFill>
+              </a:rPr>
+              <a:t> o TraCI</a:t>
             </a:r>
             <a:endParaRPr lang="en-US" sz="1300" dirty="0"/>
           </a:p>
@@ -9890,7 +10809,275 @@
           </a:solidFill>
         </p:spPr>
       </p:pic>
+      <p:sp>
+        <p:nvSpPr>
+          <p:cNvPr id="20" name="Text 4">
+            <a:extLst>
+              <a:ext uri="{FF2B5EF4-FFF2-40B4-BE49-F238E27FC236}">
+                <a16:creationId xmlns:a16="http://schemas.microsoft.com/office/drawing/2014/main" id="{885F0D1C-15F9-D7DE-9445-8997DE4AB089}"/>
+              </a:ext>
+            </a:extLst>
+          </p:cNvPr>
+          <p:cNvSpPr txBox="1"/>
+          <p:nvPr/>
+        </p:nvSpPr>
+        <p:spPr>
+          <a:xfrm>
+            <a:off x="457200" y="2984863"/>
+            <a:ext cx="7776440" cy="914400"/>
+          </a:xfrm>
+          <a:prstGeom prst="rect">
+            <a:avLst/>
+          </a:prstGeom>
+          <a:noFill/>
+          <a:ln/>
+        </p:spPr>
+        <p:txBody>
+          <a:bodyPr wrap="square" rtlCol="0" anchor="t"/>
+          <a:lstStyle/>
+          <a:p>
+            <a:pPr marL="0" indent="0">
+              <a:buNone/>
+            </a:pPr>
+            <a:r>
+              <a:rPr lang="en-US" sz="1300" dirty="0" err="1">
+                <a:solidFill>
+                  <a:srgbClr val="4A5568"/>
+                </a:solidFill>
+              </a:rPr>
+              <a:t>Otros</a:t>
+            </a:r>
+            <a:r>
+              <a:rPr lang="en-US" sz="1300" dirty="0">
+                <a:solidFill>
+                  <a:srgbClr val="4A5568"/>
+                </a:solidFill>
+              </a:rPr>
+              <a:t> </a:t>
+            </a:r>
+            <a:r>
+              <a:rPr lang="en-US" sz="1300" dirty="0" err="1">
+                <a:solidFill>
+                  <a:srgbClr val="4A5568"/>
+                </a:solidFill>
+              </a:rPr>
+              <a:t>datos</a:t>
+            </a:r>
+            <a:r>
+              <a:rPr lang="en-US" sz="1300" dirty="0">
+                <a:solidFill>
+                  <a:srgbClr val="4A5568"/>
+                </a:solidFill>
+              </a:rPr>
+              <a:t> que </a:t>
+            </a:r>
+            <a:r>
+              <a:rPr lang="en-US" sz="1300" dirty="0" err="1">
+                <a:solidFill>
+                  <a:srgbClr val="4A5568"/>
+                </a:solidFill>
+              </a:rPr>
+              <a:t>podemos</a:t>
+            </a:r>
+            <a:r>
+              <a:rPr lang="en-US" sz="1300" dirty="0">
+                <a:solidFill>
+                  <a:srgbClr val="4A5568"/>
+                </a:solidFill>
+              </a:rPr>
+              <a:t> </a:t>
+            </a:r>
+            <a:r>
+              <a:rPr lang="en-US" sz="1300" dirty="0" err="1">
+                <a:solidFill>
+                  <a:srgbClr val="4A5568"/>
+                </a:solidFill>
+              </a:rPr>
+              <a:t>añadir</a:t>
+            </a:r>
+            <a:r>
+              <a:rPr lang="en-US" sz="1300" dirty="0">
+                <a:solidFill>
+                  <a:srgbClr val="4A5568"/>
+                </a:solidFill>
+              </a:rPr>
+              <a:t>:</a:t>
+            </a:r>
+          </a:p>
+          <a:p>
+            <a:pPr marL="285750" indent="-285750">
+              <a:buFontTx/>
+              <a:buChar char="-"/>
+            </a:pPr>
+            <a:r>
+              <a:rPr lang="en-US" sz="1300" dirty="0">
+                <a:solidFill>
+                  <a:srgbClr val="4A5568"/>
+                </a:solidFill>
+              </a:rPr>
+              <a:t>Matrices </a:t>
+            </a:r>
+            <a:r>
+              <a:rPr lang="en-US" sz="1300" dirty="0" err="1">
+                <a:solidFill>
+                  <a:srgbClr val="4A5568"/>
+                </a:solidFill>
+              </a:rPr>
+              <a:t>origen-destino</a:t>
+            </a:r>
+            <a:endParaRPr lang="en-US" sz="1300" dirty="0">
+              <a:solidFill>
+                <a:srgbClr val="4A5568"/>
+              </a:solidFill>
+            </a:endParaRPr>
+          </a:p>
+          <a:p>
+            <a:pPr marL="285750" indent="-285750">
+              <a:buFontTx/>
+              <a:buChar char="-"/>
+            </a:pPr>
+            <a:endParaRPr lang="en-US" sz="1300" dirty="0">
+              <a:solidFill>
+                <a:srgbClr val="4A5568"/>
+              </a:solidFill>
+            </a:endParaRPr>
+          </a:p>
+          <a:p>
+            <a:pPr marL="0" indent="0" algn="ctr">
+              <a:buNone/>
+            </a:pPr>
+            <a:endParaRPr lang="en-US" sz="1300" dirty="0"/>
+          </a:p>
+        </p:txBody>
+      </p:sp>
     </p:spTree>
+  </p:cSld>
+  <p:clrMapOvr>
+    <a:masterClrMapping/>
+  </p:clrMapOvr>
+</p:sld>
+</file>
+
+<file path=ppt/slides/slide8.xml><?xml version="1.0" encoding="utf-8"?>
+<p:sld xmlns:a="http://schemas.openxmlformats.org/drawingml/2006/main" xmlns:r="http://schemas.openxmlformats.org/officeDocument/2006/relationships" xmlns:p="http://schemas.openxmlformats.org/presentationml/2006/main">
+  <p:cSld>
+    <p:spTree>
+      <p:nvGrpSpPr>
+        <p:cNvPr id="1" name=""/>
+        <p:cNvGrpSpPr/>
+        <p:nvPr/>
+      </p:nvGrpSpPr>
+      <p:grpSpPr>
+        <a:xfrm>
+          <a:off x="0" y="0"/>
+          <a:ext cx="0" cy="0"/>
+          <a:chOff x="0" y="0"/>
+          <a:chExt cx="0" cy="0"/>
+        </a:xfrm>
+      </p:grpSpPr>
+      <p:sp>
+        <p:nvSpPr>
+          <p:cNvPr id="2" name="Shape 0"/>
+          <p:cNvSpPr/>
+          <p:nvPr/>
+        </p:nvSpPr>
+        <p:spPr>
+          <a:xfrm>
+            <a:off x="0" y="0"/>
+            <a:ext cx="9144000" cy="822960"/>
+          </a:xfrm>
+          <a:prstGeom prst="rect">
+            <a:avLst/>
+          </a:prstGeom>
+          <a:solidFill>
+            <a:srgbClr val="1F3A5F"/>
+          </a:solidFill>
+          <a:ln/>
+        </p:spPr>
+      </p:sp>
+      <p:sp>
+        <p:nvSpPr>
+          <p:cNvPr id="3" name="Text 1"/>
+          <p:cNvSpPr txBox="1"/>
+          <p:nvPr/>
+        </p:nvSpPr>
+        <p:spPr>
+          <a:xfrm>
+            <a:off x="457200" y="91440"/>
+            <a:ext cx="8229600" cy="640080"/>
+          </a:xfrm>
+          <a:prstGeom prst="rect">
+            <a:avLst/>
+          </a:prstGeom>
+          <a:noFill/>
+          <a:ln/>
+        </p:spPr>
+        <p:txBody>
+          <a:bodyPr wrap="square" lIns="0" tIns="0" rIns="0" bIns="0" rtlCol="0" anchor="ctr"/>
+          <a:lstStyle/>
+          <a:p>
+            <a:pPr marL="0" indent="0">
+              <a:buNone/>
+            </a:pPr>
+            <a:r>
+              <a:rPr lang="en-US" sz="2600" b="1" dirty="0" err="1">
+                <a:solidFill>
+                  <a:srgbClr val="FFFFFF"/>
+                </a:solidFill>
+              </a:rPr>
+              <a:t>Visualización</a:t>
+            </a:r>
+            <a:r>
+              <a:rPr lang="en-US" sz="2600" b="1" dirty="0">
+                <a:solidFill>
+                  <a:srgbClr val="FFFFFF"/>
+                </a:solidFill>
+              </a:rPr>
+              <a:t> Twin</a:t>
+            </a:r>
+            <a:endParaRPr lang="en-US" sz="2600" dirty="0"/>
+          </a:p>
+        </p:txBody>
+      </p:sp>
+      <p:pic>
+        <p:nvPicPr>
+          <p:cNvPr id="16" name="Imagen 15">
+            <a:extLst>
+              <a:ext uri="{FF2B5EF4-FFF2-40B4-BE49-F238E27FC236}">
+                <a16:creationId xmlns:a16="http://schemas.microsoft.com/office/drawing/2014/main" id="{E2D69B0D-FB73-B537-BDAC-6C0FD2636649}"/>
+              </a:ext>
+            </a:extLst>
+          </p:cNvPr>
+          <p:cNvPicPr>
+            <a:picLocks noChangeAspect="1"/>
+          </p:cNvPicPr>
+          <p:nvPr/>
+        </p:nvPicPr>
+        <p:blipFill>
+          <a:blip r:embed="rId3"/>
+          <a:stretch>
+            <a:fillRect/>
+          </a:stretch>
+        </p:blipFill>
+        <p:spPr>
+          <a:xfrm>
+            <a:off x="8233640" y="42972"/>
+            <a:ext cx="681760" cy="737015"/>
+          </a:xfrm>
+          <a:prstGeom prst="rect">
+            <a:avLst/>
+          </a:prstGeom>
+          <a:solidFill>
+            <a:srgbClr val="F4F7FA"/>
+          </a:solidFill>
+        </p:spPr>
+      </p:pic>
+    </p:spTree>
+    <p:extLst>
+      <p:ext uri="{BB962C8B-B14F-4D97-AF65-F5344CB8AC3E}">
+        <p14:creationId xmlns:p14="http://schemas.microsoft.com/office/powerpoint/2010/main" val="106487102"/>
+      </p:ext>
+    </p:extLst>
   </p:cSld>
   <p:clrMapOvr>
     <a:masterClrMapping/>
@@ -10196,7 +11383,7 @@
         <p:spPr>
           <a:xfrm>
             <a:off x="3429000" y="2057400"/>
-            <a:ext cx="2286000" cy="2194560"/>
+            <a:ext cx="2286000" cy="1580606"/>
           </a:xfrm>
           <a:prstGeom prst="rect">
             <a:avLst/>
@@ -10217,8 +11404,45 @@
                   <a:srgbClr val="4A5568"/>
                 </a:solidFill>
               </a:rPr>
-              <a:t>Casco Antiguo, Ensanches y rondas de circunvalación.</a:t>
-            </a:r>
+              <a:t>Pamplona, barrios y </a:t>
+            </a:r>
+            <a:r>
+              <a:rPr lang="en-US" sz="1400" dirty="0" err="1">
+                <a:solidFill>
+                  <a:srgbClr val="4A5568"/>
+                </a:solidFill>
+              </a:rPr>
+              <a:t>rondas</a:t>
+            </a:r>
+            <a:r>
+              <a:rPr lang="en-US" sz="1400" dirty="0">
+                <a:solidFill>
+                  <a:srgbClr val="4A5568"/>
+                </a:solidFill>
+              </a:rPr>
+              <a:t> de </a:t>
+            </a:r>
+            <a:r>
+              <a:rPr lang="en-US" sz="1400" dirty="0" err="1">
+                <a:solidFill>
+                  <a:srgbClr val="4A5568"/>
+                </a:solidFill>
+              </a:rPr>
+              <a:t>circunvalación</a:t>
+            </a:r>
+            <a:r>
+              <a:rPr lang="en-US" sz="1400" dirty="0">
+                <a:solidFill>
+                  <a:srgbClr val="4A5568"/>
+                </a:solidFill>
+              </a:rPr>
+              <a:t>.</a:t>
+            </a:r>
+          </a:p>
+          <a:p>
+            <a:pPr marL="0" indent="0">
+              <a:buNone/>
+            </a:pPr>
             <a:endParaRPr lang="en-US" sz="1400" dirty="0"/>
           </a:p>
         </p:txBody>
